--- a/docs/final_submission/Group7_Parallel_KMeans_Final_Presentation.pptx
+++ b/docs/final_submission/Group7_Parallel_KMeans_Final_Presentation.pptx
@@ -4,32 +4,35 @@
   <p:sldMasterIdLst>
     <p:sldMasterId id="2147483648" r:id="rId1"/>
   </p:sldMasterIdLst>
+  <p:notesMasterIdLst>
+    <p:notesMasterId r:id="rId25"/>
+  </p:notesMasterIdLst>
   <p:sldIdLst>
-    <p:sldId id="256" r:id="rId7"/>
-    <p:sldId id="257" r:id="rId8"/>
-    <p:sldId id="258" r:id="rId9"/>
-    <p:sldId id="259" r:id="rId10"/>
-    <p:sldId id="260" r:id="rId11"/>
-    <p:sldId id="261" r:id="rId12"/>
-    <p:sldId id="271" r:id="rId23"/>
-    <p:sldId id="262" r:id="rId13"/>
-    <p:sldId id="272" r:id="rId24"/>
-    <p:sldId id="273" r:id="rId25"/>
-    <p:sldId id="274" r:id="rId26"/>
-    <p:sldId id="275" r:id="rId27"/>
+    <p:sldId id="256" r:id="rId2"/>
+    <p:sldId id="257" r:id="rId3"/>
+    <p:sldId id="258" r:id="rId4"/>
+    <p:sldId id="259" r:id="rId5"/>
+    <p:sldId id="260" r:id="rId6"/>
+    <p:sldId id="261" r:id="rId7"/>
+    <p:sldId id="271" r:id="rId8"/>
+    <p:sldId id="262" r:id="rId9"/>
+    <p:sldId id="272" r:id="rId10"/>
+    <p:sldId id="273" r:id="rId11"/>
+    <p:sldId id="274" r:id="rId12"/>
+    <p:sldId id="275" r:id="rId13"/>
     <p:sldId id="263" r:id="rId14"/>
     <p:sldId id="264" r:id="rId15"/>
     <p:sldId id="265" r:id="rId16"/>
-    <p:sldId id="276" r:id="rId28"/>
-    <p:sldId id="266" r:id="rId17"/>
-    <p:sldId id="267" r:id="rId18"/>
-    <p:sldId id="268" r:id="rId19"/>
-    <p:sldId id="277" r:id="rId29"/>
-    <p:sldId id="269" r:id="rId20"/>
-    <p:sldId id="278" r:id="rId30"/>
-    <p:sldId id="270" r:id="rId21"/>
+    <p:sldId id="276" r:id="rId17"/>
+    <p:sldId id="266" r:id="rId18"/>
+    <p:sldId id="267" r:id="rId19"/>
+    <p:sldId id="268" r:id="rId20"/>
+    <p:sldId id="277" r:id="rId21"/>
+    <p:sldId id="269" r:id="rId22"/>
+    <p:sldId id="278" r:id="rId23"/>
+    <p:sldId id="270" r:id="rId24"/>
   </p:sldIdLst>
-  <p:sldSz cx="12191695" cy="6858000" type="screen4x3"/>
+  <p:sldSz cx="12192000" cy="6858000"/>
   <p:notesSz cx="6858000" cy="9144000"/>
   <p:defaultTextStyle>
     <a:defPPr>
@@ -126,11 +129,27 @@
       </a:defRPr>
     </a:lvl9pPr>
   </p:defaultTextStyle>
+  <p:extLst>
+    <p:ext uri="{EFAFB233-063F-42B5-8137-9DF3F51BA10A}">
+      <p15:sldGuideLst xmlns:p15="http://schemas.microsoft.com/office/powerpoint/2012/main">
+        <p15:guide id="1" orient="horz" pos="2160">
+          <p15:clr>
+            <a:srgbClr val="A4A3A4"/>
+          </p15:clr>
+        </p15:guide>
+        <p15:guide id="2" pos="2880">
+          <p15:clr>
+            <a:srgbClr val="A4A3A4"/>
+          </p15:clr>
+        </p15:guide>
+      </p15:sldGuideLst>
+    </p:ext>
+  </p:extLst>
 </p:presentation>
 </file>
 
 <file path=ppt/notesMasters/notesMaster1.xml><?xml version="1.0" encoding="utf-8"?>
-<p:notesMaster xmlns:a="http://schemas.openxmlformats.org/drawingml/2006/main" xmlns:p="http://schemas.openxmlformats.org/presentationml/2006/main" xmlns:r="http://schemas.openxmlformats.org/officeDocument/2006/relationships">
+<p:notesMaster xmlns:a="http://schemas.openxmlformats.org/drawingml/2006/main" xmlns:r="http://schemas.openxmlformats.org/officeDocument/2006/relationships" xmlns:p="http://schemas.openxmlformats.org/presentationml/2006/main">
   <p:cSld>
     <p:bg>
       <p:bgRef idx="1001">
@@ -151,241 +170,16 @@
           <a:chExt cx="0" cy="0"/>
         </a:xfrm>
       </p:grpSpPr>
-      <p:sp>
-        <p:nvSpPr>
-          <p:cNvPr id="2" name="Header Placeholder 1"/>
-          <p:cNvSpPr>
-            <a:spLocks noGrp="1"/>
-          </p:cNvSpPr>
-          <p:nvPr>
-            <p:ph type="hdr" sz="quarter"/>
-          </p:nvPr>
-        </p:nvSpPr>
-        <p:spPr>
-          <a:xfrm>
-            <a:off x="0" y="0"/>
-            <a:ext cx="2971800" cy="457200"/>
-          </a:xfrm>
-          <a:prstGeom prst="rect">
-            <a:avLst/>
-          </a:prstGeom>
-        </p:spPr>
-        <p:txBody>
-          <a:bodyPr vert="horz" lIns="91440" tIns="45720" rIns="91440" bIns="45720" rtlCol="0"/>
-          <a:lstStyle>
-            <a:lvl1pPr algn="l">
-              <a:defRPr sz="1200"/>
-            </a:lvl1pPr>
-          </a:lstStyle>
-          <a:p>
-            <a:endParaRPr lang="en-US"/>
-          </a:p>
-        </p:txBody>
-      </p:sp>
-      <p:sp>
-        <p:nvSpPr>
-          <p:cNvPr id="3" name="Date Placeholder 2"/>
-          <p:cNvSpPr>
-            <a:spLocks noGrp="1"/>
-          </p:cNvSpPr>
-          <p:nvPr>
-            <p:ph type="dt" idx="1"/>
-          </p:nvPr>
-        </p:nvSpPr>
-        <p:spPr>
-          <a:xfrm>
-            <a:off x="3884613" y="0"/>
-            <a:ext cx="2971800" cy="457200"/>
-          </a:xfrm>
-          <a:prstGeom prst="rect">
-            <a:avLst/>
-          </a:prstGeom>
-        </p:spPr>
-        <p:txBody>
-          <a:bodyPr vert="horz" lIns="91440" tIns="45720" rIns="91440" bIns="45720" rtlCol="0"/>
-          <a:lstStyle>
-            <a:lvl1pPr algn="r">
-              <a:defRPr sz="1200"/>
-            </a:lvl1pPr>
-          </a:lstStyle>
-          <a:p>
-            <a:fld id="{0F89C1C7-3DCD-1040-A9CF-14679D8B5DDD}" type="datetimeFigureOut">
-              <a:rPr lang="en-US" smtClean="0"/>
-              <a:t>10/17/16</a:t>
-            </a:fld>
-            <a:endParaRPr lang="en-US"/>
-          </a:p>
-        </p:txBody>
-      </p:sp>
-      <p:sp>
-        <p:nvSpPr>
-          <p:cNvPr id="4" name="Slide Image Placeholder 3"/>
-          <p:cNvSpPr>
-            <a:spLocks noGrp="1" noRot="1" noChangeAspect="1"/>
-          </p:cNvSpPr>
-          <p:nvPr>
-            <p:ph type="sldImg" idx="2"/>
-          </p:nvPr>
-        </p:nvSpPr>
-        <p:spPr>
-          <a:xfrm>
-            <a:off x="1143000" y="685800"/>
-            <a:ext cx="4572000" cy="3429000"/>
-          </a:xfrm>
-          <a:prstGeom prst="rect">
-            <a:avLst/>
-          </a:prstGeom>
-          <a:noFill/>
-          <a:ln w="12700">
-            <a:solidFill>
-              <a:prstClr val="black"/>
-            </a:solidFill>
-          </a:ln>
-        </p:spPr>
-        <p:txBody>
-          <a:bodyPr vert="horz" lIns="91440" tIns="45720" rIns="91440" bIns="45720" rtlCol="0" anchor="ctr"/>
-          <a:lstStyle/>
-          <a:p>
-            <a:endParaRPr lang="en-US"/>
-          </a:p>
-        </p:txBody>
-      </p:sp>
-      <p:sp>
-        <p:nvSpPr>
-          <p:cNvPr id="5" name="Notes Placeholder 4"/>
-          <p:cNvSpPr>
-            <a:spLocks noGrp="1"/>
-          </p:cNvSpPr>
-          <p:nvPr>
-            <p:ph type="body" sz="quarter" idx="3"/>
-          </p:nvPr>
-        </p:nvSpPr>
-        <p:spPr>
-          <a:xfrm>
-            <a:off x="685800" y="4343400"/>
-            <a:ext cx="5486400" cy="4114800"/>
-          </a:xfrm>
-          <a:prstGeom prst="rect">
-            <a:avLst/>
-          </a:prstGeom>
-        </p:spPr>
-        <p:txBody>
-          <a:bodyPr vert="horz" lIns="91440" tIns="45720" rIns="91440" bIns="45720" rtlCol="0"/>
-          <a:lstStyle/>
-          <a:p>
-            <a:pPr lvl="0"/>
-            <a:r>
-              <a:rPr lang="en-US" smtClean="0"/>
-              <a:t>Click to edit Master text styles</a:t>
-            </a:r>
-          </a:p>
-          <a:p>
-            <a:pPr lvl="1"/>
-            <a:r>
-              <a:rPr lang="en-US" smtClean="0"/>
-              <a:t>Second level</a:t>
-            </a:r>
-          </a:p>
-          <a:p>
-            <a:pPr lvl="2"/>
-            <a:r>
-              <a:rPr lang="en-US" smtClean="0"/>
-              <a:t>Third level</a:t>
-            </a:r>
-          </a:p>
-          <a:p>
-            <a:pPr lvl="3"/>
-            <a:r>
-              <a:rPr lang="en-US" smtClean="0"/>
-              <a:t>Fourth level</a:t>
-            </a:r>
-          </a:p>
-          <a:p>
-            <a:pPr lvl="4"/>
-            <a:r>
-              <a:rPr lang="en-US" smtClean="0"/>
-              <a:t>Fifth level</a:t>
-            </a:r>
-            <a:endParaRPr lang="en-US"/>
-          </a:p>
-        </p:txBody>
-      </p:sp>
-      <p:sp>
-        <p:nvSpPr>
-          <p:cNvPr id="6" name="Footer Placeholder 5"/>
-          <p:cNvSpPr>
-            <a:spLocks noGrp="1"/>
-          </p:cNvSpPr>
-          <p:nvPr>
-            <p:ph type="ftr" sz="quarter" idx="4"/>
-          </p:nvPr>
-        </p:nvSpPr>
-        <p:spPr>
-          <a:xfrm>
-            <a:off x="0" y="8685213"/>
-            <a:ext cx="2971800" cy="457200"/>
-          </a:xfrm>
-          <a:prstGeom prst="rect">
-            <a:avLst/>
-          </a:prstGeom>
-        </p:spPr>
-        <p:txBody>
-          <a:bodyPr vert="horz" lIns="91440" tIns="45720" rIns="91440" bIns="45720" rtlCol="0" anchor="b"/>
-          <a:lstStyle>
-            <a:lvl1pPr algn="l">
-              <a:defRPr sz="1200"/>
-            </a:lvl1pPr>
-          </a:lstStyle>
-          <a:p>
-            <a:endParaRPr lang="en-US"/>
-          </a:p>
-        </p:txBody>
-      </p:sp>
-      <p:sp>
-        <p:nvSpPr>
-          <p:cNvPr id="7" name="Slide Number Placeholder 6"/>
-          <p:cNvSpPr>
-            <a:spLocks noGrp="1"/>
-          </p:cNvSpPr>
-          <p:nvPr>
-            <p:ph type="sldNum" sz="quarter" idx="5"/>
-          </p:nvPr>
-        </p:nvSpPr>
-        <p:spPr>
-          <a:xfrm>
-            <a:off x="3884613" y="8685213"/>
-            <a:ext cx="2971800" cy="457200"/>
-          </a:xfrm>
-          <a:prstGeom prst="rect">
-            <a:avLst/>
-          </a:prstGeom>
-        </p:spPr>
-        <p:txBody>
-          <a:bodyPr vert="horz" lIns="91440" tIns="45720" rIns="91440" bIns="45720" rtlCol="0" anchor="b"/>
-          <a:lstStyle>
-            <a:lvl1pPr algn="r">
-              <a:defRPr sz="1200"/>
-            </a:lvl1pPr>
-          </a:lstStyle>
-          <a:p>
-            <a:fld id="{BB5E49A5-4136-284D-997B-48E1D791AD67}" type="slidenum">
-              <a:rPr lang="en-US" smtClean="0"/>
-              <a:t>‹#›</a:t>
-            </a:fld>
-            <a:endParaRPr lang="en-US"/>
-          </a:p>
-        </p:txBody>
-      </p:sp>
     </p:spTree>
     <p:extLst>
       <p:ext uri="{BB962C8B-B14F-4D97-AF65-F5344CB8AC3E}">
-        <p14:creationId xmlns:p14="http://schemas.microsoft.com/office/powerpoint/2010/main" val="2623252185"/>
+        <p14:creationId xmlns:p14="http://schemas.microsoft.com/office/powerpoint/2010/main" val="844945107"/>
       </p:ext>
     </p:extLst>
   </p:cSld>
   <p:clrMap bg1="lt1" tx1="dk1" bg2="lt2" tx2="dk2" accent1="accent1" accent2="accent2" accent3="accent3" accent4="accent4" accent5="accent5" accent6="accent6" hlink="hlink" folHlink="folHlink"/>
   <p:notesStyle>
-    <a:lvl1pPr marL="0" algn="l" defTabSz="457200" rtl="0" eaLnBrk="1" latinLnBrk="0" hangingPunct="1">
+    <a:lvl1pPr marL="0" algn="l" defTabSz="914400" rtl="0" eaLnBrk="1" latinLnBrk="0" hangingPunct="1">
       <a:defRPr sz="1200" kern="1200">
         <a:solidFill>
           <a:schemeClr val="tx1"/>
@@ -395,7 +189,7 @@
         <a:cs typeface="+mn-cs"/>
       </a:defRPr>
     </a:lvl1pPr>
-    <a:lvl2pPr marL="457200" algn="l" defTabSz="457200" rtl="0" eaLnBrk="1" latinLnBrk="0" hangingPunct="1">
+    <a:lvl2pPr marL="457200" algn="l" defTabSz="914400" rtl="0" eaLnBrk="1" latinLnBrk="0" hangingPunct="1">
       <a:defRPr sz="1200" kern="1200">
         <a:solidFill>
           <a:schemeClr val="tx1"/>
@@ -405,7 +199,7 @@
         <a:cs typeface="+mn-cs"/>
       </a:defRPr>
     </a:lvl2pPr>
-    <a:lvl3pPr marL="914400" algn="l" defTabSz="457200" rtl="0" eaLnBrk="1" latinLnBrk="0" hangingPunct="1">
+    <a:lvl3pPr marL="914400" algn="l" defTabSz="914400" rtl="0" eaLnBrk="1" latinLnBrk="0" hangingPunct="1">
       <a:defRPr sz="1200" kern="1200">
         <a:solidFill>
           <a:schemeClr val="tx1"/>
@@ -415,7 +209,7 @@
         <a:cs typeface="+mn-cs"/>
       </a:defRPr>
     </a:lvl3pPr>
-    <a:lvl4pPr marL="1371600" algn="l" defTabSz="457200" rtl="0" eaLnBrk="1" latinLnBrk="0" hangingPunct="1">
+    <a:lvl4pPr marL="1371600" algn="l" defTabSz="914400" rtl="0" eaLnBrk="1" latinLnBrk="0" hangingPunct="1">
       <a:defRPr sz="1200" kern="1200">
         <a:solidFill>
           <a:schemeClr val="tx1"/>
@@ -425,7 +219,7 @@
         <a:cs typeface="+mn-cs"/>
       </a:defRPr>
     </a:lvl4pPr>
-    <a:lvl5pPr marL="1828800" algn="l" defTabSz="457200" rtl="0" eaLnBrk="1" latinLnBrk="0" hangingPunct="1">
+    <a:lvl5pPr marL="1828800" algn="l" defTabSz="914400" rtl="0" eaLnBrk="1" latinLnBrk="0" hangingPunct="1">
       <a:defRPr sz="1200" kern="1200">
         <a:solidFill>
           <a:schemeClr val="tx1"/>
@@ -435,7 +229,7 @@
         <a:cs typeface="+mn-cs"/>
       </a:defRPr>
     </a:lvl5pPr>
-    <a:lvl6pPr marL="2286000" algn="l" defTabSz="457200" rtl="0" eaLnBrk="1" latinLnBrk="0" hangingPunct="1">
+    <a:lvl6pPr marL="2286000" algn="l" defTabSz="914400" rtl="0" eaLnBrk="1" latinLnBrk="0" hangingPunct="1">
       <a:defRPr sz="1200" kern="1200">
         <a:solidFill>
           <a:schemeClr val="tx1"/>
@@ -445,7 +239,7 @@
         <a:cs typeface="+mn-cs"/>
       </a:defRPr>
     </a:lvl6pPr>
-    <a:lvl7pPr marL="2743200" algn="l" defTabSz="457200" rtl="0" eaLnBrk="1" latinLnBrk="0" hangingPunct="1">
+    <a:lvl7pPr marL="2743200" algn="l" defTabSz="914400" rtl="0" eaLnBrk="1" latinLnBrk="0" hangingPunct="1">
       <a:defRPr sz="1200" kern="1200">
         <a:solidFill>
           <a:schemeClr val="tx1"/>
@@ -455,7 +249,7 @@
         <a:cs typeface="+mn-cs"/>
       </a:defRPr>
     </a:lvl7pPr>
-    <a:lvl8pPr marL="3200400" algn="l" defTabSz="457200" rtl="0" eaLnBrk="1" latinLnBrk="0" hangingPunct="1">
+    <a:lvl8pPr marL="3200400" algn="l" defTabSz="914400" rtl="0" eaLnBrk="1" latinLnBrk="0" hangingPunct="1">
       <a:defRPr sz="1200" kern="1200">
         <a:solidFill>
           <a:schemeClr val="tx1"/>
@@ -465,7 +259,7 @@
         <a:cs typeface="+mn-cs"/>
       </a:defRPr>
     </a:lvl8pPr>
-    <a:lvl9pPr marL="3657600" algn="l" defTabSz="457200" rtl="0" eaLnBrk="1" latinLnBrk="0" hangingPunct="1">
+    <a:lvl9pPr marL="3657600" algn="l" defTabSz="914400" rtl="0" eaLnBrk="1" latinLnBrk="0" hangingPunct="1">
       <a:defRPr sz="1200" kern="1200">
         <a:solidFill>
           <a:schemeClr val="tx1"/>
@@ -480,7 +274,7 @@
 </file>
 
 <file path=ppt/notesSlides/notesSlide1.xml><?xml version="1.0" encoding="utf-8"?>
-<p:notes xmlns:a="http://schemas.openxmlformats.org/drawingml/2006/main" xmlns:p="http://schemas.openxmlformats.org/presentationml/2006/main" xmlns:r="http://schemas.openxmlformats.org/officeDocument/2006/relationships">
+<p:notes xmlns:a="http://schemas.openxmlformats.org/drawingml/2006/main" xmlns:r="http://schemas.openxmlformats.org/officeDocument/2006/relationships" xmlns:p="http://schemas.openxmlformats.org/presentationml/2006/main">
   <p:cSld>
     <p:spTree>
       <p:nvGrpSpPr>
@@ -500,7 +294,7 @@
         <p:nvSpPr>
           <p:cNvPr id="2" name="Slide Image Placeholder 1"/>
           <p:cNvSpPr>
-            <a:spLocks noGrp="1"/>
+            <a:spLocks noGrp="1" noRot="1" noChangeAspect="1"/>
           </p:cNvSpPr>
           <p:nvPr>
             <p:ph type="sldImg" idx="2"/>
@@ -515,7 +309,7 @@
             <a:spLocks noGrp="1"/>
           </p:cNvSpPr>
           <p:nvPr>
-            <p:ph type="body" idx="3" sz="quarter"/>
+            <p:ph type="body" sz="quarter" idx="3"/>
           </p:nvPr>
         </p:nvSpPr>
         <p:spPr/>
@@ -536,7 +330,7 @@
             <a:spLocks noGrp="1"/>
           </p:cNvSpPr>
           <p:nvPr>
-            <p:ph type="sldNum" idx="5" sz="quarter"/>
+            <p:ph type="sldNum" sz="quarter" idx="5"/>
           </p:nvPr>
         </p:nvSpPr>
         <p:spPr/>
@@ -550,7 +344,7 @@
 </file>
 
 <file path=ppt/notesSlides/notesSlide10.xml><?xml version="1.0" encoding="utf-8"?>
-<p:notes xmlns:a="http://schemas.openxmlformats.org/drawingml/2006/main" xmlns:p="http://schemas.openxmlformats.org/presentationml/2006/main" xmlns:r="http://schemas.openxmlformats.org/officeDocument/2006/relationships">
+<p:notes xmlns:a="http://schemas.openxmlformats.org/drawingml/2006/main" xmlns:r="http://schemas.openxmlformats.org/officeDocument/2006/relationships" xmlns:p="http://schemas.openxmlformats.org/presentationml/2006/main">
   <p:cSld>
     <p:spTree>
       <p:nvGrpSpPr>
@@ -570,7 +364,7 @@
         <p:nvSpPr>
           <p:cNvPr id="2" name="Slide Image Placeholder 1"/>
           <p:cNvSpPr>
-            <a:spLocks noGrp="1"/>
+            <a:spLocks noGrp="1" noRot="1" noChangeAspect="1"/>
           </p:cNvSpPr>
           <p:nvPr>
             <p:ph type="sldImg" idx="2"/>
@@ -585,7 +379,7 @@
             <a:spLocks noGrp="1"/>
           </p:cNvSpPr>
           <p:nvPr>
-            <p:ph type="body" idx="3" sz="quarter"/>
+            <p:ph type="body" sz="quarter" idx="3"/>
           </p:nvPr>
         </p:nvSpPr>
         <p:spPr/>
@@ -606,7 +400,7 @@
             <a:spLocks noGrp="1"/>
           </p:cNvSpPr>
           <p:nvPr>
-            <p:ph type="sldNum" idx="5" sz="quarter"/>
+            <p:ph type="sldNum" sz="quarter" idx="5"/>
           </p:nvPr>
         </p:nvSpPr>
         <p:spPr/>
@@ -620,7 +414,7 @@
 </file>
 
 <file path=ppt/notesSlides/notesSlide11.xml><?xml version="1.0" encoding="utf-8"?>
-<p:notes xmlns:a="http://schemas.openxmlformats.org/drawingml/2006/main" xmlns:p="http://schemas.openxmlformats.org/presentationml/2006/main" xmlns:r="http://schemas.openxmlformats.org/officeDocument/2006/relationships">
+<p:notes xmlns:a="http://schemas.openxmlformats.org/drawingml/2006/main" xmlns:r="http://schemas.openxmlformats.org/officeDocument/2006/relationships" xmlns:p="http://schemas.openxmlformats.org/presentationml/2006/main">
   <p:cSld>
     <p:spTree>
       <p:nvGrpSpPr>
@@ -640,7 +434,7 @@
         <p:nvSpPr>
           <p:cNvPr id="2" name="Slide Image Placeholder 1"/>
           <p:cNvSpPr>
-            <a:spLocks noGrp="1"/>
+            <a:spLocks noGrp="1" noRot="1" noChangeAspect="1"/>
           </p:cNvSpPr>
           <p:nvPr>
             <p:ph type="sldImg" idx="2"/>
@@ -655,7 +449,7 @@
             <a:spLocks noGrp="1"/>
           </p:cNvSpPr>
           <p:nvPr>
-            <p:ph type="body" idx="3" sz="quarter"/>
+            <p:ph type="body" sz="quarter" idx="3"/>
           </p:nvPr>
         </p:nvSpPr>
         <p:spPr/>
@@ -676,7 +470,7 @@
             <a:spLocks noGrp="1"/>
           </p:cNvSpPr>
           <p:nvPr>
-            <p:ph type="sldNum" idx="5" sz="quarter"/>
+            <p:ph type="sldNum" sz="quarter" idx="5"/>
           </p:nvPr>
         </p:nvSpPr>
         <p:spPr/>
@@ -690,7 +484,7 @@
 </file>
 
 <file path=ppt/notesSlides/notesSlide12.xml><?xml version="1.0" encoding="utf-8"?>
-<p:notes xmlns:a="http://schemas.openxmlformats.org/drawingml/2006/main" xmlns:p="http://schemas.openxmlformats.org/presentationml/2006/main" xmlns:r="http://schemas.openxmlformats.org/officeDocument/2006/relationships">
+<p:notes xmlns:a="http://schemas.openxmlformats.org/drawingml/2006/main" xmlns:r="http://schemas.openxmlformats.org/officeDocument/2006/relationships" xmlns:p="http://schemas.openxmlformats.org/presentationml/2006/main">
   <p:cSld>
     <p:spTree>
       <p:nvGrpSpPr>
@@ -710,7 +504,7 @@
         <p:nvSpPr>
           <p:cNvPr id="2" name="Slide Image Placeholder 1"/>
           <p:cNvSpPr>
-            <a:spLocks noGrp="1"/>
+            <a:spLocks noGrp="1" noRot="1" noChangeAspect="1"/>
           </p:cNvSpPr>
           <p:nvPr>
             <p:ph type="sldImg" idx="2"/>
@@ -725,7 +519,7 @@
             <a:spLocks noGrp="1"/>
           </p:cNvSpPr>
           <p:nvPr>
-            <p:ph type="body" idx="3" sz="quarter"/>
+            <p:ph type="body" sz="quarter" idx="3"/>
           </p:nvPr>
         </p:nvSpPr>
         <p:spPr/>
@@ -746,7 +540,7 @@
             <a:spLocks noGrp="1"/>
           </p:cNvSpPr>
           <p:nvPr>
-            <p:ph type="sldNum" idx="5" sz="quarter"/>
+            <p:ph type="sldNum" sz="quarter" idx="5"/>
           </p:nvPr>
         </p:nvSpPr>
         <p:spPr/>
@@ -760,7 +554,7 @@
 </file>
 
 <file path=ppt/notesSlides/notesSlide13.xml><?xml version="1.0" encoding="utf-8"?>
-<p:notes xmlns:a="http://schemas.openxmlformats.org/drawingml/2006/main" xmlns:p="http://schemas.openxmlformats.org/presentationml/2006/main" xmlns:r="http://schemas.openxmlformats.org/officeDocument/2006/relationships">
+<p:notes xmlns:a="http://schemas.openxmlformats.org/drawingml/2006/main" xmlns:r="http://schemas.openxmlformats.org/officeDocument/2006/relationships" xmlns:p="http://schemas.openxmlformats.org/presentationml/2006/main">
   <p:cSld>
     <p:spTree>
       <p:nvGrpSpPr>
@@ -780,7 +574,7 @@
         <p:nvSpPr>
           <p:cNvPr id="2" name="Slide Image Placeholder 1"/>
           <p:cNvSpPr>
-            <a:spLocks noGrp="1"/>
+            <a:spLocks noGrp="1" noRot="1" noChangeAspect="1"/>
           </p:cNvSpPr>
           <p:nvPr>
             <p:ph type="sldImg" idx="2"/>
@@ -795,7 +589,7 @@
             <a:spLocks noGrp="1"/>
           </p:cNvSpPr>
           <p:nvPr>
-            <p:ph type="body" idx="3" sz="quarter"/>
+            <p:ph type="body" sz="quarter" idx="3"/>
           </p:nvPr>
         </p:nvSpPr>
         <p:spPr/>
@@ -816,7 +610,7 @@
             <a:spLocks noGrp="1"/>
           </p:cNvSpPr>
           <p:nvPr>
-            <p:ph type="sldNum" idx="5" sz="quarter"/>
+            <p:ph type="sldNum" sz="quarter" idx="5"/>
           </p:nvPr>
         </p:nvSpPr>
         <p:spPr/>
@@ -830,7 +624,7 @@
 </file>
 
 <file path=ppt/notesSlides/notesSlide14.xml><?xml version="1.0" encoding="utf-8"?>
-<p:notes xmlns:a="http://schemas.openxmlformats.org/drawingml/2006/main" xmlns:p="http://schemas.openxmlformats.org/presentationml/2006/main" xmlns:r="http://schemas.openxmlformats.org/officeDocument/2006/relationships">
+<p:notes xmlns:a="http://schemas.openxmlformats.org/drawingml/2006/main" xmlns:r="http://schemas.openxmlformats.org/officeDocument/2006/relationships" xmlns:p="http://schemas.openxmlformats.org/presentationml/2006/main">
   <p:cSld>
     <p:spTree>
       <p:nvGrpSpPr>
@@ -850,7 +644,7 @@
         <p:nvSpPr>
           <p:cNvPr id="2" name="Slide Image Placeholder 1"/>
           <p:cNvSpPr>
-            <a:spLocks noGrp="1"/>
+            <a:spLocks noGrp="1" noRot="1" noChangeAspect="1"/>
           </p:cNvSpPr>
           <p:nvPr>
             <p:ph type="sldImg" idx="2"/>
@@ -865,7 +659,7 @@
             <a:spLocks noGrp="1"/>
           </p:cNvSpPr>
           <p:nvPr>
-            <p:ph type="body" idx="3" sz="quarter"/>
+            <p:ph type="body" sz="quarter" idx="3"/>
           </p:nvPr>
         </p:nvSpPr>
         <p:spPr/>
@@ -886,7 +680,7 @@
             <a:spLocks noGrp="1"/>
           </p:cNvSpPr>
           <p:nvPr>
-            <p:ph type="sldNum" idx="5" sz="quarter"/>
+            <p:ph type="sldNum" sz="quarter" idx="5"/>
           </p:nvPr>
         </p:nvSpPr>
         <p:spPr/>
@@ -900,7 +694,7 @@
 </file>
 
 <file path=ppt/notesSlides/notesSlide15.xml><?xml version="1.0" encoding="utf-8"?>
-<p:notes xmlns:a="http://schemas.openxmlformats.org/drawingml/2006/main" xmlns:p="http://schemas.openxmlformats.org/presentationml/2006/main" xmlns:r="http://schemas.openxmlformats.org/officeDocument/2006/relationships">
+<p:notes xmlns:a="http://schemas.openxmlformats.org/drawingml/2006/main" xmlns:r="http://schemas.openxmlformats.org/officeDocument/2006/relationships" xmlns:p="http://schemas.openxmlformats.org/presentationml/2006/main">
   <p:cSld>
     <p:spTree>
       <p:nvGrpSpPr>
@@ -920,7 +714,7 @@
         <p:nvSpPr>
           <p:cNvPr id="2" name="Slide Image Placeholder 1"/>
           <p:cNvSpPr>
-            <a:spLocks noGrp="1"/>
+            <a:spLocks noGrp="1" noRot="1" noChangeAspect="1"/>
           </p:cNvSpPr>
           <p:nvPr>
             <p:ph type="sldImg" idx="2"/>
@@ -935,7 +729,7 @@
             <a:spLocks noGrp="1"/>
           </p:cNvSpPr>
           <p:nvPr>
-            <p:ph type="body" idx="3" sz="quarter"/>
+            <p:ph type="body" sz="quarter" idx="3"/>
           </p:nvPr>
         </p:nvSpPr>
         <p:spPr/>
@@ -956,7 +750,7 @@
             <a:spLocks noGrp="1"/>
           </p:cNvSpPr>
           <p:nvPr>
-            <p:ph type="sldNum" idx="5" sz="quarter"/>
+            <p:ph type="sldNum" sz="quarter" idx="5"/>
           </p:nvPr>
         </p:nvSpPr>
         <p:spPr/>
@@ -970,7 +764,7 @@
 </file>
 
 <file path=ppt/notesSlides/notesSlide2.xml><?xml version="1.0" encoding="utf-8"?>
-<p:notes xmlns:a="http://schemas.openxmlformats.org/drawingml/2006/main" xmlns:p="http://schemas.openxmlformats.org/presentationml/2006/main" xmlns:r="http://schemas.openxmlformats.org/officeDocument/2006/relationships">
+<p:notes xmlns:a="http://schemas.openxmlformats.org/drawingml/2006/main" xmlns:r="http://schemas.openxmlformats.org/officeDocument/2006/relationships" xmlns:p="http://schemas.openxmlformats.org/presentationml/2006/main">
   <p:cSld>
     <p:spTree>
       <p:nvGrpSpPr>
@@ -990,7 +784,7 @@
         <p:nvSpPr>
           <p:cNvPr id="2" name="Slide Image Placeholder 1"/>
           <p:cNvSpPr>
-            <a:spLocks noGrp="1"/>
+            <a:spLocks noGrp="1" noRot="1" noChangeAspect="1"/>
           </p:cNvSpPr>
           <p:nvPr>
             <p:ph type="sldImg" idx="2"/>
@@ -1005,7 +799,7 @@
             <a:spLocks noGrp="1"/>
           </p:cNvSpPr>
           <p:nvPr>
-            <p:ph type="body" idx="3" sz="quarter"/>
+            <p:ph type="body" sz="quarter" idx="3"/>
           </p:nvPr>
         </p:nvSpPr>
         <p:spPr/>
@@ -1026,7 +820,7 @@
             <a:spLocks noGrp="1"/>
           </p:cNvSpPr>
           <p:nvPr>
-            <p:ph type="sldNum" idx="5" sz="quarter"/>
+            <p:ph type="sldNum" sz="quarter" idx="5"/>
           </p:nvPr>
         </p:nvSpPr>
         <p:spPr/>
@@ -1040,7 +834,7 @@
 </file>
 
 <file path=ppt/notesSlides/notesSlide3.xml><?xml version="1.0" encoding="utf-8"?>
-<p:notes xmlns:a="http://schemas.openxmlformats.org/drawingml/2006/main" xmlns:p="http://schemas.openxmlformats.org/presentationml/2006/main" xmlns:r="http://schemas.openxmlformats.org/officeDocument/2006/relationships">
+<p:notes xmlns:a="http://schemas.openxmlformats.org/drawingml/2006/main" xmlns:r="http://schemas.openxmlformats.org/officeDocument/2006/relationships" xmlns:p="http://schemas.openxmlformats.org/presentationml/2006/main">
   <p:cSld>
     <p:spTree>
       <p:nvGrpSpPr>
@@ -1060,7 +854,7 @@
         <p:nvSpPr>
           <p:cNvPr id="2" name="Slide Image Placeholder 1"/>
           <p:cNvSpPr>
-            <a:spLocks noGrp="1"/>
+            <a:spLocks noGrp="1" noRot="1" noChangeAspect="1"/>
           </p:cNvSpPr>
           <p:nvPr>
             <p:ph type="sldImg" idx="2"/>
@@ -1075,7 +869,7 @@
             <a:spLocks noGrp="1"/>
           </p:cNvSpPr>
           <p:nvPr>
-            <p:ph type="body" idx="3" sz="quarter"/>
+            <p:ph type="body" sz="quarter" idx="3"/>
           </p:nvPr>
         </p:nvSpPr>
         <p:spPr/>
@@ -1096,7 +890,7 @@
             <a:spLocks noGrp="1"/>
           </p:cNvSpPr>
           <p:nvPr>
-            <p:ph type="sldNum" idx="5" sz="quarter"/>
+            <p:ph type="sldNum" sz="quarter" idx="5"/>
           </p:nvPr>
         </p:nvSpPr>
         <p:spPr/>
@@ -1110,7 +904,7 @@
 </file>
 
 <file path=ppt/notesSlides/notesSlide4.xml><?xml version="1.0" encoding="utf-8"?>
-<p:notes xmlns:a="http://schemas.openxmlformats.org/drawingml/2006/main" xmlns:p="http://schemas.openxmlformats.org/presentationml/2006/main" xmlns:r="http://schemas.openxmlformats.org/officeDocument/2006/relationships">
+<p:notes xmlns:a="http://schemas.openxmlformats.org/drawingml/2006/main" xmlns:r="http://schemas.openxmlformats.org/officeDocument/2006/relationships" xmlns:p="http://schemas.openxmlformats.org/presentationml/2006/main">
   <p:cSld>
     <p:spTree>
       <p:nvGrpSpPr>
@@ -1130,7 +924,7 @@
         <p:nvSpPr>
           <p:cNvPr id="2" name="Slide Image Placeholder 1"/>
           <p:cNvSpPr>
-            <a:spLocks noGrp="1"/>
+            <a:spLocks noGrp="1" noRot="1" noChangeAspect="1"/>
           </p:cNvSpPr>
           <p:nvPr>
             <p:ph type="sldImg" idx="2"/>
@@ -1145,7 +939,7 @@
             <a:spLocks noGrp="1"/>
           </p:cNvSpPr>
           <p:nvPr>
-            <p:ph type="body" idx="3" sz="quarter"/>
+            <p:ph type="body" sz="quarter" idx="3"/>
           </p:nvPr>
         </p:nvSpPr>
         <p:spPr/>
@@ -1166,7 +960,7 @@
             <a:spLocks noGrp="1"/>
           </p:cNvSpPr>
           <p:nvPr>
-            <p:ph type="sldNum" idx="5" sz="quarter"/>
+            <p:ph type="sldNum" sz="quarter" idx="5"/>
           </p:nvPr>
         </p:nvSpPr>
         <p:spPr/>
@@ -1180,7 +974,7 @@
 </file>
 
 <file path=ppt/notesSlides/notesSlide5.xml><?xml version="1.0" encoding="utf-8"?>
-<p:notes xmlns:a="http://schemas.openxmlformats.org/drawingml/2006/main" xmlns:p="http://schemas.openxmlformats.org/presentationml/2006/main" xmlns:r="http://schemas.openxmlformats.org/officeDocument/2006/relationships">
+<p:notes xmlns:a="http://schemas.openxmlformats.org/drawingml/2006/main" xmlns:r="http://schemas.openxmlformats.org/officeDocument/2006/relationships" xmlns:p="http://schemas.openxmlformats.org/presentationml/2006/main">
   <p:cSld>
     <p:spTree>
       <p:nvGrpSpPr>
@@ -1200,7 +994,7 @@
         <p:nvSpPr>
           <p:cNvPr id="2" name="Slide Image Placeholder 1"/>
           <p:cNvSpPr>
-            <a:spLocks noGrp="1"/>
+            <a:spLocks noGrp="1" noRot="1" noChangeAspect="1"/>
           </p:cNvSpPr>
           <p:nvPr>
             <p:ph type="sldImg" idx="2"/>
@@ -1215,7 +1009,7 @@
             <a:spLocks noGrp="1"/>
           </p:cNvSpPr>
           <p:nvPr>
-            <p:ph type="body" idx="3" sz="quarter"/>
+            <p:ph type="body" sz="quarter" idx="3"/>
           </p:nvPr>
         </p:nvSpPr>
         <p:spPr/>
@@ -1236,7 +1030,7 @@
             <a:spLocks noGrp="1"/>
           </p:cNvSpPr>
           <p:nvPr>
-            <p:ph type="sldNum" idx="5" sz="quarter"/>
+            <p:ph type="sldNum" sz="quarter" idx="5"/>
           </p:nvPr>
         </p:nvSpPr>
         <p:spPr/>
@@ -1250,7 +1044,7 @@
 </file>
 
 <file path=ppt/notesSlides/notesSlide6.xml><?xml version="1.0" encoding="utf-8"?>
-<p:notes xmlns:a="http://schemas.openxmlformats.org/drawingml/2006/main" xmlns:p="http://schemas.openxmlformats.org/presentationml/2006/main" xmlns:r="http://schemas.openxmlformats.org/officeDocument/2006/relationships">
+<p:notes xmlns:a="http://schemas.openxmlformats.org/drawingml/2006/main" xmlns:r="http://schemas.openxmlformats.org/officeDocument/2006/relationships" xmlns:p="http://schemas.openxmlformats.org/presentationml/2006/main">
   <p:cSld>
     <p:spTree>
       <p:nvGrpSpPr>
@@ -1270,7 +1064,7 @@
         <p:nvSpPr>
           <p:cNvPr id="2" name="Slide Image Placeholder 1"/>
           <p:cNvSpPr>
-            <a:spLocks noGrp="1"/>
+            <a:spLocks noGrp="1" noRot="1" noChangeAspect="1"/>
           </p:cNvSpPr>
           <p:nvPr>
             <p:ph type="sldImg" idx="2"/>
@@ -1285,7 +1079,7 @@
             <a:spLocks noGrp="1"/>
           </p:cNvSpPr>
           <p:nvPr>
-            <p:ph type="body" idx="3" sz="quarter"/>
+            <p:ph type="body" sz="quarter" idx="3"/>
           </p:nvPr>
         </p:nvSpPr>
         <p:spPr/>
@@ -1306,7 +1100,7 @@
             <a:spLocks noGrp="1"/>
           </p:cNvSpPr>
           <p:nvPr>
-            <p:ph type="sldNum" idx="5" sz="quarter"/>
+            <p:ph type="sldNum" sz="quarter" idx="5"/>
           </p:nvPr>
         </p:nvSpPr>
         <p:spPr/>
@@ -1320,7 +1114,7 @@
 </file>
 
 <file path=ppt/notesSlides/notesSlide7.xml><?xml version="1.0" encoding="utf-8"?>
-<p:notes xmlns:a="http://schemas.openxmlformats.org/drawingml/2006/main" xmlns:p="http://schemas.openxmlformats.org/presentationml/2006/main" xmlns:r="http://schemas.openxmlformats.org/officeDocument/2006/relationships">
+<p:notes xmlns:a="http://schemas.openxmlformats.org/drawingml/2006/main" xmlns:r="http://schemas.openxmlformats.org/officeDocument/2006/relationships" xmlns:p="http://schemas.openxmlformats.org/presentationml/2006/main">
   <p:cSld>
     <p:spTree>
       <p:nvGrpSpPr>
@@ -1340,7 +1134,7 @@
         <p:nvSpPr>
           <p:cNvPr id="2" name="Slide Image Placeholder 1"/>
           <p:cNvSpPr>
-            <a:spLocks noGrp="1"/>
+            <a:spLocks noGrp="1" noRot="1" noChangeAspect="1"/>
           </p:cNvSpPr>
           <p:nvPr>
             <p:ph type="sldImg" idx="2"/>
@@ -1355,7 +1149,7 @@
             <a:spLocks noGrp="1"/>
           </p:cNvSpPr>
           <p:nvPr>
-            <p:ph type="body" idx="3" sz="quarter"/>
+            <p:ph type="body" sz="quarter" idx="3"/>
           </p:nvPr>
         </p:nvSpPr>
         <p:spPr/>
@@ -1376,7 +1170,7 @@
             <a:spLocks noGrp="1"/>
           </p:cNvSpPr>
           <p:nvPr>
-            <p:ph type="sldNum" idx="5" sz="quarter"/>
+            <p:ph type="sldNum" sz="quarter" idx="5"/>
           </p:nvPr>
         </p:nvSpPr>
         <p:spPr/>
@@ -1390,7 +1184,7 @@
 </file>
 
 <file path=ppt/notesSlides/notesSlide8.xml><?xml version="1.0" encoding="utf-8"?>
-<p:notes xmlns:a="http://schemas.openxmlformats.org/drawingml/2006/main" xmlns:p="http://schemas.openxmlformats.org/presentationml/2006/main" xmlns:r="http://schemas.openxmlformats.org/officeDocument/2006/relationships">
+<p:notes xmlns:a="http://schemas.openxmlformats.org/drawingml/2006/main" xmlns:r="http://schemas.openxmlformats.org/officeDocument/2006/relationships" xmlns:p="http://schemas.openxmlformats.org/presentationml/2006/main">
   <p:cSld>
     <p:spTree>
       <p:nvGrpSpPr>
@@ -1410,7 +1204,7 @@
         <p:nvSpPr>
           <p:cNvPr id="2" name="Slide Image Placeholder 1"/>
           <p:cNvSpPr>
-            <a:spLocks noGrp="1"/>
+            <a:spLocks noGrp="1" noRot="1" noChangeAspect="1"/>
           </p:cNvSpPr>
           <p:nvPr>
             <p:ph type="sldImg" idx="2"/>
@@ -1425,7 +1219,7 @@
             <a:spLocks noGrp="1"/>
           </p:cNvSpPr>
           <p:nvPr>
-            <p:ph type="body" idx="3" sz="quarter"/>
+            <p:ph type="body" sz="quarter" idx="3"/>
           </p:nvPr>
         </p:nvSpPr>
         <p:spPr/>
@@ -1446,7 +1240,7 @@
             <a:spLocks noGrp="1"/>
           </p:cNvSpPr>
           <p:nvPr>
-            <p:ph type="sldNum" idx="5" sz="quarter"/>
+            <p:ph type="sldNum" sz="quarter" idx="5"/>
           </p:nvPr>
         </p:nvSpPr>
         <p:spPr/>
@@ -1460,7 +1254,7 @@
 </file>
 
 <file path=ppt/notesSlides/notesSlide9.xml><?xml version="1.0" encoding="utf-8"?>
-<p:notes xmlns:a="http://schemas.openxmlformats.org/drawingml/2006/main" xmlns:p="http://schemas.openxmlformats.org/presentationml/2006/main" xmlns:r="http://schemas.openxmlformats.org/officeDocument/2006/relationships">
+<p:notes xmlns:a="http://schemas.openxmlformats.org/drawingml/2006/main" xmlns:r="http://schemas.openxmlformats.org/officeDocument/2006/relationships" xmlns:p="http://schemas.openxmlformats.org/presentationml/2006/main">
   <p:cSld>
     <p:spTree>
       <p:nvGrpSpPr>
@@ -1480,7 +1274,7 @@
         <p:nvSpPr>
           <p:cNvPr id="2" name="Slide Image Placeholder 1"/>
           <p:cNvSpPr>
-            <a:spLocks noGrp="1"/>
+            <a:spLocks noGrp="1" noRot="1" noChangeAspect="1"/>
           </p:cNvSpPr>
           <p:nvPr>
             <p:ph type="sldImg" idx="2"/>
@@ -1495,7 +1289,7 @@
             <a:spLocks noGrp="1"/>
           </p:cNvSpPr>
           <p:nvPr>
-            <p:ph type="body" idx="3" sz="quarter"/>
+            <p:ph type="body" sz="quarter" idx="3"/>
           </p:nvPr>
         </p:nvSpPr>
         <p:spPr/>
@@ -1516,7 +1310,7 @@
             <a:spLocks noGrp="1"/>
           </p:cNvSpPr>
           <p:nvPr>
-            <p:ph type="sldNum" idx="5" sz="quarter"/>
+            <p:ph type="sldNum" sz="quarter" idx="5"/>
           </p:nvPr>
         </p:nvSpPr>
         <p:spPr/>
@@ -1567,10 +1361,9 @@
           <a:lstStyle/>
           <a:p>
             <a:r>
-              <a:rPr lang="en-US" smtClean="0"/>
+              <a:rPr lang="en-US"/>
               <a:t>Click to edit Master title style</a:t>
             </a:r>
-            <a:endParaRPr lang="en-US"/>
           </a:p>
         </p:txBody>
       </p:sp>
@@ -1686,10 +1479,9 @@
           </a:lstStyle>
           <a:p>
             <a:r>
-              <a:rPr lang="en-US" smtClean="0"/>
+              <a:rPr lang="en-US"/>
               <a:t>Click to edit Master subtitle style</a:t>
             </a:r>
-            <a:endParaRPr lang="en-US"/>
           </a:p>
         </p:txBody>
       </p:sp>
@@ -1710,7 +1502,7 @@
           <a:p>
             <a:fld id="{5BCAD085-E8A6-8845-BD4E-CB4CCA059FC4}" type="datetimeFigureOut">
               <a:rPr lang="en-US" smtClean="0"/>
-              <a:t>1/27/13</a:t>
+              <a:t>10/29/26</a:t>
             </a:fld>
             <a:endParaRPr lang="en-US"/>
           </a:p>
@@ -1804,10 +1596,9 @@
           <a:lstStyle/>
           <a:p>
             <a:r>
-              <a:rPr lang="en-US" smtClean="0"/>
+              <a:rPr lang="en-US"/>
               <a:t>Click to edit Master title style</a:t>
             </a:r>
-            <a:endParaRPr lang="en-US"/>
           </a:p>
         </p:txBody>
       </p:sp>
@@ -1828,38 +1619,37 @@
           <a:p>
             <a:pPr lvl="0"/>
             <a:r>
-              <a:rPr lang="en-US" smtClean="0"/>
+              <a:rPr lang="en-US"/>
               <a:t>Click to edit Master text styles</a:t>
             </a:r>
           </a:p>
           <a:p>
             <a:pPr lvl="1"/>
             <a:r>
-              <a:rPr lang="en-US" smtClean="0"/>
+              <a:rPr lang="en-US"/>
               <a:t>Second level</a:t>
             </a:r>
           </a:p>
           <a:p>
             <a:pPr lvl="2"/>
             <a:r>
-              <a:rPr lang="en-US" smtClean="0"/>
+              <a:rPr lang="en-US"/>
               <a:t>Third level</a:t>
             </a:r>
           </a:p>
           <a:p>
             <a:pPr lvl="3"/>
             <a:r>
-              <a:rPr lang="en-US" smtClean="0"/>
+              <a:rPr lang="en-US"/>
               <a:t>Fourth level</a:t>
             </a:r>
           </a:p>
           <a:p>
             <a:pPr lvl="4"/>
             <a:r>
-              <a:rPr lang="en-US" smtClean="0"/>
+              <a:rPr lang="en-US"/>
               <a:t>Fifth level</a:t>
             </a:r>
-            <a:endParaRPr lang="en-US"/>
           </a:p>
         </p:txBody>
       </p:sp>
@@ -1880,7 +1670,7 @@
           <a:p>
             <a:fld id="{5BCAD085-E8A6-8845-BD4E-CB4CCA059FC4}" type="datetimeFigureOut">
               <a:rPr lang="en-US" smtClean="0"/>
-              <a:t>1/27/13</a:t>
+              <a:t>10/29/26</a:t>
             </a:fld>
             <a:endParaRPr lang="en-US"/>
           </a:p>
@@ -1979,10 +1769,9 @@
           <a:lstStyle/>
           <a:p>
             <a:r>
-              <a:rPr lang="en-US" smtClean="0"/>
+              <a:rPr lang="en-US"/>
               <a:t>Click to edit Master title style</a:t>
             </a:r>
-            <a:endParaRPr lang="en-US"/>
           </a:p>
         </p:txBody>
       </p:sp>
@@ -2008,38 +1797,37 @@
           <a:p>
             <a:pPr lvl="0"/>
             <a:r>
-              <a:rPr lang="en-US" smtClean="0"/>
+              <a:rPr lang="en-US"/>
               <a:t>Click to edit Master text styles</a:t>
             </a:r>
           </a:p>
           <a:p>
             <a:pPr lvl="1"/>
             <a:r>
-              <a:rPr lang="en-US" smtClean="0"/>
+              <a:rPr lang="en-US"/>
               <a:t>Second level</a:t>
             </a:r>
           </a:p>
           <a:p>
             <a:pPr lvl="2"/>
             <a:r>
-              <a:rPr lang="en-US" smtClean="0"/>
+              <a:rPr lang="en-US"/>
               <a:t>Third level</a:t>
             </a:r>
           </a:p>
           <a:p>
             <a:pPr lvl="3"/>
             <a:r>
-              <a:rPr lang="en-US" smtClean="0"/>
+              <a:rPr lang="en-US"/>
               <a:t>Fourth level</a:t>
             </a:r>
           </a:p>
           <a:p>
             <a:pPr lvl="4"/>
             <a:r>
-              <a:rPr lang="en-US" smtClean="0"/>
+              <a:rPr lang="en-US"/>
               <a:t>Fifth level</a:t>
             </a:r>
-            <a:endParaRPr lang="en-US"/>
           </a:p>
         </p:txBody>
       </p:sp>
@@ -2060,7 +1848,7 @@
           <a:p>
             <a:fld id="{5BCAD085-E8A6-8845-BD4E-CB4CCA059FC4}" type="datetimeFigureOut">
               <a:rPr lang="en-US" smtClean="0"/>
-              <a:t>1/27/13</a:t>
+              <a:t>10/29/26</a:t>
             </a:fld>
             <a:endParaRPr lang="en-US"/>
           </a:p>
@@ -2154,10 +1942,9 @@
           <a:lstStyle/>
           <a:p>
             <a:r>
-              <a:rPr lang="en-US" smtClean="0"/>
+              <a:rPr lang="en-US"/>
               <a:t>Click to edit Master title style</a:t>
             </a:r>
-            <a:endParaRPr lang="en-US"/>
           </a:p>
         </p:txBody>
       </p:sp>
@@ -2178,38 +1965,37 @@
           <a:p>
             <a:pPr lvl="0"/>
             <a:r>
-              <a:rPr lang="en-US" smtClean="0"/>
+              <a:rPr lang="en-US"/>
               <a:t>Click to edit Master text styles</a:t>
             </a:r>
           </a:p>
           <a:p>
             <a:pPr lvl="1"/>
             <a:r>
-              <a:rPr lang="en-US" smtClean="0"/>
+              <a:rPr lang="en-US"/>
               <a:t>Second level</a:t>
             </a:r>
           </a:p>
           <a:p>
             <a:pPr lvl="2"/>
             <a:r>
-              <a:rPr lang="en-US" smtClean="0"/>
+              <a:rPr lang="en-US"/>
               <a:t>Third level</a:t>
             </a:r>
           </a:p>
           <a:p>
             <a:pPr lvl="3"/>
             <a:r>
-              <a:rPr lang="en-US" smtClean="0"/>
+              <a:rPr lang="en-US"/>
               <a:t>Fourth level</a:t>
             </a:r>
           </a:p>
           <a:p>
             <a:pPr lvl="4"/>
             <a:r>
-              <a:rPr lang="en-US" smtClean="0"/>
+              <a:rPr lang="en-US"/>
               <a:t>Fifth level</a:t>
             </a:r>
-            <a:endParaRPr lang="en-US"/>
           </a:p>
         </p:txBody>
       </p:sp>
@@ -2230,7 +2016,7 @@
           <a:p>
             <a:fld id="{5BCAD085-E8A6-8845-BD4E-CB4CCA059FC4}" type="datetimeFigureOut">
               <a:rPr lang="en-US" smtClean="0"/>
-              <a:t>1/27/13</a:t>
+              <a:t>10/29/26</a:t>
             </a:fld>
             <a:endParaRPr lang="en-US"/>
           </a:p>
@@ -2333,10 +2119,9 @@
           </a:lstStyle>
           <a:p>
             <a:r>
-              <a:rPr lang="en-US" smtClean="0"/>
+              <a:rPr lang="en-US"/>
               <a:t>Click to edit Master title style</a:t>
             </a:r>
-            <a:endParaRPr lang="en-US"/>
           </a:p>
         </p:txBody>
       </p:sp>
@@ -2453,7 +2238,7 @@
           <a:p>
             <a:pPr lvl="0"/>
             <a:r>
-              <a:rPr lang="en-US" smtClean="0"/>
+              <a:rPr lang="en-US"/>
               <a:t>Click to edit Master text styles</a:t>
             </a:r>
           </a:p>
@@ -2476,7 +2261,7 @@
           <a:p>
             <a:fld id="{5BCAD085-E8A6-8845-BD4E-CB4CCA059FC4}" type="datetimeFigureOut">
               <a:rPr lang="en-US" smtClean="0"/>
-              <a:t>1/27/13</a:t>
+              <a:t>10/29/26</a:t>
             </a:fld>
             <a:endParaRPr lang="en-US"/>
           </a:p>
@@ -2570,10 +2355,9 @@
           <a:lstStyle/>
           <a:p>
             <a:r>
-              <a:rPr lang="en-US" smtClean="0"/>
+              <a:rPr lang="en-US"/>
               <a:t>Click to edit Master title style</a:t>
             </a:r>
-            <a:endParaRPr lang="en-US"/>
           </a:p>
         </p:txBody>
       </p:sp>
@@ -2627,38 +2411,37 @@
           <a:p>
             <a:pPr lvl="0"/>
             <a:r>
-              <a:rPr lang="en-US" smtClean="0"/>
+              <a:rPr lang="en-US"/>
               <a:t>Click to edit Master text styles</a:t>
             </a:r>
           </a:p>
           <a:p>
             <a:pPr lvl="1"/>
             <a:r>
-              <a:rPr lang="en-US" smtClean="0"/>
+              <a:rPr lang="en-US"/>
               <a:t>Second level</a:t>
             </a:r>
           </a:p>
           <a:p>
             <a:pPr lvl="2"/>
             <a:r>
-              <a:rPr lang="en-US" smtClean="0"/>
+              <a:rPr lang="en-US"/>
               <a:t>Third level</a:t>
             </a:r>
           </a:p>
           <a:p>
             <a:pPr lvl="3"/>
             <a:r>
-              <a:rPr lang="en-US" smtClean="0"/>
+              <a:rPr lang="en-US"/>
               <a:t>Fourth level</a:t>
             </a:r>
           </a:p>
           <a:p>
             <a:pPr lvl="4"/>
             <a:r>
-              <a:rPr lang="en-US" smtClean="0"/>
+              <a:rPr lang="en-US"/>
               <a:t>Fifth level</a:t>
             </a:r>
-            <a:endParaRPr lang="en-US"/>
           </a:p>
         </p:txBody>
       </p:sp>
@@ -2712,38 +2495,37 @@
           <a:p>
             <a:pPr lvl="0"/>
             <a:r>
-              <a:rPr lang="en-US" smtClean="0"/>
+              <a:rPr lang="en-US"/>
               <a:t>Click to edit Master text styles</a:t>
             </a:r>
           </a:p>
           <a:p>
             <a:pPr lvl="1"/>
             <a:r>
-              <a:rPr lang="en-US" smtClean="0"/>
+              <a:rPr lang="en-US"/>
               <a:t>Second level</a:t>
             </a:r>
           </a:p>
           <a:p>
             <a:pPr lvl="2"/>
             <a:r>
-              <a:rPr lang="en-US" smtClean="0"/>
+              <a:rPr lang="en-US"/>
               <a:t>Third level</a:t>
             </a:r>
           </a:p>
           <a:p>
             <a:pPr lvl="3"/>
             <a:r>
-              <a:rPr lang="en-US" smtClean="0"/>
+              <a:rPr lang="en-US"/>
               <a:t>Fourth level</a:t>
             </a:r>
           </a:p>
           <a:p>
             <a:pPr lvl="4"/>
             <a:r>
-              <a:rPr lang="en-US" smtClean="0"/>
+              <a:rPr lang="en-US"/>
               <a:t>Fifth level</a:t>
             </a:r>
-            <a:endParaRPr lang="en-US"/>
           </a:p>
         </p:txBody>
       </p:sp>
@@ -2764,7 +2546,7 @@
           <a:p>
             <a:fld id="{5BCAD085-E8A6-8845-BD4E-CB4CCA059FC4}" type="datetimeFigureOut">
               <a:rPr lang="en-US" smtClean="0"/>
-              <a:t>1/27/13</a:t>
+              <a:t>10/29/26</a:t>
             </a:fld>
             <a:endParaRPr lang="en-US"/>
           </a:p>
@@ -2862,10 +2644,9 @@
           </a:lstStyle>
           <a:p>
             <a:r>
-              <a:rPr lang="en-US" smtClean="0"/>
+              <a:rPr lang="en-US"/>
               <a:t>Click to edit Master title style</a:t>
             </a:r>
-            <a:endParaRPr lang="en-US"/>
           </a:p>
         </p:txBody>
       </p:sp>
@@ -2928,7 +2709,7 @@
           <a:p>
             <a:pPr lvl="0"/>
             <a:r>
-              <a:rPr lang="en-US" smtClean="0"/>
+              <a:rPr lang="en-US"/>
               <a:t>Click to edit Master text styles</a:t>
             </a:r>
           </a:p>
@@ -2984,38 +2765,37 @@
           <a:p>
             <a:pPr lvl="0"/>
             <a:r>
-              <a:rPr lang="en-US" smtClean="0"/>
+              <a:rPr lang="en-US"/>
               <a:t>Click to edit Master text styles</a:t>
             </a:r>
           </a:p>
           <a:p>
             <a:pPr lvl="1"/>
             <a:r>
-              <a:rPr lang="en-US" smtClean="0"/>
+              <a:rPr lang="en-US"/>
               <a:t>Second level</a:t>
             </a:r>
           </a:p>
           <a:p>
             <a:pPr lvl="2"/>
             <a:r>
-              <a:rPr lang="en-US" smtClean="0"/>
+              <a:rPr lang="en-US"/>
               <a:t>Third level</a:t>
             </a:r>
           </a:p>
           <a:p>
             <a:pPr lvl="3"/>
             <a:r>
-              <a:rPr lang="en-US" smtClean="0"/>
+              <a:rPr lang="en-US"/>
               <a:t>Fourth level</a:t>
             </a:r>
           </a:p>
           <a:p>
             <a:pPr lvl="4"/>
             <a:r>
-              <a:rPr lang="en-US" smtClean="0"/>
+              <a:rPr lang="en-US"/>
               <a:t>Fifth level</a:t>
             </a:r>
-            <a:endParaRPr lang="en-US"/>
           </a:p>
         </p:txBody>
       </p:sp>
@@ -3078,7 +2858,7 @@
           <a:p>
             <a:pPr lvl="0"/>
             <a:r>
-              <a:rPr lang="en-US" smtClean="0"/>
+              <a:rPr lang="en-US"/>
               <a:t>Click to edit Master text styles</a:t>
             </a:r>
           </a:p>
@@ -3134,38 +2914,37 @@
           <a:p>
             <a:pPr lvl="0"/>
             <a:r>
-              <a:rPr lang="en-US" smtClean="0"/>
+              <a:rPr lang="en-US"/>
               <a:t>Click to edit Master text styles</a:t>
             </a:r>
           </a:p>
           <a:p>
             <a:pPr lvl="1"/>
             <a:r>
-              <a:rPr lang="en-US" smtClean="0"/>
+              <a:rPr lang="en-US"/>
               <a:t>Second level</a:t>
             </a:r>
           </a:p>
           <a:p>
             <a:pPr lvl="2"/>
             <a:r>
-              <a:rPr lang="en-US" smtClean="0"/>
+              <a:rPr lang="en-US"/>
               <a:t>Third level</a:t>
             </a:r>
           </a:p>
           <a:p>
             <a:pPr lvl="3"/>
             <a:r>
-              <a:rPr lang="en-US" smtClean="0"/>
+              <a:rPr lang="en-US"/>
               <a:t>Fourth level</a:t>
             </a:r>
           </a:p>
           <a:p>
             <a:pPr lvl="4"/>
             <a:r>
-              <a:rPr lang="en-US" smtClean="0"/>
+              <a:rPr lang="en-US"/>
               <a:t>Fifth level</a:t>
             </a:r>
-            <a:endParaRPr lang="en-US"/>
           </a:p>
         </p:txBody>
       </p:sp>
@@ -3186,7 +2965,7 @@
           <a:p>
             <a:fld id="{5BCAD085-E8A6-8845-BD4E-CB4CCA059FC4}" type="datetimeFigureOut">
               <a:rPr lang="en-US" smtClean="0"/>
-              <a:t>1/27/13</a:t>
+              <a:t>10/29/26</a:t>
             </a:fld>
             <a:endParaRPr lang="en-US"/>
           </a:p>
@@ -3280,10 +3059,9 @@
           <a:lstStyle/>
           <a:p>
             <a:r>
-              <a:rPr lang="en-US" smtClean="0"/>
+              <a:rPr lang="en-US"/>
               <a:t>Click to edit Master title style</a:t>
             </a:r>
-            <a:endParaRPr lang="en-US"/>
           </a:p>
         </p:txBody>
       </p:sp>
@@ -3304,7 +3082,7 @@
           <a:p>
             <a:fld id="{5BCAD085-E8A6-8845-BD4E-CB4CCA059FC4}" type="datetimeFigureOut">
               <a:rPr lang="en-US" smtClean="0"/>
-              <a:t>1/27/13</a:t>
+              <a:t>10/29/26</a:t>
             </a:fld>
             <a:endParaRPr lang="en-US"/>
           </a:p>
@@ -3399,7 +3177,7 @@
           <a:p>
             <a:fld id="{5BCAD085-E8A6-8845-BD4E-CB4CCA059FC4}" type="datetimeFigureOut">
               <a:rPr lang="en-US" smtClean="0"/>
-              <a:t>1/27/13</a:t>
+              <a:t>10/29/26</a:t>
             </a:fld>
             <a:endParaRPr lang="en-US"/>
           </a:p>
@@ -3502,10 +3280,9 @@
           </a:lstStyle>
           <a:p>
             <a:r>
-              <a:rPr lang="en-US" smtClean="0"/>
+              <a:rPr lang="en-US"/>
               <a:t>Click to edit Master title style</a:t>
             </a:r>
-            <a:endParaRPr lang="en-US"/>
           </a:p>
         </p:txBody>
       </p:sp>
@@ -3559,38 +3336,37 @@
           <a:p>
             <a:pPr lvl="0"/>
             <a:r>
-              <a:rPr lang="en-US" smtClean="0"/>
+              <a:rPr lang="en-US"/>
               <a:t>Click to edit Master text styles</a:t>
             </a:r>
           </a:p>
           <a:p>
             <a:pPr lvl="1"/>
             <a:r>
-              <a:rPr lang="en-US" smtClean="0"/>
+              <a:rPr lang="en-US"/>
               <a:t>Second level</a:t>
             </a:r>
           </a:p>
           <a:p>
             <a:pPr lvl="2"/>
             <a:r>
-              <a:rPr lang="en-US" smtClean="0"/>
+              <a:rPr lang="en-US"/>
               <a:t>Third level</a:t>
             </a:r>
           </a:p>
           <a:p>
             <a:pPr lvl="3"/>
             <a:r>
-              <a:rPr lang="en-US" smtClean="0"/>
+              <a:rPr lang="en-US"/>
               <a:t>Fourth level</a:t>
             </a:r>
           </a:p>
           <a:p>
             <a:pPr lvl="4"/>
             <a:r>
-              <a:rPr lang="en-US" smtClean="0"/>
+              <a:rPr lang="en-US"/>
               <a:t>Fifth level</a:t>
             </a:r>
-            <a:endParaRPr lang="en-US"/>
           </a:p>
         </p:txBody>
       </p:sp>
@@ -3653,7 +3429,7 @@
           <a:p>
             <a:pPr lvl="0"/>
             <a:r>
-              <a:rPr lang="en-US" smtClean="0"/>
+              <a:rPr lang="en-US"/>
               <a:t>Click to edit Master text styles</a:t>
             </a:r>
           </a:p>
@@ -3676,7 +3452,7 @@
           <a:p>
             <a:fld id="{5BCAD085-E8A6-8845-BD4E-CB4CCA059FC4}" type="datetimeFigureOut">
               <a:rPr lang="en-US" smtClean="0"/>
-              <a:t>1/27/13</a:t>
+              <a:t>10/29/26</a:t>
             </a:fld>
             <a:endParaRPr lang="en-US"/>
           </a:p>
@@ -3779,10 +3555,9 @@
           </a:lstStyle>
           <a:p>
             <a:r>
-              <a:rPr lang="en-US" smtClean="0"/>
+              <a:rPr lang="en-US"/>
               <a:t>Click to edit Master title style</a:t>
             </a:r>
-            <a:endParaRPr lang="en-US"/>
           </a:p>
         </p:txBody>
       </p:sp>
@@ -3906,7 +3681,7 @@
           <a:p>
             <a:pPr lvl="0"/>
             <a:r>
-              <a:rPr lang="en-US" smtClean="0"/>
+              <a:rPr lang="en-US"/>
               <a:t>Click to edit Master text styles</a:t>
             </a:r>
           </a:p>
@@ -3929,7 +3704,7 @@
           <a:p>
             <a:fld id="{5BCAD085-E8A6-8845-BD4E-CB4CCA059FC4}" type="datetimeFigureOut">
               <a:rPr lang="en-US" smtClean="0"/>
-              <a:t>1/27/13</a:t>
+              <a:t>10/29/26</a:t>
             </a:fld>
             <a:endParaRPr lang="en-US"/>
           </a:p>
@@ -4038,10 +3813,9 @@
           <a:lstStyle/>
           <a:p>
             <a:r>
-              <a:rPr lang="en-US" smtClean="0"/>
+              <a:rPr lang="en-US"/>
               <a:t>Click to edit Master title style</a:t>
             </a:r>
-            <a:endParaRPr lang="en-US"/>
           </a:p>
         </p:txBody>
       </p:sp>
@@ -4072,38 +3846,37 @@
           <a:p>
             <a:pPr lvl="0"/>
             <a:r>
-              <a:rPr lang="en-US" smtClean="0"/>
+              <a:rPr lang="en-US"/>
               <a:t>Click to edit Master text styles</a:t>
             </a:r>
           </a:p>
           <a:p>
             <a:pPr lvl="1"/>
             <a:r>
-              <a:rPr lang="en-US" smtClean="0"/>
+              <a:rPr lang="en-US"/>
               <a:t>Second level</a:t>
             </a:r>
           </a:p>
           <a:p>
             <a:pPr lvl="2"/>
             <a:r>
-              <a:rPr lang="en-US" smtClean="0"/>
+              <a:rPr lang="en-US"/>
               <a:t>Third level</a:t>
             </a:r>
           </a:p>
           <a:p>
             <a:pPr lvl="3"/>
             <a:r>
-              <a:rPr lang="en-US" smtClean="0"/>
+              <a:rPr lang="en-US"/>
               <a:t>Fourth level</a:t>
             </a:r>
           </a:p>
           <a:p>
             <a:pPr lvl="4"/>
             <a:r>
-              <a:rPr lang="en-US" smtClean="0"/>
+              <a:rPr lang="en-US"/>
               <a:t>Fifth level</a:t>
             </a:r>
-            <a:endParaRPr lang="en-US"/>
           </a:p>
         </p:txBody>
       </p:sp>
@@ -4142,7 +3915,7 @@
           <a:p>
             <a:fld id="{5BCAD085-E8A6-8845-BD4E-CB4CCA059FC4}" type="datetimeFigureOut">
               <a:rPr lang="en-US" smtClean="0"/>
-              <a:t>1/27/13</a:t>
+              <a:t>10/29/26</a:t>
             </a:fld>
             <a:endParaRPr lang="en-US"/>
           </a:p>
@@ -4501,7 +4274,7 @@
 </file>
 
 <file path=ppt/slides/slide1.xml><?xml version="1.0" encoding="utf-8"?>
-<p:sld xmlns:a="http://schemas.openxmlformats.org/drawingml/2006/main" xmlns:p="http://schemas.openxmlformats.org/presentationml/2006/main" xmlns:r="http://schemas.openxmlformats.org/officeDocument/2006/relationships">
+<p:sld xmlns:a="http://schemas.openxmlformats.org/drawingml/2006/main" xmlns:r="http://schemas.openxmlformats.org/officeDocument/2006/relationships" xmlns:p="http://schemas.openxmlformats.org/presentationml/2006/main">
   <p:cSld>
     <p:bg>
       <p:bgPr>
@@ -4517,7 +4290,14 @@
         <p:cNvGrpSpPr/>
         <p:nvPr/>
       </p:nvGrpSpPr>
-      <p:grpSpPr/>
+      <p:grpSpPr>
+        <a:xfrm>
+          <a:off x="0" y="0"/>
+          <a:ext cx="0" cy="0"/>
+          <a:chOff x="0" y="0"/>
+          <a:chExt cx="0" cy="0"/>
+        </a:xfrm>
+      </p:grpSpPr>
       <p:sp>
         <p:nvSpPr>
           <p:cNvPr id="2" name="Rectangle 1"/>
@@ -4558,6 +4338,7 @@
           <a:lstStyle/>
           <a:p>
             <a:pPr algn="ctr"/>
+            <a:endParaRPr/>
           </a:p>
         </p:txBody>
       </p:sp>
@@ -4578,7 +4359,7 @@
           <a:noFill/>
         </p:spPr>
         <p:txBody>
-          <a:bodyPr wrap="square" lIns="0" rIns="0" tIns="0" bIns="0">
+          <a:bodyPr wrap="square" lIns="0" tIns="0" rIns="0" bIns="0">
             <a:spAutoFit/>
           </a:bodyPr>
           <a:lstStyle/>
@@ -4617,7 +4398,7 @@
           <a:noFill/>
         </p:spPr>
         <p:txBody>
-          <a:bodyPr wrap="square" lIns="0" rIns="0" tIns="0" bIns="0">
+          <a:bodyPr wrap="square" lIns="0" tIns="0" rIns="0" bIns="0">
             <a:spAutoFit/>
           </a:bodyPr>
           <a:lstStyle/>
@@ -4656,7 +4437,7 @@
           <a:noFill/>
         </p:spPr>
         <p:txBody>
-          <a:bodyPr wrap="square" lIns="0" rIns="0" tIns="0" bIns="0">
+          <a:bodyPr wrap="square" lIns="0" tIns="0" rIns="0" bIns="0">
             <a:spAutoFit/>
           </a:bodyPr>
           <a:lstStyle/>
@@ -4718,6 +4499,7 @@
           <a:lstStyle/>
           <a:p>
             <a:pPr algn="ctr"/>
+            <a:endParaRPr/>
           </a:p>
         </p:txBody>
       </p:sp>
@@ -4738,7 +4520,7 @@
           <a:noFill/>
         </p:spPr>
         <p:txBody>
-          <a:bodyPr wrap="square" lIns="0" rIns="0" tIns="0" bIns="0">
+          <a:bodyPr wrap="square" lIns="0" tIns="0" rIns="0" bIns="0">
             <a:spAutoFit/>
           </a:bodyPr>
           <a:lstStyle/>
@@ -4777,7 +4559,7 @@
           <a:noFill/>
         </p:spPr>
         <p:txBody>
-          <a:bodyPr wrap="square" lIns="0" rIns="0" tIns="0" bIns="0">
+          <a:bodyPr wrap="square" lIns="0" tIns="0" rIns="0" bIns="0">
             <a:spAutoFit/>
           </a:bodyPr>
           <a:lstStyle/>
@@ -4830,6 +4612,7 @@
           <a:lstStyle/>
           <a:p>
             <a:pPr algn="ctr"/>
+            <a:endParaRPr/>
           </a:p>
         </p:txBody>
       </p:sp>
@@ -4850,7 +4633,7 @@
           <a:noFill/>
         </p:spPr>
         <p:txBody>
-          <a:bodyPr wrap="square" lIns="0" rIns="0" tIns="0" bIns="0">
+          <a:bodyPr wrap="square" lIns="0" tIns="0" rIns="0" bIns="0">
             <a:spAutoFit/>
           </a:bodyPr>
           <a:lstStyle/>
@@ -4889,7 +4672,7 @@
           <a:noFill/>
         </p:spPr>
         <p:txBody>
-          <a:bodyPr wrap="square" lIns="0" rIns="0" tIns="0" bIns="0">
+          <a:bodyPr wrap="square" lIns="0" tIns="0" rIns="0" bIns="0">
             <a:spAutoFit/>
           </a:bodyPr>
           <a:lstStyle/>
@@ -4928,7 +4711,7 @@
           <a:noFill/>
         </p:spPr>
         <p:txBody>
-          <a:bodyPr wrap="square" lIns="0" rIns="0" tIns="0" bIns="0">
+          <a:bodyPr wrap="square" lIns="0" tIns="0" rIns="0" bIns="0">
             <a:spAutoFit/>
           </a:bodyPr>
           <a:lstStyle/>
@@ -4959,7 +4742,7 @@
 </file>
 
 <file path=ppt/slides/slide10.xml><?xml version="1.0" encoding="utf-8"?>
-<p:sld xmlns:a="http://schemas.openxmlformats.org/drawingml/2006/main" xmlns:p="http://schemas.openxmlformats.org/presentationml/2006/main" xmlns:r="http://schemas.openxmlformats.org/officeDocument/2006/relationships">
+<p:sld xmlns:a="http://schemas.openxmlformats.org/drawingml/2006/main" xmlns:r="http://schemas.openxmlformats.org/officeDocument/2006/relationships" xmlns:p="http://schemas.openxmlformats.org/presentationml/2006/main">
   <p:cSld>
     <p:bg>
       <p:bgPr>
@@ -4975,7 +4758,14 @@
         <p:cNvGrpSpPr/>
         <p:nvPr/>
       </p:nvGrpSpPr>
-      <p:grpSpPr/>
+      <p:grpSpPr>
+        <a:xfrm>
+          <a:off x="0" y="0"/>
+          <a:ext cx="0" cy="0"/>
+          <a:chOff x="0" y="0"/>
+          <a:chExt cx="0" cy="0"/>
+        </a:xfrm>
+      </p:grpSpPr>
       <p:sp>
         <p:nvSpPr>
           <p:cNvPr id="2" name="Rectangle 1"/>
@@ -5016,6 +4806,7 @@
           <a:lstStyle/>
           <a:p>
             <a:pPr algn="ctr"/>
+            <a:endParaRPr/>
           </a:p>
         </p:txBody>
       </p:sp>
@@ -5133,6 +4924,7 @@
           <a:lstStyle/>
           <a:p>
             <a:pPr algn="ctr"/>
+            <a:endParaRPr/>
           </a:p>
         </p:txBody>
       </p:sp>
@@ -5286,6 +5078,7 @@
           <a:lstStyle/>
           <a:p>
             <a:pPr algn="ctr"/>
+            <a:endParaRPr/>
           </a:p>
         </p:txBody>
       </p:sp>
@@ -5439,6 +5232,7 @@
           <a:lstStyle/>
           <a:p>
             <a:pPr algn="ctr"/>
+            <a:endParaRPr/>
           </a:p>
         </p:txBody>
       </p:sp>
@@ -5590,6 +5384,7 @@
           <a:lstStyle/>
           <a:p>
             <a:pPr algn="ctr"/>
+            <a:endParaRPr/>
           </a:p>
         </p:txBody>
       </p:sp>
@@ -5710,7 +5505,7 @@
 </file>
 
 <file path=ppt/slides/slide11.xml><?xml version="1.0" encoding="utf-8"?>
-<p:sld xmlns:a="http://schemas.openxmlformats.org/drawingml/2006/main" xmlns:p="http://schemas.openxmlformats.org/presentationml/2006/main" xmlns:r="http://schemas.openxmlformats.org/officeDocument/2006/relationships">
+<p:sld xmlns:a="http://schemas.openxmlformats.org/drawingml/2006/main" xmlns:r="http://schemas.openxmlformats.org/officeDocument/2006/relationships" xmlns:p="http://schemas.openxmlformats.org/presentationml/2006/main">
   <p:cSld>
     <p:bg>
       <p:bgPr>
@@ -5726,7 +5521,14 @@
         <p:cNvGrpSpPr/>
         <p:nvPr/>
       </p:nvGrpSpPr>
-      <p:grpSpPr/>
+      <p:grpSpPr>
+        <a:xfrm>
+          <a:off x="0" y="0"/>
+          <a:ext cx="0" cy="0"/>
+          <a:chOff x="0" y="0"/>
+          <a:chExt cx="0" cy="0"/>
+        </a:xfrm>
+      </p:grpSpPr>
       <p:sp>
         <p:nvSpPr>
           <p:cNvPr id="2" name="Rectangle 1"/>
@@ -5767,6 +5569,7 @@
           <a:lstStyle/>
           <a:p>
             <a:pPr algn="ctr"/>
+            <a:endParaRPr/>
           </a:p>
         </p:txBody>
       </p:sp>
@@ -5884,6 +5687,7 @@
           <a:lstStyle/>
           <a:p>
             <a:pPr algn="ctr"/>
+            <a:endParaRPr/>
           </a:p>
         </p:txBody>
       </p:sp>
@@ -6037,6 +5841,7 @@
           <a:lstStyle/>
           <a:p>
             <a:pPr algn="ctr"/>
+            <a:endParaRPr/>
           </a:p>
         </p:txBody>
       </p:sp>
@@ -6190,6 +5995,7 @@
           <a:lstStyle/>
           <a:p>
             <a:pPr algn="ctr"/>
+            <a:endParaRPr/>
           </a:p>
         </p:txBody>
       </p:sp>
@@ -6341,6 +6147,7 @@
           <a:lstStyle/>
           <a:p>
             <a:pPr algn="ctr"/>
+            <a:endParaRPr/>
           </a:p>
         </p:txBody>
       </p:sp>
@@ -6461,7 +6268,7 @@
 </file>
 
 <file path=ppt/slides/slide12.xml><?xml version="1.0" encoding="utf-8"?>
-<p:sld xmlns:a="http://schemas.openxmlformats.org/drawingml/2006/main" xmlns:p="http://schemas.openxmlformats.org/presentationml/2006/main" xmlns:r="http://schemas.openxmlformats.org/officeDocument/2006/relationships">
+<p:sld xmlns:a="http://schemas.openxmlformats.org/drawingml/2006/main" xmlns:r="http://schemas.openxmlformats.org/officeDocument/2006/relationships" xmlns:p="http://schemas.openxmlformats.org/presentationml/2006/main">
   <p:cSld>
     <p:bg>
       <p:bgPr>
@@ -6477,7 +6284,14 @@
         <p:cNvGrpSpPr/>
         <p:nvPr/>
       </p:nvGrpSpPr>
-      <p:grpSpPr/>
+      <p:grpSpPr>
+        <a:xfrm>
+          <a:off x="0" y="0"/>
+          <a:ext cx="0" cy="0"/>
+          <a:chOff x="0" y="0"/>
+          <a:chExt cx="0" cy="0"/>
+        </a:xfrm>
+      </p:grpSpPr>
       <p:sp>
         <p:nvSpPr>
           <p:cNvPr id="2" name="Rectangle 1"/>
@@ -6518,6 +6332,7 @@
           <a:lstStyle/>
           <a:p>
             <a:pPr algn="ctr"/>
+            <a:endParaRPr/>
           </a:p>
         </p:txBody>
       </p:sp>
@@ -6635,6 +6450,7 @@
           <a:lstStyle/>
           <a:p>
             <a:pPr algn="ctr"/>
+            <a:endParaRPr/>
           </a:p>
         </p:txBody>
       </p:sp>
@@ -6788,6 +6604,7 @@
           <a:lstStyle/>
           <a:p>
             <a:pPr algn="ctr"/>
+            <a:endParaRPr/>
           </a:p>
         </p:txBody>
       </p:sp>
@@ -6939,6 +6756,7 @@
           <a:lstStyle/>
           <a:p>
             <a:pPr algn="ctr"/>
+            <a:endParaRPr/>
           </a:p>
         </p:txBody>
       </p:sp>
@@ -7059,7 +6877,7 @@
 </file>
 
 <file path=ppt/slides/slide13.xml><?xml version="1.0" encoding="utf-8"?>
-<p:sld xmlns:a="http://schemas.openxmlformats.org/drawingml/2006/main" xmlns:p="http://schemas.openxmlformats.org/presentationml/2006/main" xmlns:r="http://schemas.openxmlformats.org/officeDocument/2006/relationships">
+<p:sld xmlns:a="http://schemas.openxmlformats.org/drawingml/2006/main" xmlns:r="http://schemas.openxmlformats.org/officeDocument/2006/relationships" xmlns:p="http://schemas.openxmlformats.org/presentationml/2006/main">
   <p:cSld>
     <p:bg>
       <p:bgPr>
@@ -7075,7 +6893,14 @@
         <p:cNvGrpSpPr/>
         <p:nvPr/>
       </p:nvGrpSpPr>
-      <p:grpSpPr/>
+      <p:grpSpPr>
+        <a:xfrm>
+          <a:off x="0" y="0"/>
+          <a:ext cx="0" cy="0"/>
+          <a:chOff x="0" y="0"/>
+          <a:chExt cx="0" cy="0"/>
+        </a:xfrm>
+      </p:grpSpPr>
       <p:sp>
         <p:nvSpPr>
           <p:cNvPr id="2" name="Rectangle 1"/>
@@ -7116,6 +6941,7 @@
           <a:lstStyle/>
           <a:p>
             <a:pPr algn="ctr"/>
+            <a:endParaRPr/>
           </a:p>
         </p:txBody>
       </p:sp>
@@ -7136,7 +6962,7 @@
           <a:noFill/>
         </p:spPr>
         <p:txBody>
-          <a:bodyPr wrap="square" lIns="0" rIns="0" tIns="0" bIns="0">
+          <a:bodyPr wrap="square" lIns="0" tIns="0" rIns="0" bIns="0">
             <a:spAutoFit/>
           </a:bodyPr>
           <a:lstStyle/>
@@ -7175,7 +7001,7 @@
           <a:noFill/>
         </p:spPr>
         <p:txBody>
-          <a:bodyPr wrap="square" lIns="0" rIns="0" tIns="0" bIns="0">
+          <a:bodyPr wrap="square" lIns="0" tIns="0" rIns="0" bIns="0">
             <a:spAutoFit/>
           </a:bodyPr>
           <a:lstStyle/>
@@ -7214,7 +7040,7 @@
           <a:noFill/>
         </p:spPr>
         <p:txBody>
-          <a:bodyPr wrap="square" lIns="0" rIns="0" tIns="0" bIns="0">
+          <a:bodyPr wrap="square" lIns="0" tIns="0" rIns="0" bIns="0">
             <a:spAutoFit/>
           </a:bodyPr>
           <a:lstStyle/>
@@ -7276,6 +7102,7 @@
           <a:lstStyle/>
           <a:p>
             <a:pPr algn="ctr"/>
+            <a:endParaRPr/>
           </a:p>
         </p:txBody>
       </p:sp>
@@ -7296,7 +7123,7 @@
           <a:noFill/>
         </p:spPr>
         <p:txBody>
-          <a:bodyPr wrap="square" lIns="0" rIns="0" tIns="0" bIns="0">
+          <a:bodyPr wrap="square" lIns="0" tIns="0" rIns="0" bIns="0">
             <a:spAutoFit/>
           </a:bodyPr>
           <a:lstStyle/>
@@ -7335,7 +7162,7 @@
           <a:noFill/>
         </p:spPr>
         <p:txBody>
-          <a:bodyPr wrap="square" lIns="0" rIns="0" tIns="0" bIns="0">
+          <a:bodyPr wrap="square" lIns="0" tIns="0" rIns="0" bIns="0">
             <a:spAutoFit/>
           </a:bodyPr>
           <a:lstStyle/>
@@ -7390,6 +7217,7 @@
           <a:lstStyle/>
           <a:p>
             <a:pPr algn="ctr"/>
+            <a:endParaRPr/>
           </a:p>
         </p:txBody>
       </p:sp>
@@ -7402,7 +7230,7 @@
           <p:nvPr/>
         </p:nvPicPr>
         <p:blipFill>
-          <a:blip r:embed="rId2"/>
+          <a:blip r:embed="rId3"/>
           <a:stretch>
             <a:fillRect/>
           </a:stretch>
@@ -7434,7 +7262,7 @@
           <a:noFill/>
         </p:spPr>
         <p:txBody>
-          <a:bodyPr wrap="square" lIns="0" rIns="0" tIns="0" bIns="0">
+          <a:bodyPr wrap="square" lIns="0" tIns="0" rIns="0" bIns="0">
             <a:spAutoFit/>
           </a:bodyPr>
           <a:lstStyle/>
@@ -7465,7 +7293,7 @@
 </file>
 
 <file path=ppt/slides/slide14.xml><?xml version="1.0" encoding="utf-8"?>
-<p:sld xmlns:a="http://schemas.openxmlformats.org/drawingml/2006/main" xmlns:p="http://schemas.openxmlformats.org/presentationml/2006/main" xmlns:r="http://schemas.openxmlformats.org/officeDocument/2006/relationships">
+<p:sld xmlns:a="http://schemas.openxmlformats.org/drawingml/2006/main" xmlns:r="http://schemas.openxmlformats.org/officeDocument/2006/relationships" xmlns:p="http://schemas.openxmlformats.org/presentationml/2006/main">
   <p:cSld>
     <p:bg>
       <p:bgPr>
@@ -7481,7 +7309,14 @@
         <p:cNvGrpSpPr/>
         <p:nvPr/>
       </p:nvGrpSpPr>
-      <p:grpSpPr/>
+      <p:grpSpPr>
+        <a:xfrm>
+          <a:off x="0" y="0"/>
+          <a:ext cx="0" cy="0"/>
+          <a:chOff x="0" y="0"/>
+          <a:chExt cx="0" cy="0"/>
+        </a:xfrm>
+      </p:grpSpPr>
       <p:sp>
         <p:nvSpPr>
           <p:cNvPr id="2" name="Rectangle 1"/>
@@ -7522,6 +7357,7 @@
           <a:lstStyle/>
           <a:p>
             <a:pPr algn="ctr"/>
+            <a:endParaRPr/>
           </a:p>
         </p:txBody>
       </p:sp>
@@ -7542,7 +7378,7 @@
           <a:noFill/>
         </p:spPr>
         <p:txBody>
-          <a:bodyPr wrap="square" lIns="0" rIns="0" tIns="0" bIns="0">
+          <a:bodyPr wrap="square" lIns="0" tIns="0" rIns="0" bIns="0">
             <a:spAutoFit/>
           </a:bodyPr>
           <a:lstStyle/>
@@ -7581,7 +7417,7 @@
           <a:noFill/>
         </p:spPr>
         <p:txBody>
-          <a:bodyPr wrap="square" lIns="0" rIns="0" tIns="0" bIns="0">
+          <a:bodyPr wrap="square" lIns="0" tIns="0" rIns="0" bIns="0">
             <a:spAutoFit/>
           </a:bodyPr>
           <a:lstStyle/>
@@ -7620,7 +7456,7 @@
           <a:noFill/>
         </p:spPr>
         <p:txBody>
-          <a:bodyPr wrap="square" lIns="0" rIns="0" tIns="0" bIns="0">
+          <a:bodyPr wrap="square" lIns="0" tIns="0" rIns="0" bIns="0">
             <a:spAutoFit/>
           </a:bodyPr>
           <a:lstStyle/>
@@ -7682,6 +7518,7 @@
           <a:lstStyle/>
           <a:p>
             <a:pPr algn="ctr"/>
+            <a:endParaRPr/>
           </a:p>
         </p:txBody>
       </p:sp>
@@ -7702,7 +7539,7 @@
           <a:noFill/>
         </p:spPr>
         <p:txBody>
-          <a:bodyPr wrap="square" lIns="0" rIns="0" tIns="0" bIns="0">
+          <a:bodyPr wrap="square" lIns="0" tIns="0" rIns="0" bIns="0">
             <a:spAutoFit/>
           </a:bodyPr>
           <a:lstStyle/>
@@ -7741,7 +7578,7 @@
           <a:noFill/>
         </p:spPr>
         <p:txBody>
-          <a:bodyPr wrap="square" lIns="0" rIns="0" tIns="0" bIns="0">
+          <a:bodyPr wrap="square" lIns="0" tIns="0" rIns="0" bIns="0">
             <a:spAutoFit/>
           </a:bodyPr>
           <a:lstStyle/>
@@ -7796,6 +7633,7 @@
           <a:lstStyle/>
           <a:p>
             <a:pPr algn="ctr"/>
+            <a:endParaRPr/>
           </a:p>
         </p:txBody>
       </p:sp>
@@ -7808,7 +7646,7 @@
           <p:nvPr/>
         </p:nvPicPr>
         <p:blipFill>
-          <a:blip r:embed="rId2"/>
+          <a:blip r:embed="rId3"/>
           <a:stretch>
             <a:fillRect/>
           </a:stretch>
@@ -7840,7 +7678,7 @@
           <a:noFill/>
         </p:spPr>
         <p:txBody>
-          <a:bodyPr wrap="square" lIns="0" rIns="0" tIns="0" bIns="0">
+          <a:bodyPr wrap="square" lIns="0" tIns="0" rIns="0" bIns="0">
             <a:spAutoFit/>
           </a:bodyPr>
           <a:lstStyle/>
@@ -7871,7 +7709,7 @@
 </file>
 
 <file path=ppt/slides/slide15.xml><?xml version="1.0" encoding="utf-8"?>
-<p:sld xmlns:a="http://schemas.openxmlformats.org/drawingml/2006/main" xmlns:p="http://schemas.openxmlformats.org/presentationml/2006/main" xmlns:r="http://schemas.openxmlformats.org/officeDocument/2006/relationships">
+<p:sld xmlns:a="http://schemas.openxmlformats.org/drawingml/2006/main" xmlns:r="http://schemas.openxmlformats.org/officeDocument/2006/relationships" xmlns:p="http://schemas.openxmlformats.org/presentationml/2006/main">
   <p:cSld>
     <p:bg>
       <p:bgPr>
@@ -7887,7 +7725,14 @@
         <p:cNvGrpSpPr/>
         <p:nvPr/>
       </p:nvGrpSpPr>
-      <p:grpSpPr/>
+      <p:grpSpPr>
+        <a:xfrm>
+          <a:off x="0" y="0"/>
+          <a:ext cx="0" cy="0"/>
+          <a:chOff x="0" y="0"/>
+          <a:chExt cx="0" cy="0"/>
+        </a:xfrm>
+      </p:grpSpPr>
       <p:sp>
         <p:nvSpPr>
           <p:cNvPr id="2" name="Rectangle 1"/>
@@ -7928,6 +7773,7 @@
           <a:lstStyle/>
           <a:p>
             <a:pPr algn="ctr"/>
+            <a:endParaRPr/>
           </a:p>
         </p:txBody>
       </p:sp>
@@ -7948,7 +7794,7 @@
           <a:noFill/>
         </p:spPr>
         <p:txBody>
-          <a:bodyPr wrap="square" lIns="0" rIns="0" tIns="0" bIns="0">
+          <a:bodyPr wrap="square" lIns="0" tIns="0" rIns="0" bIns="0">
             <a:spAutoFit/>
           </a:bodyPr>
           <a:lstStyle/>
@@ -7987,7 +7833,7 @@
           <a:noFill/>
         </p:spPr>
         <p:txBody>
-          <a:bodyPr wrap="square" lIns="0" rIns="0" tIns="0" bIns="0">
+          <a:bodyPr wrap="square" lIns="0" tIns="0" rIns="0" bIns="0">
             <a:spAutoFit/>
           </a:bodyPr>
           <a:lstStyle/>
@@ -8026,7 +7872,7 @@
           <a:noFill/>
         </p:spPr>
         <p:txBody>
-          <a:bodyPr wrap="square" lIns="0" rIns="0" tIns="0" bIns="0">
+          <a:bodyPr wrap="square" lIns="0" tIns="0" rIns="0" bIns="0">
             <a:spAutoFit/>
           </a:bodyPr>
           <a:lstStyle/>
@@ -8088,6 +7934,7 @@
           <a:lstStyle/>
           <a:p>
             <a:pPr algn="ctr"/>
+            <a:endParaRPr/>
           </a:p>
         </p:txBody>
       </p:sp>
@@ -8108,7 +7955,7 @@
           <a:noFill/>
         </p:spPr>
         <p:txBody>
-          <a:bodyPr wrap="square" lIns="0" rIns="0" tIns="0" bIns="0">
+          <a:bodyPr wrap="square" lIns="0" tIns="0" rIns="0" bIns="0">
             <a:spAutoFit/>
           </a:bodyPr>
           <a:lstStyle/>
@@ -8147,7 +7994,7 @@
           <a:noFill/>
         </p:spPr>
         <p:txBody>
-          <a:bodyPr wrap="square" lIns="0" rIns="0" tIns="0" bIns="0">
+          <a:bodyPr wrap="square" lIns="0" tIns="0" rIns="0" bIns="0">
             <a:spAutoFit/>
           </a:bodyPr>
           <a:lstStyle/>
@@ -8202,6 +8049,7 @@
           <a:lstStyle/>
           <a:p>
             <a:pPr algn="ctr"/>
+            <a:endParaRPr/>
           </a:p>
         </p:txBody>
       </p:sp>
@@ -8214,7 +8062,7 @@
           <p:nvPr/>
         </p:nvPicPr>
         <p:blipFill>
-          <a:blip r:embed="rId2"/>
+          <a:blip r:embed="rId3"/>
           <a:stretch>
             <a:fillRect/>
           </a:stretch>
@@ -8246,7 +8094,7 @@
           <a:noFill/>
         </p:spPr>
         <p:txBody>
-          <a:bodyPr wrap="square" lIns="0" rIns="0" tIns="0" bIns="0">
+          <a:bodyPr wrap="square" lIns="0" tIns="0" rIns="0" bIns="0">
             <a:spAutoFit/>
           </a:bodyPr>
           <a:lstStyle/>
@@ -8277,7 +8125,7 @@
 </file>
 
 <file path=ppt/slides/slide16.xml><?xml version="1.0" encoding="utf-8"?>
-<p:sld xmlns:a="http://schemas.openxmlformats.org/drawingml/2006/main" xmlns:p="http://schemas.openxmlformats.org/presentationml/2006/main" xmlns:r="http://schemas.openxmlformats.org/officeDocument/2006/relationships">
+<p:sld xmlns:a="http://schemas.openxmlformats.org/drawingml/2006/main" xmlns:r="http://schemas.openxmlformats.org/officeDocument/2006/relationships" xmlns:p="http://schemas.openxmlformats.org/presentationml/2006/main">
   <p:cSld>
     <p:bg>
       <p:bgPr>
@@ -8293,7 +8141,14 @@
         <p:cNvGrpSpPr/>
         <p:nvPr/>
       </p:nvGrpSpPr>
-      <p:grpSpPr/>
+      <p:grpSpPr>
+        <a:xfrm>
+          <a:off x="0" y="0"/>
+          <a:ext cx="0" cy="0"/>
+          <a:chOff x="0" y="0"/>
+          <a:chExt cx="0" cy="0"/>
+        </a:xfrm>
+      </p:grpSpPr>
       <p:sp>
         <p:nvSpPr>
           <p:cNvPr id="2" name="Rectangle 1"/>
@@ -8334,6 +8189,7 @@
           <a:lstStyle/>
           <a:p>
             <a:pPr algn="ctr"/>
+            <a:endParaRPr/>
           </a:p>
         </p:txBody>
       </p:sp>
@@ -8451,6 +8307,7 @@
           <a:lstStyle/>
           <a:p>
             <a:pPr algn="ctr"/>
+            <a:endParaRPr/>
           </a:p>
         </p:txBody>
       </p:sp>
@@ -8604,6 +8461,7 @@
           <a:lstStyle/>
           <a:p>
             <a:pPr algn="ctr"/>
+            <a:endParaRPr/>
           </a:p>
         </p:txBody>
       </p:sp>
@@ -8757,6 +8615,7 @@
           <a:lstStyle/>
           <a:p>
             <a:pPr algn="ctr"/>
+            <a:endParaRPr/>
           </a:p>
         </p:txBody>
       </p:sp>
@@ -8908,6 +8767,7 @@
           <a:lstStyle/>
           <a:p>
             <a:pPr algn="ctr"/>
+            <a:endParaRPr/>
           </a:p>
         </p:txBody>
       </p:sp>
@@ -9028,7 +8888,7 @@
 </file>
 
 <file path=ppt/slides/slide17.xml><?xml version="1.0" encoding="utf-8"?>
-<p:sld xmlns:a="http://schemas.openxmlformats.org/drawingml/2006/main" xmlns:p="http://schemas.openxmlformats.org/presentationml/2006/main" xmlns:r="http://schemas.openxmlformats.org/officeDocument/2006/relationships">
+<p:sld xmlns:a="http://schemas.openxmlformats.org/drawingml/2006/main" xmlns:r="http://schemas.openxmlformats.org/officeDocument/2006/relationships" xmlns:p="http://schemas.openxmlformats.org/presentationml/2006/main">
   <p:cSld>
     <p:bg>
       <p:bgPr>
@@ -9044,7 +8904,14 @@
         <p:cNvGrpSpPr/>
         <p:nvPr/>
       </p:nvGrpSpPr>
-      <p:grpSpPr/>
+      <p:grpSpPr>
+        <a:xfrm>
+          <a:off x="0" y="0"/>
+          <a:ext cx="0" cy="0"/>
+          <a:chOff x="0" y="0"/>
+          <a:chExt cx="0" cy="0"/>
+        </a:xfrm>
+      </p:grpSpPr>
       <p:sp>
         <p:nvSpPr>
           <p:cNvPr id="2" name="Rectangle 1"/>
@@ -9085,6 +8952,7 @@
           <a:lstStyle/>
           <a:p>
             <a:pPr algn="ctr"/>
+            <a:endParaRPr/>
           </a:p>
         </p:txBody>
       </p:sp>
@@ -9105,7 +8973,7 @@
           <a:noFill/>
         </p:spPr>
         <p:txBody>
-          <a:bodyPr wrap="square" lIns="0" rIns="0" tIns="0" bIns="0">
+          <a:bodyPr wrap="square" lIns="0" tIns="0" rIns="0" bIns="0">
             <a:spAutoFit/>
           </a:bodyPr>
           <a:lstStyle/>
@@ -9144,7 +9012,7 @@
           <a:noFill/>
         </p:spPr>
         <p:txBody>
-          <a:bodyPr wrap="square" lIns="0" rIns="0" tIns="0" bIns="0">
+          <a:bodyPr wrap="square" lIns="0" tIns="0" rIns="0" bIns="0">
             <a:spAutoFit/>
           </a:bodyPr>
           <a:lstStyle/>
@@ -9183,7 +9051,7 @@
           <a:noFill/>
         </p:spPr>
         <p:txBody>
-          <a:bodyPr wrap="square" lIns="0" rIns="0" tIns="0" bIns="0">
+          <a:bodyPr wrap="square" lIns="0" tIns="0" rIns="0" bIns="0">
             <a:spAutoFit/>
           </a:bodyPr>
           <a:lstStyle/>
@@ -9245,6 +9113,7 @@
           <a:lstStyle/>
           <a:p>
             <a:pPr algn="ctr"/>
+            <a:endParaRPr/>
           </a:p>
         </p:txBody>
       </p:sp>
@@ -9265,7 +9134,7 @@
           <a:noFill/>
         </p:spPr>
         <p:txBody>
-          <a:bodyPr wrap="square" lIns="0" rIns="0" tIns="0" bIns="0">
+          <a:bodyPr wrap="square" lIns="0" tIns="0" rIns="0" bIns="0">
             <a:spAutoFit/>
           </a:bodyPr>
           <a:lstStyle/>
@@ -9304,7 +9173,7 @@
           <a:noFill/>
         </p:spPr>
         <p:txBody>
-          <a:bodyPr wrap="square" lIns="0" rIns="0" tIns="0" bIns="0">
+          <a:bodyPr wrap="square" lIns="0" tIns="0" rIns="0" bIns="0">
             <a:spAutoFit/>
           </a:bodyPr>
           <a:lstStyle/>
@@ -9359,6 +9228,7 @@
           <a:lstStyle/>
           <a:p>
             <a:pPr algn="ctr"/>
+            <a:endParaRPr/>
           </a:p>
         </p:txBody>
       </p:sp>
@@ -9371,7 +9241,7 @@
           <p:nvPr/>
         </p:nvPicPr>
         <p:blipFill>
-          <a:blip r:embed="rId2"/>
+          <a:blip r:embed="rId3"/>
           <a:stretch>
             <a:fillRect/>
           </a:stretch>
@@ -9403,7 +9273,7 @@
           <a:noFill/>
         </p:spPr>
         <p:txBody>
-          <a:bodyPr wrap="square" lIns="0" rIns="0" tIns="0" bIns="0">
+          <a:bodyPr wrap="square" lIns="0" tIns="0" rIns="0" bIns="0">
             <a:spAutoFit/>
           </a:bodyPr>
           <a:lstStyle/>
@@ -9434,7 +9304,7 @@
 </file>
 
 <file path=ppt/slides/slide18.xml><?xml version="1.0" encoding="utf-8"?>
-<p:sld xmlns:a="http://schemas.openxmlformats.org/drawingml/2006/main" xmlns:p="http://schemas.openxmlformats.org/presentationml/2006/main" xmlns:r="http://schemas.openxmlformats.org/officeDocument/2006/relationships">
+<p:sld xmlns:a="http://schemas.openxmlformats.org/drawingml/2006/main" xmlns:r="http://schemas.openxmlformats.org/officeDocument/2006/relationships" xmlns:p="http://schemas.openxmlformats.org/presentationml/2006/main">
   <p:cSld>
     <p:bg>
       <p:bgPr>
@@ -9450,7 +9320,14 @@
         <p:cNvGrpSpPr/>
         <p:nvPr/>
       </p:nvGrpSpPr>
-      <p:grpSpPr/>
+      <p:grpSpPr>
+        <a:xfrm>
+          <a:off x="0" y="0"/>
+          <a:ext cx="0" cy="0"/>
+          <a:chOff x="0" y="0"/>
+          <a:chExt cx="0" cy="0"/>
+        </a:xfrm>
+      </p:grpSpPr>
       <p:sp>
         <p:nvSpPr>
           <p:cNvPr id="2" name="Rectangle 1"/>
@@ -9491,6 +9368,7 @@
           <a:lstStyle/>
           <a:p>
             <a:pPr algn="ctr"/>
+            <a:endParaRPr/>
           </a:p>
         </p:txBody>
       </p:sp>
@@ -9511,7 +9389,7 @@
           <a:noFill/>
         </p:spPr>
         <p:txBody>
-          <a:bodyPr wrap="square" lIns="0" rIns="0" tIns="0" bIns="0">
+          <a:bodyPr wrap="square" lIns="0" tIns="0" rIns="0" bIns="0">
             <a:spAutoFit/>
           </a:bodyPr>
           <a:lstStyle/>
@@ -9550,7 +9428,7 @@
           <a:noFill/>
         </p:spPr>
         <p:txBody>
-          <a:bodyPr wrap="square" lIns="0" rIns="0" tIns="0" bIns="0">
+          <a:bodyPr wrap="square" lIns="0" tIns="0" rIns="0" bIns="0">
             <a:spAutoFit/>
           </a:bodyPr>
           <a:lstStyle/>
@@ -9589,7 +9467,7 @@
           <a:noFill/>
         </p:spPr>
         <p:txBody>
-          <a:bodyPr wrap="square" lIns="0" rIns="0" tIns="0" bIns="0">
+          <a:bodyPr wrap="square" lIns="0" tIns="0" rIns="0" bIns="0">
             <a:spAutoFit/>
           </a:bodyPr>
           <a:lstStyle/>
@@ -9651,6 +9529,7 @@
           <a:lstStyle/>
           <a:p>
             <a:pPr algn="ctr"/>
+            <a:endParaRPr/>
           </a:p>
         </p:txBody>
       </p:sp>
@@ -9671,7 +9550,7 @@
           <a:noFill/>
         </p:spPr>
         <p:txBody>
-          <a:bodyPr wrap="square" lIns="0" rIns="0" tIns="0" bIns="0">
+          <a:bodyPr wrap="square" lIns="0" tIns="0" rIns="0" bIns="0">
             <a:spAutoFit/>
           </a:bodyPr>
           <a:lstStyle/>
@@ -9710,7 +9589,7 @@
           <a:noFill/>
         </p:spPr>
         <p:txBody>
-          <a:bodyPr wrap="square" lIns="0" rIns="0" tIns="0" bIns="0">
+          <a:bodyPr wrap="square" lIns="0" tIns="0" rIns="0" bIns="0">
             <a:spAutoFit/>
           </a:bodyPr>
           <a:lstStyle/>
@@ -9761,6 +9640,7 @@
           <a:lstStyle/>
           <a:p>
             <a:pPr algn="ctr"/>
+            <a:endParaRPr/>
           </a:p>
         </p:txBody>
       </p:sp>
@@ -9781,7 +9661,7 @@
           <a:noFill/>
         </p:spPr>
         <p:txBody>
-          <a:bodyPr wrap="square" lIns="0" rIns="0" tIns="0" bIns="0">
+          <a:bodyPr wrap="square" lIns="0" tIns="0" rIns="0" bIns="0">
             <a:spAutoFit/>
           </a:bodyPr>
           <a:lstStyle/>
@@ -9843,6 +9723,7 @@
           <a:lstStyle/>
           <a:p>
             <a:pPr algn="ctr"/>
+            <a:endParaRPr/>
           </a:p>
         </p:txBody>
       </p:sp>
@@ -9863,7 +9744,7 @@
           <a:noFill/>
         </p:spPr>
         <p:txBody>
-          <a:bodyPr wrap="square" lIns="0" rIns="0" tIns="0" bIns="0">
+          <a:bodyPr wrap="square" lIns="0" tIns="0" rIns="0" bIns="0">
             <a:spAutoFit/>
           </a:bodyPr>
           <a:lstStyle/>
@@ -9925,6 +9806,7 @@
           <a:lstStyle/>
           <a:p>
             <a:pPr algn="ctr"/>
+            <a:endParaRPr/>
           </a:p>
         </p:txBody>
       </p:sp>
@@ -9945,7 +9827,7 @@
           <a:noFill/>
         </p:spPr>
         <p:txBody>
-          <a:bodyPr wrap="square" lIns="0" rIns="0" tIns="0" bIns="0">
+          <a:bodyPr wrap="square" lIns="0" tIns="0" rIns="0" bIns="0">
             <a:spAutoFit/>
           </a:bodyPr>
           <a:lstStyle/>
@@ -10007,6 +9889,7 @@
           <a:lstStyle/>
           <a:p>
             <a:pPr algn="ctr"/>
+            <a:endParaRPr/>
           </a:p>
         </p:txBody>
       </p:sp>
@@ -10027,7 +9910,7 @@
           <a:noFill/>
         </p:spPr>
         <p:txBody>
-          <a:bodyPr wrap="square" lIns="0" rIns="0" tIns="0" bIns="0">
+          <a:bodyPr wrap="square" lIns="0" tIns="0" rIns="0" bIns="0">
             <a:spAutoFit/>
           </a:bodyPr>
           <a:lstStyle/>
@@ -10089,6 +9972,7 @@
           <a:lstStyle/>
           <a:p>
             <a:pPr algn="ctr"/>
+            <a:endParaRPr/>
           </a:p>
         </p:txBody>
       </p:sp>
@@ -10109,7 +9993,7 @@
           <a:noFill/>
         </p:spPr>
         <p:txBody>
-          <a:bodyPr wrap="square" lIns="0" rIns="0" tIns="0" bIns="0">
+          <a:bodyPr wrap="square" lIns="0" tIns="0" rIns="0" bIns="0">
             <a:spAutoFit/>
           </a:bodyPr>
           <a:lstStyle/>
@@ -10171,6 +10055,7 @@
           <a:lstStyle/>
           <a:p>
             <a:pPr algn="ctr"/>
+            <a:endParaRPr/>
           </a:p>
         </p:txBody>
       </p:sp>
@@ -10191,7 +10076,7 @@
           <a:noFill/>
         </p:spPr>
         <p:txBody>
-          <a:bodyPr wrap="square" lIns="0" rIns="0" tIns="0" bIns="0">
+          <a:bodyPr wrap="square" lIns="0" tIns="0" rIns="0" bIns="0">
             <a:spAutoFit/>
           </a:bodyPr>
           <a:lstStyle/>
@@ -10253,6 +10138,7 @@
           <a:lstStyle/>
           <a:p>
             <a:pPr algn="ctr"/>
+            <a:endParaRPr/>
           </a:p>
         </p:txBody>
       </p:sp>
@@ -10273,7 +10159,7 @@
           <a:noFill/>
         </p:spPr>
         <p:txBody>
-          <a:bodyPr wrap="square" lIns="0" rIns="0" tIns="0" bIns="0">
+          <a:bodyPr wrap="square" lIns="0" tIns="0" rIns="0" bIns="0">
             <a:spAutoFit/>
           </a:bodyPr>
           <a:lstStyle/>
@@ -10335,6 +10221,7 @@
           <a:lstStyle/>
           <a:p>
             <a:pPr algn="ctr"/>
+            <a:endParaRPr/>
           </a:p>
         </p:txBody>
       </p:sp>
@@ -10355,7 +10242,7 @@
           <a:noFill/>
         </p:spPr>
         <p:txBody>
-          <a:bodyPr wrap="square" lIns="0" rIns="0" tIns="0" bIns="0">
+          <a:bodyPr wrap="square" lIns="0" tIns="0" rIns="0" bIns="0">
             <a:spAutoFit/>
           </a:bodyPr>
           <a:lstStyle/>
@@ -10417,6 +10304,7 @@
           <a:lstStyle/>
           <a:p>
             <a:pPr algn="ctr"/>
+            <a:endParaRPr/>
           </a:p>
         </p:txBody>
       </p:sp>
@@ -10437,7 +10325,7 @@
           <a:noFill/>
         </p:spPr>
         <p:txBody>
-          <a:bodyPr wrap="square" lIns="0" rIns="0" tIns="0" bIns="0">
+          <a:bodyPr wrap="square" lIns="0" tIns="0" rIns="0" bIns="0">
             <a:spAutoFit/>
           </a:bodyPr>
           <a:lstStyle/>
@@ -10499,6 +10387,7 @@
           <a:lstStyle/>
           <a:p>
             <a:pPr algn="ctr"/>
+            <a:endParaRPr/>
           </a:p>
         </p:txBody>
       </p:sp>
@@ -10519,7 +10408,7 @@
           <a:noFill/>
         </p:spPr>
         <p:txBody>
-          <a:bodyPr wrap="square" lIns="0" rIns="0" tIns="0" bIns="0">
+          <a:bodyPr wrap="square" lIns="0" tIns="0" rIns="0" bIns="0">
             <a:spAutoFit/>
           </a:bodyPr>
           <a:lstStyle/>
@@ -10581,6 +10470,7 @@
           <a:lstStyle/>
           <a:p>
             <a:pPr algn="ctr"/>
+            <a:endParaRPr/>
           </a:p>
         </p:txBody>
       </p:sp>
@@ -10601,7 +10491,7 @@
           <a:noFill/>
         </p:spPr>
         <p:txBody>
-          <a:bodyPr wrap="square" lIns="0" rIns="0" tIns="0" bIns="0">
+          <a:bodyPr wrap="square" lIns="0" tIns="0" rIns="0" bIns="0">
             <a:spAutoFit/>
           </a:bodyPr>
           <a:lstStyle/>
@@ -10663,6 +10553,7 @@
           <a:lstStyle/>
           <a:p>
             <a:pPr algn="ctr"/>
+            <a:endParaRPr/>
           </a:p>
         </p:txBody>
       </p:sp>
@@ -10683,7 +10574,7 @@
           <a:noFill/>
         </p:spPr>
         <p:txBody>
-          <a:bodyPr wrap="square" lIns="0" rIns="0" tIns="0" bIns="0">
+          <a:bodyPr wrap="square" lIns="0" tIns="0" rIns="0" bIns="0">
             <a:spAutoFit/>
           </a:bodyPr>
           <a:lstStyle/>
@@ -10745,6 +10636,7 @@
           <a:lstStyle/>
           <a:p>
             <a:pPr algn="ctr"/>
+            <a:endParaRPr/>
           </a:p>
         </p:txBody>
       </p:sp>
@@ -10765,7 +10657,7 @@
           <a:noFill/>
         </p:spPr>
         <p:txBody>
-          <a:bodyPr wrap="square" lIns="0" rIns="0" tIns="0" bIns="0">
+          <a:bodyPr wrap="square" lIns="0" tIns="0" rIns="0" bIns="0">
             <a:spAutoFit/>
           </a:bodyPr>
           <a:lstStyle/>
@@ -10827,6 +10719,7 @@
           <a:lstStyle/>
           <a:p>
             <a:pPr algn="ctr"/>
+            <a:endParaRPr/>
           </a:p>
         </p:txBody>
       </p:sp>
@@ -10847,7 +10740,7 @@
           <a:noFill/>
         </p:spPr>
         <p:txBody>
-          <a:bodyPr wrap="square" lIns="0" rIns="0" tIns="0" bIns="0">
+          <a:bodyPr wrap="square" lIns="0" tIns="0" rIns="0" bIns="0">
             <a:spAutoFit/>
           </a:bodyPr>
           <a:lstStyle/>
@@ -10909,6 +10802,7 @@
           <a:lstStyle/>
           <a:p>
             <a:pPr algn="ctr"/>
+            <a:endParaRPr/>
           </a:p>
         </p:txBody>
       </p:sp>
@@ -10929,7 +10823,7 @@
           <a:noFill/>
         </p:spPr>
         <p:txBody>
-          <a:bodyPr wrap="square" lIns="0" rIns="0" tIns="0" bIns="0">
+          <a:bodyPr wrap="square" lIns="0" tIns="0" rIns="0" bIns="0">
             <a:spAutoFit/>
           </a:bodyPr>
           <a:lstStyle/>
@@ -10968,7 +10862,7 @@
           <a:noFill/>
         </p:spPr>
         <p:txBody>
-          <a:bodyPr wrap="square" lIns="0" rIns="0" tIns="0" bIns="0">
+          <a:bodyPr wrap="square" lIns="0" tIns="0" rIns="0" bIns="0">
             <a:spAutoFit/>
           </a:bodyPr>
           <a:lstStyle/>
@@ -11032,7 +10926,7 @@
 </file>
 
 <file path=ppt/slides/slide19.xml><?xml version="1.0" encoding="utf-8"?>
-<p:sld xmlns:a="http://schemas.openxmlformats.org/drawingml/2006/main" xmlns:p="http://schemas.openxmlformats.org/presentationml/2006/main" xmlns:r="http://schemas.openxmlformats.org/officeDocument/2006/relationships">
+<p:sld xmlns:a="http://schemas.openxmlformats.org/drawingml/2006/main" xmlns:r="http://schemas.openxmlformats.org/officeDocument/2006/relationships" xmlns:p="http://schemas.openxmlformats.org/presentationml/2006/main">
   <p:cSld>
     <p:bg>
       <p:bgPr>
@@ -11048,7 +10942,14 @@
         <p:cNvGrpSpPr/>
         <p:nvPr/>
       </p:nvGrpSpPr>
-      <p:grpSpPr/>
+      <p:grpSpPr>
+        <a:xfrm>
+          <a:off x="0" y="0"/>
+          <a:ext cx="0" cy="0"/>
+          <a:chOff x="0" y="0"/>
+          <a:chExt cx="0" cy="0"/>
+        </a:xfrm>
+      </p:grpSpPr>
       <p:sp>
         <p:nvSpPr>
           <p:cNvPr id="2" name="Rectangle 1"/>
@@ -11089,6 +10990,7 @@
           <a:lstStyle/>
           <a:p>
             <a:pPr algn="ctr"/>
+            <a:endParaRPr/>
           </a:p>
         </p:txBody>
       </p:sp>
@@ -11109,7 +11011,7 @@
           <a:noFill/>
         </p:spPr>
         <p:txBody>
-          <a:bodyPr wrap="square" lIns="0" rIns="0" tIns="0" bIns="0">
+          <a:bodyPr wrap="square" lIns="0" tIns="0" rIns="0" bIns="0">
             <a:spAutoFit/>
           </a:bodyPr>
           <a:lstStyle/>
@@ -11148,7 +11050,7 @@
           <a:noFill/>
         </p:spPr>
         <p:txBody>
-          <a:bodyPr wrap="square" lIns="0" rIns="0" tIns="0" bIns="0">
+          <a:bodyPr wrap="square" lIns="0" tIns="0" rIns="0" bIns="0">
             <a:spAutoFit/>
           </a:bodyPr>
           <a:lstStyle/>
@@ -11187,7 +11089,7 @@
           <a:noFill/>
         </p:spPr>
         <p:txBody>
-          <a:bodyPr wrap="square" lIns="0" rIns="0" tIns="0" bIns="0">
+          <a:bodyPr wrap="square" lIns="0" tIns="0" rIns="0" bIns="0">
             <a:spAutoFit/>
           </a:bodyPr>
           <a:lstStyle/>
@@ -11249,6 +11151,7 @@
           <a:lstStyle/>
           <a:p>
             <a:pPr algn="ctr"/>
+            <a:endParaRPr/>
           </a:p>
         </p:txBody>
       </p:sp>
@@ -11269,7 +11172,7 @@
           <a:noFill/>
         </p:spPr>
         <p:txBody>
-          <a:bodyPr wrap="square" lIns="0" rIns="0" tIns="0" bIns="0">
+          <a:bodyPr wrap="square" lIns="0" tIns="0" rIns="0" bIns="0">
             <a:spAutoFit/>
           </a:bodyPr>
           <a:lstStyle/>
@@ -11308,7 +11211,7 @@
           <a:noFill/>
         </p:spPr>
         <p:txBody>
-          <a:bodyPr wrap="square" lIns="0" rIns="0" tIns="0" bIns="0">
+          <a:bodyPr wrap="square" lIns="0" tIns="0" rIns="0" bIns="0">
             <a:spAutoFit/>
           </a:bodyPr>
           <a:lstStyle/>
@@ -11363,6 +11266,7 @@
           <a:lstStyle/>
           <a:p>
             <a:pPr algn="ctr"/>
+            <a:endParaRPr/>
           </a:p>
         </p:txBody>
       </p:sp>
@@ -11406,6 +11310,7 @@
           <a:lstStyle/>
           <a:p>
             <a:pPr algn="ctr"/>
+            <a:endParaRPr/>
           </a:p>
         </p:txBody>
       </p:sp>
@@ -11426,7 +11331,7 @@
           <a:noFill/>
         </p:spPr>
         <p:txBody>
-          <a:bodyPr wrap="square" lIns="0" rIns="0" tIns="0" bIns="0">
+          <a:bodyPr wrap="square" lIns="0" tIns="0" rIns="0" bIns="0">
             <a:spAutoFit/>
           </a:bodyPr>
           <a:lstStyle/>
@@ -11465,7 +11370,7 @@
           <a:noFill/>
         </p:spPr>
         <p:txBody>
-          <a:bodyPr wrap="square" lIns="0" rIns="0" tIns="0" bIns="0">
+          <a:bodyPr wrap="square" lIns="0" tIns="0" rIns="0" bIns="0">
             <a:spAutoFit/>
           </a:bodyPr>
           <a:lstStyle/>
@@ -11531,6 +11436,7 @@
           <a:lstStyle/>
           <a:p>
             <a:pPr algn="ctr"/>
+            <a:endParaRPr/>
           </a:p>
         </p:txBody>
       </p:sp>
@@ -11574,6 +11480,7 @@
           <a:lstStyle/>
           <a:p>
             <a:pPr algn="ctr"/>
+            <a:endParaRPr/>
           </a:p>
         </p:txBody>
       </p:sp>
@@ -11594,7 +11501,7 @@
           <a:noFill/>
         </p:spPr>
         <p:txBody>
-          <a:bodyPr wrap="square" lIns="0" rIns="0" tIns="0" bIns="0">
+          <a:bodyPr wrap="square" lIns="0" tIns="0" rIns="0" bIns="0">
             <a:spAutoFit/>
           </a:bodyPr>
           <a:lstStyle/>
@@ -11633,7 +11540,7 @@
           <a:noFill/>
         </p:spPr>
         <p:txBody>
-          <a:bodyPr wrap="square" lIns="0" rIns="0" tIns="0" bIns="0">
+          <a:bodyPr wrap="square" lIns="0" tIns="0" rIns="0" bIns="0">
             <a:spAutoFit/>
           </a:bodyPr>
           <a:lstStyle/>
@@ -11699,6 +11606,7 @@
           <a:lstStyle/>
           <a:p>
             <a:pPr algn="ctr"/>
+            <a:endParaRPr/>
           </a:p>
         </p:txBody>
       </p:sp>
@@ -11742,6 +11650,7 @@
           <a:lstStyle/>
           <a:p>
             <a:pPr algn="ctr"/>
+            <a:endParaRPr/>
           </a:p>
         </p:txBody>
       </p:sp>
@@ -11762,7 +11671,7 @@
           <a:noFill/>
         </p:spPr>
         <p:txBody>
-          <a:bodyPr wrap="square" lIns="0" rIns="0" tIns="0" bIns="0">
+          <a:bodyPr wrap="square" lIns="0" tIns="0" rIns="0" bIns="0">
             <a:spAutoFit/>
           </a:bodyPr>
           <a:lstStyle/>
@@ -11801,7 +11710,7 @@
           <a:noFill/>
         </p:spPr>
         <p:txBody>
-          <a:bodyPr wrap="square" lIns="0" rIns="0" tIns="0" bIns="0">
+          <a:bodyPr wrap="square" lIns="0" tIns="0" rIns="0" bIns="0">
             <a:spAutoFit/>
           </a:bodyPr>
           <a:lstStyle/>
@@ -11865,6 +11774,7 @@
           <a:lstStyle/>
           <a:p>
             <a:pPr algn="ctr"/>
+            <a:endParaRPr/>
           </a:p>
         </p:txBody>
       </p:sp>
@@ -11885,7 +11795,7 @@
           <a:noFill/>
         </p:spPr>
         <p:txBody>
-          <a:bodyPr wrap="square" lIns="0" rIns="0" tIns="0" bIns="0">
+          <a:bodyPr wrap="square" lIns="0" tIns="0" rIns="0" bIns="0">
             <a:spAutoFit/>
           </a:bodyPr>
           <a:lstStyle/>
@@ -11916,7 +11826,7 @@
 </file>
 
 <file path=ppt/slides/slide2.xml><?xml version="1.0" encoding="utf-8"?>
-<p:sld xmlns:a="http://schemas.openxmlformats.org/drawingml/2006/main" xmlns:p="http://schemas.openxmlformats.org/presentationml/2006/main" xmlns:r="http://schemas.openxmlformats.org/officeDocument/2006/relationships">
+<p:sld xmlns:a="http://schemas.openxmlformats.org/drawingml/2006/main" xmlns:r="http://schemas.openxmlformats.org/officeDocument/2006/relationships" xmlns:p="http://schemas.openxmlformats.org/presentationml/2006/main">
   <p:cSld>
     <p:bg>
       <p:bgPr>
@@ -11932,7 +11842,14 @@
         <p:cNvGrpSpPr/>
         <p:nvPr/>
       </p:nvGrpSpPr>
-      <p:grpSpPr/>
+      <p:grpSpPr>
+        <a:xfrm>
+          <a:off x="0" y="0"/>
+          <a:ext cx="0" cy="0"/>
+          <a:chOff x="0" y="0"/>
+          <a:chExt cx="0" cy="0"/>
+        </a:xfrm>
+      </p:grpSpPr>
       <p:sp>
         <p:nvSpPr>
           <p:cNvPr id="2" name="Rectangle 1"/>
@@ -11973,6 +11890,7 @@
           <a:lstStyle/>
           <a:p>
             <a:pPr algn="ctr"/>
+            <a:endParaRPr/>
           </a:p>
         </p:txBody>
       </p:sp>
@@ -11993,7 +11911,7 @@
           <a:noFill/>
         </p:spPr>
         <p:txBody>
-          <a:bodyPr wrap="square" lIns="0" rIns="0" tIns="0" bIns="0">
+          <a:bodyPr wrap="square" lIns="0" tIns="0" rIns="0" bIns="0">
             <a:spAutoFit/>
           </a:bodyPr>
           <a:lstStyle/>
@@ -12032,7 +11950,7 @@
           <a:noFill/>
         </p:spPr>
         <p:txBody>
-          <a:bodyPr wrap="square" lIns="0" rIns="0" tIns="0" bIns="0">
+          <a:bodyPr wrap="square" lIns="0" tIns="0" rIns="0" bIns="0">
             <a:spAutoFit/>
           </a:bodyPr>
           <a:lstStyle/>
@@ -12071,7 +11989,7 @@
           <a:noFill/>
         </p:spPr>
         <p:txBody>
-          <a:bodyPr wrap="square" lIns="0" rIns="0" tIns="0" bIns="0">
+          <a:bodyPr wrap="square" lIns="0" tIns="0" rIns="0" bIns="0">
             <a:spAutoFit/>
           </a:bodyPr>
           <a:lstStyle/>
@@ -12133,6 +12051,7 @@
           <a:lstStyle/>
           <a:p>
             <a:pPr algn="ctr"/>
+            <a:endParaRPr/>
           </a:p>
         </p:txBody>
       </p:sp>
@@ -12153,7 +12072,7 @@
           <a:noFill/>
         </p:spPr>
         <p:txBody>
-          <a:bodyPr wrap="square" lIns="0" rIns="0" tIns="0" bIns="0">
+          <a:bodyPr wrap="square" lIns="0" tIns="0" rIns="0" bIns="0">
             <a:spAutoFit/>
           </a:bodyPr>
           <a:lstStyle/>
@@ -12192,7 +12111,7 @@
           <a:noFill/>
         </p:spPr>
         <p:txBody>
-          <a:bodyPr wrap="square" lIns="0" rIns="0" tIns="0" bIns="0">
+          <a:bodyPr wrap="square" lIns="0" tIns="0" rIns="0" bIns="0">
             <a:spAutoFit/>
           </a:bodyPr>
           <a:lstStyle/>
@@ -12247,6 +12166,7 @@
           <a:lstStyle/>
           <a:p>
             <a:pPr algn="ctr"/>
+            <a:endParaRPr/>
           </a:p>
         </p:txBody>
       </p:sp>
@@ -12290,6 +12210,7 @@
           <a:lstStyle/>
           <a:p>
             <a:pPr algn="ctr"/>
+            <a:endParaRPr/>
           </a:p>
         </p:txBody>
       </p:sp>
@@ -12310,7 +12231,7 @@
           <a:noFill/>
         </p:spPr>
         <p:txBody>
-          <a:bodyPr wrap="square" lIns="0" rIns="0" tIns="0" bIns="0">
+          <a:bodyPr wrap="square" lIns="0" tIns="0" rIns="0" bIns="0">
             <a:spAutoFit/>
           </a:bodyPr>
           <a:lstStyle/>
@@ -12349,7 +12270,7 @@
           <a:noFill/>
         </p:spPr>
         <p:txBody>
-          <a:bodyPr wrap="square" lIns="0" rIns="0" tIns="0" bIns="0">
+          <a:bodyPr wrap="square" lIns="0" tIns="0" rIns="0" bIns="0">
             <a:spAutoFit/>
           </a:bodyPr>
           <a:lstStyle/>
@@ -12415,6 +12336,7 @@
           <a:lstStyle/>
           <a:p>
             <a:pPr algn="ctr"/>
+            <a:endParaRPr/>
           </a:p>
         </p:txBody>
       </p:sp>
@@ -12458,6 +12380,7 @@
           <a:lstStyle/>
           <a:p>
             <a:pPr algn="ctr"/>
+            <a:endParaRPr/>
           </a:p>
         </p:txBody>
       </p:sp>
@@ -12478,7 +12401,7 @@
           <a:noFill/>
         </p:spPr>
         <p:txBody>
-          <a:bodyPr wrap="square" lIns="0" rIns="0" tIns="0" bIns="0">
+          <a:bodyPr wrap="square" lIns="0" tIns="0" rIns="0" bIns="0">
             <a:spAutoFit/>
           </a:bodyPr>
           <a:lstStyle/>
@@ -12517,7 +12440,7 @@
           <a:noFill/>
         </p:spPr>
         <p:txBody>
-          <a:bodyPr wrap="square" lIns="0" rIns="0" tIns="0" bIns="0">
+          <a:bodyPr wrap="square" lIns="0" tIns="0" rIns="0" bIns="0">
             <a:spAutoFit/>
           </a:bodyPr>
           <a:lstStyle/>
@@ -12583,6 +12506,7 @@
           <a:lstStyle/>
           <a:p>
             <a:pPr algn="ctr"/>
+            <a:endParaRPr/>
           </a:p>
         </p:txBody>
       </p:sp>
@@ -12626,6 +12550,7 @@
           <a:lstStyle/>
           <a:p>
             <a:pPr algn="ctr"/>
+            <a:endParaRPr/>
           </a:p>
         </p:txBody>
       </p:sp>
@@ -12646,7 +12571,7 @@
           <a:noFill/>
         </p:spPr>
         <p:txBody>
-          <a:bodyPr wrap="square" lIns="0" rIns="0" tIns="0" bIns="0">
+          <a:bodyPr wrap="square" lIns="0" tIns="0" rIns="0" bIns="0">
             <a:spAutoFit/>
           </a:bodyPr>
           <a:lstStyle/>
@@ -12685,7 +12610,7 @@
           <a:noFill/>
         </p:spPr>
         <p:txBody>
-          <a:bodyPr wrap="square" lIns="0" rIns="0" tIns="0" bIns="0">
+          <a:bodyPr wrap="square" lIns="0" tIns="0" rIns="0" bIns="0">
             <a:spAutoFit/>
           </a:bodyPr>
           <a:lstStyle/>
@@ -12716,7 +12641,7 @@
 </file>
 
 <file path=ppt/slides/slide20.xml><?xml version="1.0" encoding="utf-8"?>
-<p:sld xmlns:a="http://schemas.openxmlformats.org/drawingml/2006/main" xmlns:p="http://schemas.openxmlformats.org/presentationml/2006/main" xmlns:r="http://schemas.openxmlformats.org/officeDocument/2006/relationships">
+<p:sld xmlns:a="http://schemas.openxmlformats.org/drawingml/2006/main" xmlns:r="http://schemas.openxmlformats.org/officeDocument/2006/relationships" xmlns:p="http://schemas.openxmlformats.org/presentationml/2006/main">
   <p:cSld>
     <p:bg>
       <p:bgPr>
@@ -12732,7 +12657,14 @@
         <p:cNvGrpSpPr/>
         <p:nvPr/>
       </p:nvGrpSpPr>
-      <p:grpSpPr/>
+      <p:grpSpPr>
+        <a:xfrm>
+          <a:off x="0" y="0"/>
+          <a:ext cx="0" cy="0"/>
+          <a:chOff x="0" y="0"/>
+          <a:chExt cx="0" cy="0"/>
+        </a:xfrm>
+      </p:grpSpPr>
       <p:sp>
         <p:nvSpPr>
           <p:cNvPr id="2" name="Rectangle 1"/>
@@ -12773,6 +12705,7 @@
           <a:lstStyle/>
           <a:p>
             <a:pPr algn="ctr"/>
+            <a:endParaRPr/>
           </a:p>
         </p:txBody>
       </p:sp>
@@ -12890,6 +12823,7 @@
           <a:lstStyle/>
           <a:p>
             <a:pPr algn="ctr"/>
+            <a:endParaRPr/>
           </a:p>
         </p:txBody>
       </p:sp>
@@ -13043,6 +12977,7 @@
           <a:lstStyle/>
           <a:p>
             <a:pPr algn="ctr"/>
+            <a:endParaRPr/>
           </a:p>
         </p:txBody>
       </p:sp>
@@ -13196,6 +13131,7 @@
           <a:lstStyle/>
           <a:p>
             <a:pPr algn="ctr"/>
+            <a:endParaRPr/>
           </a:p>
         </p:txBody>
       </p:sp>
@@ -13347,6 +13283,7 @@
           <a:lstStyle/>
           <a:p>
             <a:pPr algn="ctr"/>
+            <a:endParaRPr/>
           </a:p>
         </p:txBody>
       </p:sp>
@@ -13467,7 +13404,7 @@
 </file>
 
 <file path=ppt/slides/slide21.xml><?xml version="1.0" encoding="utf-8"?>
-<p:sld xmlns:a="http://schemas.openxmlformats.org/drawingml/2006/main" xmlns:p="http://schemas.openxmlformats.org/presentationml/2006/main" xmlns:r="http://schemas.openxmlformats.org/officeDocument/2006/relationships">
+<p:sld xmlns:a="http://schemas.openxmlformats.org/drawingml/2006/main" xmlns:r="http://schemas.openxmlformats.org/officeDocument/2006/relationships" xmlns:p="http://schemas.openxmlformats.org/presentationml/2006/main">
   <p:cSld>
     <p:bg>
       <p:bgPr>
@@ -13483,7 +13420,14 @@
         <p:cNvGrpSpPr/>
         <p:nvPr/>
       </p:nvGrpSpPr>
-      <p:grpSpPr/>
+      <p:grpSpPr>
+        <a:xfrm>
+          <a:off x="0" y="0"/>
+          <a:ext cx="0" cy="0"/>
+          <a:chOff x="0" y="0"/>
+          <a:chExt cx="0" cy="0"/>
+        </a:xfrm>
+      </p:grpSpPr>
       <p:sp>
         <p:nvSpPr>
           <p:cNvPr id="2" name="Rectangle 1"/>
@@ -13524,6 +13468,7 @@
           <a:lstStyle/>
           <a:p>
             <a:pPr algn="ctr"/>
+            <a:endParaRPr/>
           </a:p>
         </p:txBody>
       </p:sp>
@@ -13544,7 +13489,7 @@
           <a:noFill/>
         </p:spPr>
         <p:txBody>
-          <a:bodyPr wrap="square" lIns="0" rIns="0" tIns="0" bIns="0">
+          <a:bodyPr wrap="square" lIns="0" tIns="0" rIns="0" bIns="0">
             <a:spAutoFit/>
           </a:bodyPr>
           <a:lstStyle/>
@@ -13583,7 +13528,7 @@
           <a:noFill/>
         </p:spPr>
         <p:txBody>
-          <a:bodyPr wrap="square" lIns="0" rIns="0" tIns="0" bIns="0">
+          <a:bodyPr wrap="square" lIns="0" tIns="0" rIns="0" bIns="0">
             <a:spAutoFit/>
           </a:bodyPr>
           <a:lstStyle/>
@@ -13634,6 +13579,7 @@
           <a:lstStyle/>
           <a:p>
             <a:pPr algn="ctr"/>
+            <a:endParaRPr/>
           </a:p>
         </p:txBody>
       </p:sp>
@@ -13654,7 +13600,7 @@
           <a:noFill/>
         </p:spPr>
         <p:txBody>
-          <a:bodyPr wrap="square" lIns="0" rIns="0" tIns="0" bIns="0">
+          <a:bodyPr wrap="square" lIns="0" tIns="0" rIns="0" bIns="0">
             <a:spAutoFit/>
           </a:bodyPr>
           <a:lstStyle/>
@@ -13693,7 +13639,7 @@
           <a:noFill/>
         </p:spPr>
         <p:txBody>
-          <a:bodyPr wrap="square" lIns="0" rIns="0" tIns="0" bIns="0">
+          <a:bodyPr wrap="square" lIns="0" tIns="0" rIns="0" bIns="0">
             <a:spAutoFit/>
           </a:bodyPr>
           <a:lstStyle/>
@@ -13748,6 +13694,7 @@
           <a:lstStyle/>
           <a:p>
             <a:pPr algn="ctr"/>
+            <a:endParaRPr/>
           </a:p>
         </p:txBody>
       </p:sp>
@@ -13768,7 +13715,7 @@
           <a:noFill/>
         </p:spPr>
         <p:txBody>
-          <a:bodyPr wrap="square" lIns="0" rIns="0" tIns="0" bIns="0">
+          <a:bodyPr wrap="square" lIns="0" tIns="0" rIns="0" bIns="0">
             <a:spAutoFit/>
           </a:bodyPr>
           <a:lstStyle/>
@@ -13807,7 +13754,7 @@
           <a:noFill/>
         </p:spPr>
         <p:txBody>
-          <a:bodyPr wrap="square" lIns="0" rIns="0" tIns="0" bIns="0">
+          <a:bodyPr wrap="square" lIns="0" tIns="0" rIns="0" bIns="0">
             <a:spAutoFit/>
           </a:bodyPr>
           <a:lstStyle/>
@@ -13873,6 +13820,7 @@
           <a:lstStyle/>
           <a:p>
             <a:pPr algn="ctr"/>
+            <a:endParaRPr/>
           </a:p>
         </p:txBody>
       </p:sp>
@@ -13893,7 +13841,7 @@
           <a:noFill/>
         </p:spPr>
         <p:txBody>
-          <a:bodyPr wrap="square" lIns="0" rIns="0" tIns="0" bIns="0">
+          <a:bodyPr wrap="square" lIns="0" tIns="0" rIns="0" bIns="0">
             <a:spAutoFit/>
           </a:bodyPr>
           <a:lstStyle/>
@@ -13932,7 +13880,7 @@
           <a:noFill/>
         </p:spPr>
         <p:txBody>
-          <a:bodyPr wrap="square" lIns="0" rIns="0" tIns="0" bIns="0">
+          <a:bodyPr wrap="square" lIns="0" tIns="0" rIns="0" bIns="0">
             <a:spAutoFit/>
           </a:bodyPr>
           <a:lstStyle/>
@@ -13998,6 +13946,7 @@
           <a:lstStyle/>
           <a:p>
             <a:pPr algn="ctr"/>
+            <a:endParaRPr/>
           </a:p>
         </p:txBody>
       </p:sp>
@@ -14018,7 +13967,7 @@
           <a:noFill/>
         </p:spPr>
         <p:txBody>
-          <a:bodyPr wrap="square" lIns="0" rIns="0" tIns="0" bIns="0">
+          <a:bodyPr wrap="square" lIns="0" tIns="0" rIns="0" bIns="0">
             <a:spAutoFit/>
           </a:bodyPr>
           <a:lstStyle/>
@@ -14046,7 +13995,7 @@
           <a:noFill/>
         </p:spPr>
         <p:txBody>
-          <a:bodyPr wrap="square" lIns="0" rIns="0" tIns="0" bIns="0">
+          <a:bodyPr wrap="square" lIns="0" tIns="0" rIns="0" bIns="0">
             <a:spAutoFit/>
           </a:bodyPr>
           <a:lstStyle/>
@@ -14112,6 +14061,7 @@
           <a:lstStyle/>
           <a:p>
             <a:pPr algn="ctr"/>
+            <a:endParaRPr/>
           </a:p>
         </p:txBody>
       </p:sp>
@@ -14155,6 +14105,7 @@
           <a:lstStyle/>
           <a:p>
             <a:pPr algn="ctr"/>
+            <a:endParaRPr/>
           </a:p>
         </p:txBody>
       </p:sp>
@@ -14175,7 +14126,7 @@
           <a:noFill/>
         </p:spPr>
         <p:txBody>
-          <a:bodyPr wrap="square" lIns="0" rIns="0" tIns="0" bIns="0">
+          <a:bodyPr wrap="square" lIns="0" tIns="0" rIns="0" bIns="0">
             <a:spAutoFit/>
           </a:bodyPr>
           <a:lstStyle/>
@@ -14214,7 +14165,7 @@
           <a:noFill/>
         </p:spPr>
         <p:txBody>
-          <a:bodyPr wrap="square" lIns="0" rIns="0" tIns="0" bIns="0">
+          <a:bodyPr wrap="square" lIns="0" tIns="0" rIns="0" bIns="0">
             <a:spAutoFit/>
           </a:bodyPr>
           <a:lstStyle/>
@@ -14280,6 +14231,7 @@
           <a:lstStyle/>
           <a:p>
             <a:pPr algn="ctr"/>
+            <a:endParaRPr/>
           </a:p>
         </p:txBody>
       </p:sp>
@@ -14323,6 +14275,7 @@
           <a:lstStyle/>
           <a:p>
             <a:pPr algn="ctr"/>
+            <a:endParaRPr/>
           </a:p>
         </p:txBody>
       </p:sp>
@@ -14343,7 +14296,7 @@
           <a:noFill/>
         </p:spPr>
         <p:txBody>
-          <a:bodyPr wrap="square" lIns="0" rIns="0" tIns="0" bIns="0">
+          <a:bodyPr wrap="square" lIns="0" tIns="0" rIns="0" bIns="0">
             <a:spAutoFit/>
           </a:bodyPr>
           <a:lstStyle/>
@@ -14382,7 +14335,7 @@
           <a:noFill/>
         </p:spPr>
         <p:txBody>
-          <a:bodyPr wrap="square" lIns="0" rIns="0" tIns="0" bIns="0">
+          <a:bodyPr wrap="square" lIns="0" tIns="0" rIns="0" bIns="0">
             <a:spAutoFit/>
           </a:bodyPr>
           <a:lstStyle/>
@@ -14413,7 +14366,7 @@
 </file>
 
 <file path=ppt/slides/slide22.xml><?xml version="1.0" encoding="utf-8"?>
-<p:sld xmlns:a="http://schemas.openxmlformats.org/drawingml/2006/main" xmlns:p="http://schemas.openxmlformats.org/presentationml/2006/main" xmlns:r="http://schemas.openxmlformats.org/officeDocument/2006/relationships">
+<p:sld xmlns:a="http://schemas.openxmlformats.org/drawingml/2006/main" xmlns:r="http://schemas.openxmlformats.org/officeDocument/2006/relationships" xmlns:p="http://schemas.openxmlformats.org/presentationml/2006/main">
   <p:cSld>
     <p:bg>
       <p:bgPr>
@@ -14429,7 +14382,14 @@
         <p:cNvGrpSpPr/>
         <p:nvPr/>
       </p:nvGrpSpPr>
-      <p:grpSpPr/>
+      <p:grpSpPr>
+        <a:xfrm>
+          <a:off x="0" y="0"/>
+          <a:ext cx="0" cy="0"/>
+          <a:chOff x="0" y="0"/>
+          <a:chExt cx="0" cy="0"/>
+        </a:xfrm>
+      </p:grpSpPr>
       <p:sp>
         <p:nvSpPr>
           <p:cNvPr id="2" name="Rectangle 1"/>
@@ -14470,6 +14430,7 @@
           <a:lstStyle/>
           <a:p>
             <a:pPr algn="ctr"/>
+            <a:endParaRPr/>
           </a:p>
         </p:txBody>
       </p:sp>
@@ -14587,6 +14548,7 @@
           <a:lstStyle/>
           <a:p>
             <a:pPr algn="ctr"/>
+            <a:endParaRPr/>
           </a:p>
         </p:txBody>
       </p:sp>
@@ -14740,6 +14702,7 @@
           <a:lstStyle/>
           <a:p>
             <a:pPr algn="ctr"/>
+            <a:endParaRPr/>
           </a:p>
         </p:txBody>
       </p:sp>
@@ -14893,6 +14856,7 @@
           <a:lstStyle/>
           <a:p>
             <a:pPr algn="ctr"/>
+            <a:endParaRPr/>
           </a:p>
         </p:txBody>
       </p:sp>
@@ -15044,6 +15008,7 @@
           <a:lstStyle/>
           <a:p>
             <a:pPr algn="ctr"/>
+            <a:endParaRPr/>
           </a:p>
         </p:txBody>
       </p:sp>
@@ -15164,7 +15129,7 @@
 </file>
 
 <file path=ppt/slides/slide23.xml><?xml version="1.0" encoding="utf-8"?>
-<p:sld xmlns:a="http://schemas.openxmlformats.org/drawingml/2006/main" xmlns:p="http://schemas.openxmlformats.org/presentationml/2006/main" xmlns:r="http://schemas.openxmlformats.org/officeDocument/2006/relationships">
+<p:sld xmlns:a="http://schemas.openxmlformats.org/drawingml/2006/main" xmlns:r="http://schemas.openxmlformats.org/officeDocument/2006/relationships" xmlns:p="http://schemas.openxmlformats.org/presentationml/2006/main">
   <p:cSld>
     <p:bg>
       <p:bgPr>
@@ -15180,7 +15145,14 @@
         <p:cNvGrpSpPr/>
         <p:nvPr/>
       </p:nvGrpSpPr>
-      <p:grpSpPr/>
+      <p:grpSpPr>
+        <a:xfrm>
+          <a:off x="0" y="0"/>
+          <a:ext cx="0" cy="0"/>
+          <a:chOff x="0" y="0"/>
+          <a:chExt cx="0" cy="0"/>
+        </a:xfrm>
+      </p:grpSpPr>
       <p:sp>
         <p:nvSpPr>
           <p:cNvPr id="2" name="Rectangle 1"/>
@@ -15221,6 +15193,7 @@
           <a:lstStyle/>
           <a:p>
             <a:pPr algn="ctr"/>
+            <a:endParaRPr/>
           </a:p>
         </p:txBody>
       </p:sp>
@@ -15241,7 +15214,7 @@
           <a:noFill/>
         </p:spPr>
         <p:txBody>
-          <a:bodyPr wrap="square" lIns="0" rIns="0" tIns="0" bIns="0">
+          <a:bodyPr wrap="square" lIns="0" tIns="0" rIns="0" bIns="0">
             <a:spAutoFit/>
           </a:bodyPr>
           <a:lstStyle/>
@@ -15280,7 +15253,7 @@
           <a:noFill/>
         </p:spPr>
         <p:txBody>
-          <a:bodyPr wrap="square" lIns="0" rIns="0" tIns="0" bIns="0">
+          <a:bodyPr wrap="square" lIns="0" tIns="0" rIns="0" bIns="0">
             <a:spAutoFit/>
           </a:bodyPr>
           <a:lstStyle/>
@@ -15319,7 +15292,7 @@
           <a:noFill/>
         </p:spPr>
         <p:txBody>
-          <a:bodyPr wrap="square" lIns="0" rIns="0" tIns="0" bIns="0">
+          <a:bodyPr wrap="square" lIns="0" tIns="0" rIns="0" bIns="0">
             <a:spAutoFit/>
           </a:bodyPr>
           <a:lstStyle/>
@@ -15381,6 +15354,7 @@
           <a:lstStyle/>
           <a:p>
             <a:pPr algn="ctr"/>
+            <a:endParaRPr/>
           </a:p>
         </p:txBody>
       </p:sp>
@@ -15401,7 +15375,7 @@
           <a:noFill/>
         </p:spPr>
         <p:txBody>
-          <a:bodyPr wrap="square" lIns="0" rIns="0" tIns="0" bIns="0">
+          <a:bodyPr wrap="square" lIns="0" tIns="0" rIns="0" bIns="0">
             <a:spAutoFit/>
           </a:bodyPr>
           <a:lstStyle/>
@@ -15440,7 +15414,7 @@
           <a:noFill/>
         </p:spPr>
         <p:txBody>
-          <a:bodyPr wrap="square" lIns="0" rIns="0" tIns="0" bIns="0">
+          <a:bodyPr wrap="square" lIns="0" tIns="0" rIns="0" bIns="0">
             <a:spAutoFit/>
           </a:bodyPr>
           <a:lstStyle/>
@@ -15493,6 +15467,7 @@
           <a:lstStyle/>
           <a:p>
             <a:pPr algn="ctr"/>
+            <a:endParaRPr/>
           </a:p>
         </p:txBody>
       </p:sp>
@@ -15513,12 +15488,17 @@
           <a:noFill/>
         </p:spPr>
         <p:txBody>
-          <a:bodyPr wrap="square" lIns="0" rIns="0" tIns="0" bIns="0">
-            <a:spAutoFit/>
-          </a:bodyPr>
-          <a:lstStyle/>
-          <a:p>
-            <a:r>
+          <a:bodyPr wrap="square" lIns="0" tIns="0" rIns="0" bIns="0">
+            <a:spAutoFit/>
+          </a:bodyPr>
+          <a:lstStyle/>
+          <a:p>
+            <a:r>
+              <a:rPr dirty="0">
+                <a:solidFill>
+                  <a:schemeClr val="bg1"/>
+                </a:solidFill>
+              </a:rPr>
               <a:t>Historical synthetic local[4] speedup: 2.925× at 50,000 records — with consistent mean SSE across local settings</a:t>
             </a:r>
           </a:p>
@@ -15541,7 +15521,7 @@
           <a:noFill/>
         </p:spPr>
         <p:txBody>
-          <a:bodyPr wrap="square" lIns="0" rIns="0" tIns="0" bIns="0">
+          <a:bodyPr wrap="square" lIns="0" tIns="0" rIns="0" bIns="0">
             <a:spAutoFit/>
           </a:bodyPr>
           <a:lstStyle/>
@@ -15580,7 +15560,7 @@
           <a:noFill/>
         </p:spPr>
         <p:txBody>
-          <a:bodyPr wrap="square" lIns="0" rIns="0" tIns="0" bIns="0">
+          <a:bodyPr wrap="square" lIns="0" tIns="0" rIns="0" bIns="0">
             <a:spAutoFit/>
           </a:bodyPr>
           <a:lstStyle/>
@@ -15619,7 +15599,7 @@
           <a:noFill/>
         </p:spPr>
         <p:txBody>
-          <a:bodyPr wrap="square" lIns="0" rIns="0" tIns="0" bIns="0">
+          <a:bodyPr wrap="square" lIns="0" tIns="0" rIns="0" bIns="0">
             <a:spAutoFit/>
           </a:bodyPr>
           <a:lstStyle/>
@@ -15658,7 +15638,7 @@
           <a:noFill/>
         </p:spPr>
         <p:txBody>
-          <a:bodyPr wrap="square" lIns="0" rIns="0" tIns="0" bIns="0">
+          <a:bodyPr wrap="square" lIns="0" tIns="0" rIns="0" bIns="0">
             <a:spAutoFit/>
           </a:bodyPr>
           <a:lstStyle/>
@@ -15697,7 +15677,7 @@
           <a:noFill/>
         </p:spPr>
         <p:txBody>
-          <a:bodyPr wrap="square" lIns="0" rIns="0" tIns="0" bIns="0">
+          <a:bodyPr wrap="square" lIns="0" tIns="0" rIns="0" bIns="0">
             <a:spAutoFit/>
           </a:bodyPr>
           <a:lstStyle/>
@@ -15728,7 +15708,7 @@
 </file>
 
 <file path=ppt/slides/slide3.xml><?xml version="1.0" encoding="utf-8"?>
-<p:sld xmlns:a="http://schemas.openxmlformats.org/drawingml/2006/main" xmlns:p="http://schemas.openxmlformats.org/presentationml/2006/main" xmlns:r="http://schemas.openxmlformats.org/officeDocument/2006/relationships">
+<p:sld xmlns:a="http://schemas.openxmlformats.org/drawingml/2006/main" xmlns:r="http://schemas.openxmlformats.org/officeDocument/2006/relationships" xmlns:p="http://schemas.openxmlformats.org/presentationml/2006/main">
   <p:cSld>
     <p:bg>
       <p:bgPr>
@@ -15744,7 +15724,14 @@
         <p:cNvGrpSpPr/>
         <p:nvPr/>
       </p:nvGrpSpPr>
-      <p:grpSpPr/>
+      <p:grpSpPr>
+        <a:xfrm>
+          <a:off x="0" y="0"/>
+          <a:ext cx="0" cy="0"/>
+          <a:chOff x="0" y="0"/>
+          <a:chExt cx="0" cy="0"/>
+        </a:xfrm>
+      </p:grpSpPr>
       <p:sp>
         <p:nvSpPr>
           <p:cNvPr id="2" name="Rectangle 1"/>
@@ -15785,6 +15772,7 @@
           <a:lstStyle/>
           <a:p>
             <a:pPr algn="ctr"/>
+            <a:endParaRPr/>
           </a:p>
         </p:txBody>
       </p:sp>
@@ -15805,7 +15793,7 @@
           <a:noFill/>
         </p:spPr>
         <p:txBody>
-          <a:bodyPr wrap="square" lIns="0" rIns="0" tIns="0" bIns="0">
+          <a:bodyPr wrap="square" lIns="0" tIns="0" rIns="0" bIns="0">
             <a:spAutoFit/>
           </a:bodyPr>
           <a:lstStyle/>
@@ -15844,7 +15832,7 @@
           <a:noFill/>
         </p:spPr>
         <p:txBody>
-          <a:bodyPr wrap="square" lIns="0" rIns="0" tIns="0" bIns="0">
+          <a:bodyPr wrap="square" lIns="0" tIns="0" rIns="0" bIns="0">
             <a:spAutoFit/>
           </a:bodyPr>
           <a:lstStyle/>
@@ -15883,7 +15871,7 @@
           <a:noFill/>
         </p:spPr>
         <p:txBody>
-          <a:bodyPr wrap="square" lIns="0" rIns="0" tIns="0" bIns="0">
+          <a:bodyPr wrap="square" lIns="0" tIns="0" rIns="0" bIns="0">
             <a:spAutoFit/>
           </a:bodyPr>
           <a:lstStyle/>
@@ -15945,6 +15933,7 @@
           <a:lstStyle/>
           <a:p>
             <a:pPr algn="ctr"/>
+            <a:endParaRPr/>
           </a:p>
         </p:txBody>
       </p:sp>
@@ -15965,7 +15954,7 @@
           <a:noFill/>
         </p:spPr>
         <p:txBody>
-          <a:bodyPr wrap="square" lIns="0" rIns="0" tIns="0" bIns="0">
+          <a:bodyPr wrap="square" lIns="0" tIns="0" rIns="0" bIns="0">
             <a:spAutoFit/>
           </a:bodyPr>
           <a:lstStyle/>
@@ -16004,7 +15993,7 @@
           <a:noFill/>
         </p:spPr>
         <p:txBody>
-          <a:bodyPr wrap="square" lIns="0" rIns="0" tIns="0" bIns="0">
+          <a:bodyPr wrap="square" lIns="0" tIns="0" rIns="0" bIns="0">
             <a:spAutoFit/>
           </a:bodyPr>
           <a:lstStyle/>
@@ -16059,6 +16048,7 @@
           <a:lstStyle/>
           <a:p>
             <a:pPr algn="ctr"/>
+            <a:endParaRPr/>
           </a:p>
         </p:txBody>
       </p:sp>
@@ -16102,6 +16092,7 @@
           <a:lstStyle/>
           <a:p>
             <a:pPr algn="ctr"/>
+            <a:endParaRPr/>
           </a:p>
         </p:txBody>
       </p:sp>
@@ -16122,7 +16113,7 @@
           <a:noFill/>
         </p:spPr>
         <p:txBody>
-          <a:bodyPr wrap="square" lIns="0" rIns="0" tIns="0" bIns="0">
+          <a:bodyPr wrap="square" lIns="0" tIns="0" rIns="0" bIns="0">
             <a:spAutoFit/>
           </a:bodyPr>
           <a:lstStyle/>
@@ -16161,7 +16152,7 @@
           <a:noFill/>
         </p:spPr>
         <p:txBody>
-          <a:bodyPr wrap="square" lIns="0" rIns="0" tIns="0" bIns="0">
+          <a:bodyPr wrap="square" lIns="0" tIns="0" rIns="0" bIns="0">
             <a:spAutoFit/>
           </a:bodyPr>
           <a:lstStyle/>
@@ -16227,6 +16218,7 @@
           <a:lstStyle/>
           <a:p>
             <a:pPr algn="ctr"/>
+            <a:endParaRPr/>
           </a:p>
         </p:txBody>
       </p:sp>
@@ -16270,6 +16262,7 @@
           <a:lstStyle/>
           <a:p>
             <a:pPr algn="ctr"/>
+            <a:endParaRPr/>
           </a:p>
         </p:txBody>
       </p:sp>
@@ -16290,7 +16283,7 @@
           <a:noFill/>
         </p:spPr>
         <p:txBody>
-          <a:bodyPr wrap="square" lIns="0" rIns="0" tIns="0" bIns="0">
+          <a:bodyPr wrap="square" lIns="0" tIns="0" rIns="0" bIns="0">
             <a:spAutoFit/>
           </a:bodyPr>
           <a:lstStyle/>
@@ -16329,7 +16322,7 @@
           <a:noFill/>
         </p:spPr>
         <p:txBody>
-          <a:bodyPr wrap="square" lIns="0" rIns="0" tIns="0" bIns="0">
+          <a:bodyPr wrap="square" lIns="0" tIns="0" rIns="0" bIns="0">
             <a:spAutoFit/>
           </a:bodyPr>
           <a:lstStyle/>
@@ -16368,7 +16361,7 @@
           <a:noFill/>
         </p:spPr>
         <p:txBody>
-          <a:bodyPr wrap="square" lIns="0" rIns="0" tIns="0" bIns="0">
+          <a:bodyPr wrap="square" lIns="0" tIns="0" rIns="0" bIns="0">
             <a:spAutoFit/>
           </a:bodyPr>
           <a:lstStyle/>
@@ -16399,7 +16392,7 @@
 </file>
 
 <file path=ppt/slides/slide4.xml><?xml version="1.0" encoding="utf-8"?>
-<p:sld xmlns:a="http://schemas.openxmlformats.org/drawingml/2006/main" xmlns:p="http://schemas.openxmlformats.org/presentationml/2006/main" xmlns:r="http://schemas.openxmlformats.org/officeDocument/2006/relationships">
+<p:sld xmlns:a="http://schemas.openxmlformats.org/drawingml/2006/main" xmlns:r="http://schemas.openxmlformats.org/officeDocument/2006/relationships" xmlns:p="http://schemas.openxmlformats.org/presentationml/2006/main">
   <p:cSld>
     <p:bg>
       <p:bgPr>
@@ -16415,7 +16408,14 @@
         <p:cNvGrpSpPr/>
         <p:nvPr/>
       </p:nvGrpSpPr>
-      <p:grpSpPr/>
+      <p:grpSpPr>
+        <a:xfrm>
+          <a:off x="0" y="0"/>
+          <a:ext cx="0" cy="0"/>
+          <a:chOff x="0" y="0"/>
+          <a:chExt cx="0" cy="0"/>
+        </a:xfrm>
+      </p:grpSpPr>
       <p:sp>
         <p:nvSpPr>
           <p:cNvPr id="2" name="Rectangle 1"/>
@@ -16456,6 +16456,7 @@
           <a:lstStyle/>
           <a:p>
             <a:pPr algn="ctr"/>
+            <a:endParaRPr/>
           </a:p>
         </p:txBody>
       </p:sp>
@@ -16476,7 +16477,7 @@
           <a:noFill/>
         </p:spPr>
         <p:txBody>
-          <a:bodyPr wrap="square" lIns="0" rIns="0" tIns="0" bIns="0">
+          <a:bodyPr wrap="square" lIns="0" tIns="0" rIns="0" bIns="0">
             <a:spAutoFit/>
           </a:bodyPr>
           <a:lstStyle/>
@@ -16515,7 +16516,7 @@
           <a:noFill/>
         </p:spPr>
         <p:txBody>
-          <a:bodyPr wrap="square" lIns="0" rIns="0" tIns="0" bIns="0">
+          <a:bodyPr wrap="square" lIns="0" tIns="0" rIns="0" bIns="0">
             <a:spAutoFit/>
           </a:bodyPr>
           <a:lstStyle/>
@@ -16577,6 +16578,7 @@
           <a:lstStyle/>
           <a:p>
             <a:pPr algn="ctr"/>
+            <a:endParaRPr/>
           </a:p>
         </p:txBody>
       </p:sp>
@@ -16597,7 +16599,7 @@
           <a:noFill/>
         </p:spPr>
         <p:txBody>
-          <a:bodyPr wrap="square" lIns="0" rIns="0" tIns="0" bIns="0">
+          <a:bodyPr wrap="square" lIns="0" tIns="0" rIns="0" bIns="0">
             <a:spAutoFit/>
           </a:bodyPr>
           <a:lstStyle/>
@@ -16636,7 +16638,7 @@
           <a:noFill/>
         </p:spPr>
         <p:txBody>
-          <a:bodyPr wrap="square" lIns="0" rIns="0" tIns="0" bIns="0">
+          <a:bodyPr wrap="square" lIns="0" tIns="0" rIns="0" bIns="0">
             <a:spAutoFit/>
           </a:bodyPr>
           <a:lstStyle/>
@@ -16691,6 +16693,7 @@
           <a:lstStyle/>
           <a:p>
             <a:pPr algn="ctr"/>
+            <a:endParaRPr/>
           </a:p>
         </p:txBody>
       </p:sp>
@@ -16734,6 +16737,7 @@
           <a:lstStyle/>
           <a:p>
             <a:pPr algn="ctr"/>
+            <a:endParaRPr/>
           </a:p>
         </p:txBody>
       </p:sp>
@@ -16754,7 +16758,7 @@
           <a:noFill/>
         </p:spPr>
         <p:txBody>
-          <a:bodyPr wrap="square" lIns="0" rIns="0" tIns="0" bIns="0">
+          <a:bodyPr wrap="square" lIns="0" tIns="0" rIns="0" bIns="0">
             <a:spAutoFit/>
           </a:bodyPr>
           <a:lstStyle/>
@@ -16793,7 +16797,7 @@
           <a:noFill/>
         </p:spPr>
         <p:txBody>
-          <a:bodyPr wrap="square" lIns="0" rIns="0" tIns="0" bIns="0">
+          <a:bodyPr wrap="square" lIns="0" tIns="0" rIns="0" bIns="0">
             <a:spAutoFit/>
           </a:bodyPr>
           <a:lstStyle/>
@@ -16859,6 +16863,7 @@
           <a:lstStyle/>
           <a:p>
             <a:pPr algn="ctr"/>
+            <a:endParaRPr/>
           </a:p>
         </p:txBody>
       </p:sp>
@@ -16902,6 +16907,7 @@
           <a:lstStyle/>
           <a:p>
             <a:pPr algn="ctr"/>
+            <a:endParaRPr/>
           </a:p>
         </p:txBody>
       </p:sp>
@@ -16922,7 +16928,7 @@
           <a:noFill/>
         </p:spPr>
         <p:txBody>
-          <a:bodyPr wrap="square" lIns="0" rIns="0" tIns="0" bIns="0">
+          <a:bodyPr wrap="square" lIns="0" tIns="0" rIns="0" bIns="0">
             <a:spAutoFit/>
           </a:bodyPr>
           <a:lstStyle/>
@@ -16961,7 +16967,7 @@
           <a:noFill/>
         </p:spPr>
         <p:txBody>
-          <a:bodyPr wrap="square" lIns="0" rIns="0" tIns="0" bIns="0">
+          <a:bodyPr wrap="square" lIns="0" tIns="0" rIns="0" bIns="0">
             <a:spAutoFit/>
           </a:bodyPr>
           <a:lstStyle/>
@@ -17027,6 +17033,7 @@
           <a:lstStyle/>
           <a:p>
             <a:pPr algn="ctr"/>
+            <a:endParaRPr/>
           </a:p>
         </p:txBody>
       </p:sp>
@@ -17070,6 +17077,7 @@
           <a:lstStyle/>
           <a:p>
             <a:pPr algn="ctr"/>
+            <a:endParaRPr/>
           </a:p>
         </p:txBody>
       </p:sp>
@@ -17090,7 +17098,7 @@
           <a:noFill/>
         </p:spPr>
         <p:txBody>
-          <a:bodyPr wrap="square" lIns="0" rIns="0" tIns="0" bIns="0">
+          <a:bodyPr wrap="square" lIns="0" tIns="0" rIns="0" bIns="0">
             <a:spAutoFit/>
           </a:bodyPr>
           <a:lstStyle/>
@@ -17129,7 +17137,7 @@
           <a:noFill/>
         </p:spPr>
         <p:txBody>
-          <a:bodyPr wrap="square" lIns="0" rIns="0" tIns="0" bIns="0">
+          <a:bodyPr wrap="square" lIns="0" tIns="0" rIns="0" bIns="0">
             <a:spAutoFit/>
           </a:bodyPr>
           <a:lstStyle/>
@@ -17195,6 +17203,7 @@
           <a:lstStyle/>
           <a:p>
             <a:pPr algn="ctr"/>
+            <a:endParaRPr/>
           </a:p>
         </p:txBody>
       </p:sp>
@@ -17238,6 +17247,7 @@
           <a:lstStyle/>
           <a:p>
             <a:pPr algn="ctr"/>
+            <a:endParaRPr/>
           </a:p>
         </p:txBody>
       </p:sp>
@@ -17258,7 +17268,7 @@
           <a:noFill/>
         </p:spPr>
         <p:txBody>
-          <a:bodyPr wrap="square" lIns="0" rIns="0" tIns="0" bIns="0">
+          <a:bodyPr wrap="square" lIns="0" tIns="0" rIns="0" bIns="0">
             <a:spAutoFit/>
           </a:bodyPr>
           <a:lstStyle/>
@@ -17297,7 +17307,7 @@
           <a:noFill/>
         </p:spPr>
         <p:txBody>
-          <a:bodyPr wrap="square" lIns="0" rIns="0" tIns="0" bIns="0">
+          <a:bodyPr wrap="square" lIns="0" tIns="0" rIns="0" bIns="0">
             <a:spAutoFit/>
           </a:bodyPr>
           <a:lstStyle/>
@@ -17336,7 +17346,7 @@
           <a:noFill/>
         </p:spPr>
         <p:txBody>
-          <a:bodyPr wrap="square" lIns="0" rIns="0" tIns="0" bIns="0">
+          <a:bodyPr wrap="square" lIns="0" tIns="0" rIns="0" bIns="0">
             <a:spAutoFit/>
           </a:bodyPr>
           <a:lstStyle/>
@@ -17367,7 +17377,7 @@
 </file>
 
 <file path=ppt/slides/slide5.xml><?xml version="1.0" encoding="utf-8"?>
-<p:sld xmlns:a="http://schemas.openxmlformats.org/drawingml/2006/main" xmlns:p="http://schemas.openxmlformats.org/presentationml/2006/main" xmlns:r="http://schemas.openxmlformats.org/officeDocument/2006/relationships">
+<p:sld xmlns:a="http://schemas.openxmlformats.org/drawingml/2006/main" xmlns:r="http://schemas.openxmlformats.org/officeDocument/2006/relationships" xmlns:p="http://schemas.openxmlformats.org/presentationml/2006/main">
   <p:cSld>
     <p:bg>
       <p:bgPr>
@@ -17383,7 +17393,14 @@
         <p:cNvGrpSpPr/>
         <p:nvPr/>
       </p:nvGrpSpPr>
-      <p:grpSpPr/>
+      <p:grpSpPr>
+        <a:xfrm>
+          <a:off x="0" y="0"/>
+          <a:ext cx="0" cy="0"/>
+          <a:chOff x="0" y="0"/>
+          <a:chExt cx="0" cy="0"/>
+        </a:xfrm>
+      </p:grpSpPr>
       <p:sp>
         <p:nvSpPr>
           <p:cNvPr id="2" name="Rectangle 1"/>
@@ -17424,6 +17441,7 @@
           <a:lstStyle/>
           <a:p>
             <a:pPr algn="ctr"/>
+            <a:endParaRPr/>
           </a:p>
         </p:txBody>
       </p:sp>
@@ -17444,7 +17462,7 @@
           <a:noFill/>
         </p:spPr>
         <p:txBody>
-          <a:bodyPr wrap="square" lIns="0" rIns="0" tIns="0" bIns="0">
+          <a:bodyPr wrap="square" lIns="0" tIns="0" rIns="0" bIns="0">
             <a:spAutoFit/>
           </a:bodyPr>
           <a:lstStyle/>
@@ -17483,7 +17501,7 @@
           <a:noFill/>
         </p:spPr>
         <p:txBody>
-          <a:bodyPr wrap="square" lIns="0" rIns="0" tIns="0" bIns="0">
+          <a:bodyPr wrap="square" lIns="0" tIns="0" rIns="0" bIns="0">
             <a:spAutoFit/>
           </a:bodyPr>
           <a:lstStyle/>
@@ -17522,7 +17540,7 @@
           <a:noFill/>
         </p:spPr>
         <p:txBody>
-          <a:bodyPr wrap="square" lIns="0" rIns="0" tIns="0" bIns="0">
+          <a:bodyPr wrap="square" lIns="0" tIns="0" rIns="0" bIns="0">
             <a:spAutoFit/>
           </a:bodyPr>
           <a:lstStyle/>
@@ -17584,6 +17602,7 @@
           <a:lstStyle/>
           <a:p>
             <a:pPr algn="ctr"/>
+            <a:endParaRPr/>
           </a:p>
         </p:txBody>
       </p:sp>
@@ -17604,7 +17623,7 @@
           <a:noFill/>
         </p:spPr>
         <p:txBody>
-          <a:bodyPr wrap="square" lIns="0" rIns="0" tIns="0" bIns="0">
+          <a:bodyPr wrap="square" lIns="0" tIns="0" rIns="0" bIns="0">
             <a:spAutoFit/>
           </a:bodyPr>
           <a:lstStyle/>
@@ -17643,7 +17662,7 @@
           <a:noFill/>
         </p:spPr>
         <p:txBody>
-          <a:bodyPr wrap="square" lIns="0" rIns="0" tIns="0" bIns="0">
+          <a:bodyPr wrap="square" lIns="0" tIns="0" rIns="0" bIns="0">
             <a:spAutoFit/>
           </a:bodyPr>
           <a:lstStyle/>
@@ -17698,6 +17717,7 @@
           <a:lstStyle/>
           <a:p>
             <a:pPr algn="ctr"/>
+            <a:endParaRPr/>
           </a:p>
         </p:txBody>
       </p:sp>
@@ -17718,7 +17738,7 @@
           <a:noFill/>
         </p:spPr>
         <p:txBody>
-          <a:bodyPr wrap="square" lIns="0" rIns="0" tIns="0" bIns="0">
+          <a:bodyPr wrap="square" lIns="0" tIns="0" rIns="0" bIns="0">
             <a:spAutoFit/>
           </a:bodyPr>
           <a:lstStyle/>
@@ -17757,7 +17777,7 @@
           <a:noFill/>
         </p:spPr>
         <p:txBody>
-          <a:bodyPr wrap="square" lIns="0" rIns="0" tIns="0" bIns="0">
+          <a:bodyPr wrap="square" lIns="0" tIns="0" rIns="0" bIns="0">
             <a:spAutoFit/>
           </a:bodyPr>
           <a:lstStyle/>
@@ -17796,7 +17816,7 @@
           <a:noFill/>
         </p:spPr>
         <p:txBody>
-          <a:bodyPr wrap="square" lIns="0" rIns="0" tIns="0" bIns="0">
+          <a:bodyPr wrap="square" lIns="0" tIns="0" rIns="0" bIns="0">
             <a:spAutoFit/>
           </a:bodyPr>
           <a:lstStyle/>
@@ -17862,6 +17882,7 @@
           <a:lstStyle/>
           <a:p>
             <a:pPr algn="ctr"/>
+            <a:endParaRPr/>
           </a:p>
         </p:txBody>
       </p:sp>
@@ -17882,7 +17903,7 @@
           <a:noFill/>
         </p:spPr>
         <p:txBody>
-          <a:bodyPr wrap="square" lIns="0" rIns="0" tIns="0" bIns="0">
+          <a:bodyPr wrap="square" lIns="0" tIns="0" rIns="0" bIns="0">
             <a:spAutoFit/>
           </a:bodyPr>
           <a:lstStyle/>
@@ -17921,7 +17942,7 @@
           <a:noFill/>
         </p:spPr>
         <p:txBody>
-          <a:bodyPr wrap="square" lIns="0" rIns="0" tIns="0" bIns="0">
+          <a:bodyPr wrap="square" lIns="0" tIns="0" rIns="0" bIns="0">
             <a:spAutoFit/>
           </a:bodyPr>
           <a:lstStyle/>
@@ -17960,7 +17981,7 @@
           <a:noFill/>
         </p:spPr>
         <p:txBody>
-          <a:bodyPr wrap="square" lIns="0" rIns="0" tIns="0" bIns="0">
+          <a:bodyPr wrap="square" lIns="0" tIns="0" rIns="0" bIns="0">
             <a:spAutoFit/>
           </a:bodyPr>
           <a:lstStyle/>
@@ -18026,6 +18047,7 @@
           <a:lstStyle/>
           <a:p>
             <a:pPr algn="ctr"/>
+            <a:endParaRPr/>
           </a:p>
         </p:txBody>
       </p:sp>
@@ -18046,7 +18068,7 @@
           <a:noFill/>
         </p:spPr>
         <p:txBody>
-          <a:bodyPr wrap="square" lIns="0" rIns="0" tIns="0" bIns="0">
+          <a:bodyPr wrap="square" lIns="0" tIns="0" rIns="0" bIns="0">
             <a:spAutoFit/>
           </a:bodyPr>
           <a:lstStyle/>
@@ -18085,7 +18107,7 @@
           <a:noFill/>
         </p:spPr>
         <p:txBody>
-          <a:bodyPr wrap="square" lIns="0" rIns="0" tIns="0" bIns="0">
+          <a:bodyPr wrap="square" lIns="0" tIns="0" rIns="0" bIns="0">
             <a:spAutoFit/>
           </a:bodyPr>
           <a:lstStyle/>
@@ -18151,6 +18173,7 @@
           <a:lstStyle/>
           <a:p>
             <a:pPr algn="ctr"/>
+            <a:endParaRPr/>
           </a:p>
         </p:txBody>
       </p:sp>
@@ -18171,7 +18194,7 @@
           <a:noFill/>
         </p:spPr>
         <p:txBody>
-          <a:bodyPr wrap="square" lIns="0" rIns="0" tIns="0" bIns="0">
+          <a:bodyPr wrap="square" lIns="0" tIns="0" rIns="0" bIns="0">
             <a:spAutoFit/>
           </a:bodyPr>
           <a:lstStyle/>
@@ -18210,7 +18233,7 @@
           <a:noFill/>
         </p:spPr>
         <p:txBody>
-          <a:bodyPr wrap="square" lIns="0" rIns="0" tIns="0" bIns="0">
+          <a:bodyPr wrap="square" lIns="0" tIns="0" rIns="0" bIns="0">
             <a:spAutoFit/>
           </a:bodyPr>
           <a:lstStyle/>
@@ -18249,7 +18272,7 @@
           <a:noFill/>
         </p:spPr>
         <p:txBody>
-          <a:bodyPr wrap="square" lIns="0" rIns="0" tIns="0" bIns="0">
+          <a:bodyPr wrap="square" lIns="0" tIns="0" rIns="0" bIns="0">
             <a:spAutoFit/>
           </a:bodyPr>
           <a:lstStyle/>
@@ -18315,6 +18338,7 @@
           <a:lstStyle/>
           <a:p>
             <a:pPr algn="ctr"/>
+            <a:endParaRPr/>
           </a:p>
         </p:txBody>
       </p:sp>
@@ -18335,7 +18359,7 @@
           <a:noFill/>
         </p:spPr>
         <p:txBody>
-          <a:bodyPr wrap="square" lIns="0" rIns="0" tIns="0" bIns="0">
+          <a:bodyPr wrap="square" lIns="0" tIns="0" rIns="0" bIns="0">
             <a:spAutoFit/>
           </a:bodyPr>
           <a:lstStyle/>
@@ -18374,7 +18398,7 @@
           <a:noFill/>
         </p:spPr>
         <p:txBody>
-          <a:bodyPr wrap="square" lIns="0" rIns="0" tIns="0" bIns="0">
+          <a:bodyPr wrap="square" lIns="0" tIns="0" rIns="0" bIns="0">
             <a:spAutoFit/>
           </a:bodyPr>
           <a:lstStyle/>
@@ -18413,7 +18437,7 @@
           <a:noFill/>
         </p:spPr>
         <p:txBody>
-          <a:bodyPr wrap="square" lIns="0" rIns="0" tIns="0" bIns="0">
+          <a:bodyPr wrap="square" lIns="0" tIns="0" rIns="0" bIns="0">
             <a:spAutoFit/>
           </a:bodyPr>
           <a:lstStyle/>
@@ -18479,6 +18503,7 @@
           <a:lstStyle/>
           <a:p>
             <a:pPr algn="ctr"/>
+            <a:endParaRPr/>
           </a:p>
         </p:txBody>
       </p:sp>
@@ -18499,7 +18524,7 @@
           <a:noFill/>
         </p:spPr>
         <p:txBody>
-          <a:bodyPr wrap="square" lIns="0" rIns="0" tIns="0" bIns="0">
+          <a:bodyPr wrap="square" lIns="0" tIns="0" rIns="0" bIns="0">
             <a:spAutoFit/>
           </a:bodyPr>
           <a:lstStyle/>
@@ -18538,7 +18563,7 @@
           <a:noFill/>
         </p:spPr>
         <p:txBody>
-          <a:bodyPr wrap="square" lIns="0" rIns="0" tIns="0" bIns="0">
+          <a:bodyPr wrap="square" lIns="0" tIns="0" rIns="0" bIns="0">
             <a:spAutoFit/>
           </a:bodyPr>
           <a:lstStyle/>
@@ -18577,7 +18602,7 @@
           <a:noFill/>
         </p:spPr>
         <p:txBody>
-          <a:bodyPr wrap="square" lIns="0" rIns="0" tIns="0" bIns="0">
+          <a:bodyPr wrap="square" lIns="0" tIns="0" rIns="0" bIns="0">
             <a:spAutoFit/>
           </a:bodyPr>
           <a:lstStyle/>
@@ -18608,7 +18633,7 @@
 </file>
 
 <file path=ppt/slides/slide6.xml><?xml version="1.0" encoding="utf-8"?>
-<p:sld xmlns:a="http://schemas.openxmlformats.org/drawingml/2006/main" xmlns:p="http://schemas.openxmlformats.org/presentationml/2006/main" xmlns:r="http://schemas.openxmlformats.org/officeDocument/2006/relationships">
+<p:sld xmlns:a="http://schemas.openxmlformats.org/drawingml/2006/main" xmlns:r="http://schemas.openxmlformats.org/officeDocument/2006/relationships" xmlns:p="http://schemas.openxmlformats.org/presentationml/2006/main">
   <p:cSld>
     <p:bg>
       <p:bgPr>
@@ -18624,7 +18649,14 @@
         <p:cNvGrpSpPr/>
         <p:nvPr/>
       </p:nvGrpSpPr>
-      <p:grpSpPr/>
+      <p:grpSpPr>
+        <a:xfrm>
+          <a:off x="0" y="0"/>
+          <a:ext cx="0" cy="0"/>
+          <a:chOff x="0" y="0"/>
+          <a:chExt cx="0" cy="0"/>
+        </a:xfrm>
+      </p:grpSpPr>
       <p:sp>
         <p:nvSpPr>
           <p:cNvPr id="2" name="Rectangle 1"/>
@@ -18665,6 +18697,7 @@
           <a:lstStyle/>
           <a:p>
             <a:pPr algn="ctr"/>
+            <a:endParaRPr/>
           </a:p>
         </p:txBody>
       </p:sp>
@@ -18685,7 +18718,7 @@
           <a:noFill/>
         </p:spPr>
         <p:txBody>
-          <a:bodyPr wrap="square" lIns="0" rIns="0" tIns="0" bIns="0">
+          <a:bodyPr wrap="square" lIns="0" tIns="0" rIns="0" bIns="0">
             <a:spAutoFit/>
           </a:bodyPr>
           <a:lstStyle/>
@@ -18724,7 +18757,7 @@
           <a:noFill/>
         </p:spPr>
         <p:txBody>
-          <a:bodyPr wrap="square" lIns="0" rIns="0" tIns="0" bIns="0">
+          <a:bodyPr wrap="square" lIns="0" tIns="0" rIns="0" bIns="0">
             <a:spAutoFit/>
           </a:bodyPr>
           <a:lstStyle/>
@@ -18786,6 +18819,7 @@
           <a:lstStyle/>
           <a:p>
             <a:pPr algn="ctr"/>
+            <a:endParaRPr/>
           </a:p>
         </p:txBody>
       </p:sp>
@@ -18806,7 +18840,7 @@
           <a:noFill/>
         </p:spPr>
         <p:txBody>
-          <a:bodyPr wrap="square" lIns="0" rIns="0" tIns="0" bIns="0">
+          <a:bodyPr wrap="square" lIns="0" tIns="0" rIns="0" bIns="0">
             <a:spAutoFit/>
           </a:bodyPr>
           <a:lstStyle/>
@@ -18845,7 +18879,7 @@
           <a:noFill/>
         </p:spPr>
         <p:txBody>
-          <a:bodyPr wrap="square" lIns="0" rIns="0" tIns="0" bIns="0">
+          <a:bodyPr wrap="square" lIns="0" tIns="0" rIns="0" bIns="0">
             <a:spAutoFit/>
           </a:bodyPr>
           <a:lstStyle/>
@@ -18900,6 +18934,7 @@
           <a:lstStyle/>
           <a:p>
             <a:pPr algn="ctr"/>
+            <a:endParaRPr/>
           </a:p>
         </p:txBody>
       </p:sp>
@@ -18943,6 +18978,7 @@
           <a:lstStyle/>
           <a:p>
             <a:pPr algn="ctr"/>
+            <a:endParaRPr/>
           </a:p>
         </p:txBody>
       </p:sp>
@@ -18963,7 +18999,7 @@
           <a:noFill/>
         </p:spPr>
         <p:txBody>
-          <a:bodyPr wrap="square" lIns="0" rIns="0" tIns="0" bIns="0">
+          <a:bodyPr wrap="square" lIns="0" tIns="0" rIns="0" bIns="0">
             <a:spAutoFit/>
           </a:bodyPr>
           <a:lstStyle/>
@@ -19002,7 +19038,7 @@
           <a:noFill/>
         </p:spPr>
         <p:txBody>
-          <a:bodyPr wrap="square" lIns="0" rIns="0" tIns="0" bIns="0">
+          <a:bodyPr wrap="square" lIns="0" tIns="0" rIns="0" bIns="0">
             <a:spAutoFit/>
           </a:bodyPr>
           <a:lstStyle/>
@@ -19100,6 +19136,7 @@
           <a:lstStyle/>
           <a:p>
             <a:pPr algn="ctr"/>
+            <a:endParaRPr/>
           </a:p>
         </p:txBody>
       </p:sp>
@@ -19143,6 +19180,7 @@
           <a:lstStyle/>
           <a:p>
             <a:pPr algn="ctr"/>
+            <a:endParaRPr/>
           </a:p>
         </p:txBody>
       </p:sp>
@@ -19163,7 +19201,7 @@
           <a:noFill/>
         </p:spPr>
         <p:txBody>
-          <a:bodyPr wrap="square" lIns="0" rIns="0" tIns="0" bIns="0">
+          <a:bodyPr wrap="square" lIns="0" tIns="0" rIns="0" bIns="0">
             <a:spAutoFit/>
           </a:bodyPr>
           <a:lstStyle/>
@@ -19202,7 +19240,7 @@
           <a:noFill/>
         </p:spPr>
         <p:txBody>
-          <a:bodyPr wrap="square" lIns="0" rIns="0" tIns="0" bIns="0">
+          <a:bodyPr wrap="square" lIns="0" tIns="0" rIns="0" bIns="0">
             <a:spAutoFit/>
           </a:bodyPr>
           <a:lstStyle/>
@@ -19273,7 +19311,7 @@
           <a:noFill/>
         </p:spPr>
         <p:txBody>
-          <a:bodyPr wrap="square" lIns="0" rIns="0" tIns="0" bIns="0">
+          <a:bodyPr wrap="square" lIns="0" tIns="0" rIns="0" bIns="0">
             <a:spAutoFit/>
           </a:bodyPr>
           <a:lstStyle/>
@@ -19304,7 +19342,7 @@
 </file>
 
 <file path=ppt/slides/slide7.xml><?xml version="1.0" encoding="utf-8"?>
-<p:sld xmlns:a="http://schemas.openxmlformats.org/drawingml/2006/main" xmlns:p="http://schemas.openxmlformats.org/presentationml/2006/main" xmlns:r="http://schemas.openxmlformats.org/officeDocument/2006/relationships">
+<p:sld xmlns:a="http://schemas.openxmlformats.org/drawingml/2006/main" xmlns:r="http://schemas.openxmlformats.org/officeDocument/2006/relationships" xmlns:p="http://schemas.openxmlformats.org/presentationml/2006/main">
   <p:cSld>
     <p:bg>
       <p:bgPr>
@@ -19320,7 +19358,14 @@
         <p:cNvGrpSpPr/>
         <p:nvPr/>
       </p:nvGrpSpPr>
-      <p:grpSpPr/>
+      <p:grpSpPr>
+        <a:xfrm>
+          <a:off x="0" y="0"/>
+          <a:ext cx="0" cy="0"/>
+          <a:chOff x="0" y="0"/>
+          <a:chExt cx="0" cy="0"/>
+        </a:xfrm>
+      </p:grpSpPr>
       <p:sp>
         <p:nvSpPr>
           <p:cNvPr id="2" name="Rectangle 1"/>
@@ -19361,6 +19406,7 @@
           <a:lstStyle/>
           <a:p>
             <a:pPr algn="ctr"/>
+            <a:endParaRPr/>
           </a:p>
         </p:txBody>
       </p:sp>
@@ -19478,6 +19524,7 @@
           <a:lstStyle/>
           <a:p>
             <a:pPr algn="ctr"/>
+            <a:endParaRPr/>
           </a:p>
         </p:txBody>
       </p:sp>
@@ -19631,6 +19678,7 @@
           <a:lstStyle/>
           <a:p>
             <a:pPr algn="ctr"/>
+            <a:endParaRPr/>
           </a:p>
         </p:txBody>
       </p:sp>
@@ -19784,6 +19832,7 @@
           <a:lstStyle/>
           <a:p>
             <a:pPr algn="ctr"/>
+            <a:endParaRPr/>
           </a:p>
         </p:txBody>
       </p:sp>
@@ -19935,6 +19984,7 @@
           <a:lstStyle/>
           <a:p>
             <a:pPr algn="ctr"/>
+            <a:endParaRPr/>
           </a:p>
         </p:txBody>
       </p:sp>
@@ -20055,7 +20105,7 @@
 </file>
 
 <file path=ppt/slides/slide8.xml><?xml version="1.0" encoding="utf-8"?>
-<p:sld xmlns:a="http://schemas.openxmlformats.org/drawingml/2006/main" xmlns:p="http://schemas.openxmlformats.org/presentationml/2006/main" xmlns:r="http://schemas.openxmlformats.org/officeDocument/2006/relationships">
+<p:sld xmlns:a="http://schemas.openxmlformats.org/drawingml/2006/main" xmlns:r="http://schemas.openxmlformats.org/officeDocument/2006/relationships" xmlns:p="http://schemas.openxmlformats.org/presentationml/2006/main">
   <p:cSld>
     <p:bg>
       <p:bgPr>
@@ -20071,7 +20121,14 @@
         <p:cNvGrpSpPr/>
         <p:nvPr/>
       </p:nvGrpSpPr>
-      <p:grpSpPr/>
+      <p:grpSpPr>
+        <a:xfrm>
+          <a:off x="0" y="0"/>
+          <a:ext cx="0" cy="0"/>
+          <a:chOff x="0" y="0"/>
+          <a:chExt cx="0" cy="0"/>
+        </a:xfrm>
+      </p:grpSpPr>
       <p:sp>
         <p:nvSpPr>
           <p:cNvPr id="2" name="Rectangle 1"/>
@@ -20112,6 +20169,7 @@
           <a:lstStyle/>
           <a:p>
             <a:pPr algn="ctr"/>
+            <a:endParaRPr/>
           </a:p>
         </p:txBody>
       </p:sp>
@@ -20132,7 +20190,7 @@
           <a:noFill/>
         </p:spPr>
         <p:txBody>
-          <a:bodyPr wrap="square" lIns="0" rIns="0" tIns="0" bIns="0">
+          <a:bodyPr wrap="square" lIns="0" tIns="0" rIns="0" bIns="0">
             <a:spAutoFit/>
           </a:bodyPr>
           <a:lstStyle/>
@@ -20171,7 +20229,7 @@
           <a:noFill/>
         </p:spPr>
         <p:txBody>
-          <a:bodyPr wrap="square" lIns="0" rIns="0" tIns="0" bIns="0">
+          <a:bodyPr wrap="square" lIns="0" tIns="0" rIns="0" bIns="0">
             <a:spAutoFit/>
           </a:bodyPr>
           <a:lstStyle/>
@@ -20199,7 +20257,7 @@
           <a:noFill/>
         </p:spPr>
         <p:txBody>
-          <a:bodyPr wrap="square" lIns="0" rIns="0" tIns="0" bIns="0">
+          <a:bodyPr wrap="square" lIns="0" tIns="0" rIns="0" bIns="0">
             <a:spAutoFit/>
           </a:bodyPr>
           <a:lstStyle/>
@@ -20250,6 +20308,7 @@
           <a:lstStyle/>
           <a:p>
             <a:pPr algn="ctr"/>
+            <a:endParaRPr/>
           </a:p>
         </p:txBody>
       </p:sp>
@@ -20270,7 +20329,7 @@
           <a:noFill/>
         </p:spPr>
         <p:txBody>
-          <a:bodyPr wrap="square" lIns="0" rIns="0" tIns="0" bIns="0">
+          <a:bodyPr wrap="square" lIns="0" tIns="0" rIns="0" bIns="0">
             <a:spAutoFit/>
           </a:bodyPr>
           <a:lstStyle/>
@@ -20309,7 +20368,7 @@
           <a:noFill/>
         </p:spPr>
         <p:txBody>
-          <a:bodyPr wrap="square" lIns="0" rIns="0" tIns="0" bIns="0">
+          <a:bodyPr wrap="square" lIns="0" tIns="0" rIns="0" bIns="0">
             <a:spAutoFit/>
           </a:bodyPr>
           <a:lstStyle/>
@@ -20364,6 +20423,7 @@
           <a:lstStyle/>
           <a:p>
             <a:pPr algn="ctr"/>
+            <a:endParaRPr/>
           </a:p>
         </p:txBody>
       </p:sp>
@@ -20384,7 +20444,7 @@
           <a:noFill/>
         </p:spPr>
         <p:txBody>
-          <a:bodyPr wrap="square" lIns="0" rIns="0" tIns="0" bIns="0">
+          <a:bodyPr wrap="square" lIns="0" tIns="0" rIns="0" bIns="0">
             <a:spAutoFit/>
           </a:bodyPr>
           <a:lstStyle/>
@@ -20423,7 +20483,7 @@
           <a:noFill/>
         </p:spPr>
         <p:txBody>
-          <a:bodyPr wrap="square" lIns="0" rIns="0" tIns="0" bIns="0">
+          <a:bodyPr wrap="square" lIns="0" tIns="0" rIns="0" bIns="0">
             <a:spAutoFit/>
           </a:bodyPr>
           <a:lstStyle/>
@@ -20489,6 +20549,7 @@
           <a:lstStyle/>
           <a:p>
             <a:pPr algn="ctr"/>
+            <a:endParaRPr/>
           </a:p>
         </p:txBody>
       </p:sp>
@@ -20509,7 +20570,7 @@
           <a:noFill/>
         </p:spPr>
         <p:txBody>
-          <a:bodyPr wrap="square" lIns="0" rIns="0" tIns="0" bIns="0">
+          <a:bodyPr wrap="square" lIns="0" tIns="0" rIns="0" bIns="0">
             <a:spAutoFit/>
           </a:bodyPr>
           <a:lstStyle/>
@@ -20548,7 +20609,7 @@
           <a:noFill/>
         </p:spPr>
         <p:txBody>
-          <a:bodyPr wrap="square" lIns="0" rIns="0" tIns="0" bIns="0">
+          <a:bodyPr wrap="square" lIns="0" tIns="0" rIns="0" bIns="0">
             <a:spAutoFit/>
           </a:bodyPr>
           <a:lstStyle/>
@@ -20614,6 +20675,7 @@
           <a:lstStyle/>
           <a:p>
             <a:pPr algn="ctr"/>
+            <a:endParaRPr/>
           </a:p>
         </p:txBody>
       </p:sp>
@@ -20634,7 +20696,7 @@
           <a:noFill/>
         </p:spPr>
         <p:txBody>
-          <a:bodyPr wrap="square" lIns="0" rIns="0" tIns="0" bIns="0">
+          <a:bodyPr wrap="square" lIns="0" tIns="0" rIns="0" bIns="0">
             <a:spAutoFit/>
           </a:bodyPr>
           <a:lstStyle/>
@@ -20673,7 +20735,7 @@
           <a:noFill/>
         </p:spPr>
         <p:txBody>
-          <a:bodyPr wrap="square" lIns="0" rIns="0" tIns="0" bIns="0">
+          <a:bodyPr wrap="square" lIns="0" tIns="0" rIns="0" bIns="0">
             <a:spAutoFit/>
           </a:bodyPr>
           <a:lstStyle/>
@@ -20739,6 +20801,7 @@
           <a:lstStyle/>
           <a:p>
             <a:pPr algn="ctr"/>
+            <a:endParaRPr/>
           </a:p>
         </p:txBody>
       </p:sp>
@@ -20759,7 +20822,7 @@
           <a:noFill/>
         </p:spPr>
         <p:txBody>
-          <a:bodyPr wrap="square" lIns="0" rIns="0" tIns="0" bIns="0">
+          <a:bodyPr wrap="square" lIns="0" tIns="0" rIns="0" bIns="0">
             <a:spAutoFit/>
           </a:bodyPr>
           <a:lstStyle/>
@@ -20798,7 +20861,7 @@
           <a:noFill/>
         </p:spPr>
         <p:txBody>
-          <a:bodyPr wrap="square" lIns="0" rIns="0" tIns="0" bIns="0">
+          <a:bodyPr wrap="square" lIns="0" tIns="0" rIns="0" bIns="0">
             <a:spAutoFit/>
           </a:bodyPr>
           <a:lstStyle/>
@@ -20864,6 +20927,7 @@
           <a:lstStyle/>
           <a:p>
             <a:pPr algn="ctr"/>
+            <a:endParaRPr/>
           </a:p>
         </p:txBody>
       </p:sp>
@@ -20884,7 +20948,7 @@
           <a:noFill/>
         </p:spPr>
         <p:txBody>
-          <a:bodyPr wrap="square" lIns="0" rIns="0" tIns="0" bIns="0">
+          <a:bodyPr wrap="square" lIns="0" tIns="0" rIns="0" bIns="0">
             <a:spAutoFit/>
           </a:bodyPr>
           <a:lstStyle/>
@@ -20923,7 +20987,7 @@
           <a:noFill/>
         </p:spPr>
         <p:txBody>
-          <a:bodyPr wrap="square" lIns="0" rIns="0" tIns="0" bIns="0">
+          <a:bodyPr wrap="square" lIns="0" tIns="0" rIns="0" bIns="0">
             <a:spAutoFit/>
           </a:bodyPr>
           <a:lstStyle/>
@@ -20989,6 +21053,7 @@
           <a:lstStyle/>
           <a:p>
             <a:pPr algn="ctr"/>
+            <a:endParaRPr/>
           </a:p>
         </p:txBody>
       </p:sp>
@@ -21009,7 +21074,7 @@
           <a:noFill/>
         </p:spPr>
         <p:txBody>
-          <a:bodyPr wrap="square" lIns="0" rIns="0" tIns="0" bIns="0">
+          <a:bodyPr wrap="square" lIns="0" tIns="0" rIns="0" bIns="0">
             <a:spAutoFit/>
           </a:bodyPr>
           <a:lstStyle/>
@@ -21048,7 +21113,7 @@
           <a:noFill/>
         </p:spPr>
         <p:txBody>
-          <a:bodyPr wrap="square" lIns="0" rIns="0" tIns="0" bIns="0">
+          <a:bodyPr wrap="square" lIns="0" tIns="0" rIns="0" bIns="0">
             <a:spAutoFit/>
           </a:bodyPr>
           <a:lstStyle/>
@@ -21087,7 +21152,7 @@
           <a:noFill/>
         </p:spPr>
         <p:txBody>
-          <a:bodyPr wrap="square" lIns="0" rIns="0" tIns="0" bIns="0">
+          <a:bodyPr wrap="square" lIns="0" tIns="0" rIns="0" bIns="0">
             <a:spAutoFit/>
           </a:bodyPr>
           <a:lstStyle/>
@@ -21126,7 +21191,7 @@
           <a:noFill/>
         </p:spPr>
         <p:txBody>
-          <a:bodyPr wrap="square" lIns="0" rIns="0" tIns="0" bIns="0">
+          <a:bodyPr wrap="square" lIns="0" tIns="0" rIns="0" bIns="0">
             <a:spAutoFit/>
           </a:bodyPr>
           <a:lstStyle/>
@@ -21157,7 +21222,7 @@
 </file>
 
 <file path=ppt/slides/slide9.xml><?xml version="1.0" encoding="utf-8"?>
-<p:sld xmlns:a="http://schemas.openxmlformats.org/drawingml/2006/main" xmlns:p="http://schemas.openxmlformats.org/presentationml/2006/main" xmlns:r="http://schemas.openxmlformats.org/officeDocument/2006/relationships">
+<p:sld xmlns:a="http://schemas.openxmlformats.org/drawingml/2006/main" xmlns:r="http://schemas.openxmlformats.org/officeDocument/2006/relationships" xmlns:p="http://schemas.openxmlformats.org/presentationml/2006/main">
   <p:cSld>
     <p:bg>
       <p:bgPr>
@@ -21173,7 +21238,14 @@
         <p:cNvGrpSpPr/>
         <p:nvPr/>
       </p:nvGrpSpPr>
-      <p:grpSpPr/>
+      <p:grpSpPr>
+        <a:xfrm>
+          <a:off x="0" y="0"/>
+          <a:ext cx="0" cy="0"/>
+          <a:chOff x="0" y="0"/>
+          <a:chExt cx="0" cy="0"/>
+        </a:xfrm>
+      </p:grpSpPr>
       <p:sp>
         <p:nvSpPr>
           <p:cNvPr id="2" name="Rectangle 1"/>
@@ -21214,6 +21286,7 @@
           <a:lstStyle/>
           <a:p>
             <a:pPr algn="ctr"/>
+            <a:endParaRPr/>
           </a:p>
         </p:txBody>
       </p:sp>
@@ -21331,6 +21404,7 @@
           <a:lstStyle/>
           <a:p>
             <a:pPr algn="ctr"/>
+            <a:endParaRPr/>
           </a:p>
         </p:txBody>
       </p:sp>
@@ -21484,6 +21558,7 @@
           <a:lstStyle/>
           <a:p>
             <a:pPr algn="ctr"/>
+            <a:endParaRPr/>
           </a:p>
         </p:txBody>
       </p:sp>
@@ -21635,6 +21710,7 @@
           <a:lstStyle/>
           <a:p>
             <a:pPr algn="ctr"/>
+            <a:endParaRPr/>
           </a:p>
         </p:txBody>
       </p:sp>
@@ -22085,44 +22161,44 @@
         <a:sysClr val="window" lastClr="FFFFFF"/>
       </a:lt1>
       <a:dk2>
-        <a:srgbClr val="1F497D"/>
+        <a:srgbClr val="0E2841"/>
       </a:dk2>
       <a:lt2>
-        <a:srgbClr val="EEECE1"/>
+        <a:srgbClr val="E8E8E8"/>
       </a:lt2>
       <a:accent1>
-        <a:srgbClr val="4F81BD"/>
+        <a:srgbClr val="156082"/>
       </a:accent1>
       <a:accent2>
-        <a:srgbClr val="C0504D"/>
+        <a:srgbClr val="E97132"/>
       </a:accent2>
       <a:accent3>
-        <a:srgbClr val="9BBB59"/>
+        <a:srgbClr val="196B24"/>
       </a:accent3>
       <a:accent4>
-        <a:srgbClr val="8064A2"/>
+        <a:srgbClr val="0F9ED5"/>
       </a:accent4>
       <a:accent5>
-        <a:srgbClr val="4BACC6"/>
+        <a:srgbClr val="A02B93"/>
       </a:accent5>
       <a:accent6>
-        <a:srgbClr val="F79646"/>
+        <a:srgbClr val="4EA72E"/>
       </a:accent6>
       <a:hlink>
-        <a:srgbClr val="0000FF"/>
+        <a:srgbClr val="467886"/>
       </a:hlink>
       <a:folHlink>
-        <a:srgbClr val="800080"/>
+        <a:srgbClr val="96607D"/>
       </a:folHlink>
     </a:clrScheme>
     <a:fontScheme name="Office">
       <a:majorFont>
-        <a:latin typeface="Calibri"/>
+        <a:latin typeface="Aptos Display" panose="02110004020202020204"/>
         <a:ea typeface=""/>
         <a:cs typeface=""/>
-        <a:font script="Jpan" typeface="ＭＳ Ｐゴシック"/>
+        <a:font script="Jpan" typeface="游ゴシック Light"/>
         <a:font script="Hang" typeface="맑은 고딕"/>
-        <a:font script="Hans" typeface="宋体"/>
+        <a:font script="Hans" typeface="等线 Light"/>
         <a:font script="Hant" typeface="新細明體"/>
         <a:font script="Arab" typeface="Times New Roman"/>
         <a:font script="Hebr" typeface="Times New Roman"/>
@@ -22150,14 +22226,31 @@
         <a:font script="Viet" typeface="Times New Roman"/>
         <a:font script="Uigh" typeface="Microsoft Uighur"/>
         <a:font script="Geor" typeface="Sylfaen"/>
+        <a:font script="Armn" typeface="Arial"/>
+        <a:font script="Bugi" typeface="Leelawadee UI"/>
+        <a:font script="Bopo" typeface="Microsoft JhengHei"/>
+        <a:font script="Java" typeface="Javanese Text"/>
+        <a:font script="Lisu" typeface="Segoe UI"/>
+        <a:font script="Mymr" typeface="Myanmar Text"/>
+        <a:font script="Nkoo" typeface="Ebrima"/>
+        <a:font script="Olck" typeface="Nirmala UI"/>
+        <a:font script="Osma" typeface="Ebrima"/>
+        <a:font script="Phag" typeface="Phagspa"/>
+        <a:font script="Syrn" typeface="Estrangelo Edessa"/>
+        <a:font script="Syrj" typeface="Estrangelo Edessa"/>
+        <a:font script="Syre" typeface="Estrangelo Edessa"/>
+        <a:font script="Sora" typeface="Nirmala UI"/>
+        <a:font script="Tale" typeface="Microsoft Tai Le"/>
+        <a:font script="Talu" typeface="Microsoft New Tai Lue"/>
+        <a:font script="Tfng" typeface="Ebrima"/>
       </a:majorFont>
       <a:minorFont>
-        <a:latin typeface="Calibri"/>
+        <a:latin typeface="Aptos" panose="02110004020202020204"/>
         <a:ea typeface=""/>
         <a:cs typeface=""/>
-        <a:font script="Jpan" typeface="ＭＳ Ｐゴシック"/>
+        <a:font script="Jpan" typeface="游ゴシック"/>
         <a:font script="Hang" typeface="맑은 고딕"/>
-        <a:font script="Hans" typeface="宋体"/>
+        <a:font script="Hans" typeface="等线"/>
         <a:font script="Hant" typeface="新細明體"/>
         <a:font script="Arab" typeface="Arial"/>
         <a:font script="Hebr" typeface="Arial"/>
@@ -22185,6 +22278,23 @@
         <a:font script="Viet" typeface="Arial"/>
         <a:font script="Uigh" typeface="Microsoft Uighur"/>
         <a:font script="Geor" typeface="Sylfaen"/>
+        <a:font script="Armn" typeface="Arial"/>
+        <a:font script="Bugi" typeface="Leelawadee UI"/>
+        <a:font script="Bopo" typeface="Microsoft JhengHei"/>
+        <a:font script="Java" typeface="Javanese Text"/>
+        <a:font script="Lisu" typeface="Segoe UI"/>
+        <a:font script="Mymr" typeface="Myanmar Text"/>
+        <a:font script="Nkoo" typeface="Ebrima"/>
+        <a:font script="Olck" typeface="Nirmala UI"/>
+        <a:font script="Osma" typeface="Ebrima"/>
+        <a:font script="Phag" typeface="Phagspa"/>
+        <a:font script="Syrn" typeface="Estrangelo Edessa"/>
+        <a:font script="Syrj" typeface="Estrangelo Edessa"/>
+        <a:font script="Syre" typeface="Estrangelo Edessa"/>
+        <a:font script="Sora" typeface="Nirmala UI"/>
+        <a:font script="Tale" typeface="Microsoft Tai Le"/>
+        <a:font script="Talu" typeface="Microsoft New Tai Lue"/>
+        <a:font script="Tfng" typeface="Ebrima"/>
       </a:minorFont>
     </a:fontScheme>
     <a:fmtScheme name="Office">
@@ -22196,180 +22306,136 @@
           <a:gsLst>
             <a:gs pos="0">
               <a:schemeClr val="phClr">
-                <a:tint val="50000"/>
-                <a:satMod val="300000"/>
+                <a:lumMod val="110000"/>
+                <a:satMod val="105000"/>
+                <a:tint val="67000"/>
               </a:schemeClr>
             </a:gs>
-            <a:gs pos="35000">
+            <a:gs pos="50000">
               <a:schemeClr val="phClr">
-                <a:tint val="37000"/>
-                <a:satMod val="300000"/>
+                <a:lumMod val="105000"/>
+                <a:satMod val="103000"/>
+                <a:tint val="73000"/>
               </a:schemeClr>
             </a:gs>
             <a:gs pos="100000">
               <a:schemeClr val="phClr">
-                <a:tint val="15000"/>
-                <a:satMod val="350000"/>
+                <a:lumMod val="105000"/>
+                <a:satMod val="109000"/>
+                <a:tint val="81000"/>
               </a:schemeClr>
             </a:gs>
           </a:gsLst>
-          <a:lin ang="16200000" scaled="1"/>
+          <a:lin ang="5400000" scaled="0"/>
         </a:gradFill>
         <a:gradFill rotWithShape="1">
           <a:gsLst>
             <a:gs pos="0">
               <a:schemeClr val="phClr">
-                <a:tint val="100000"/>
+                <a:satMod val="103000"/>
+                <a:lumMod val="102000"/>
+                <a:tint val="94000"/>
+              </a:schemeClr>
+            </a:gs>
+            <a:gs pos="50000">
+              <a:schemeClr val="phClr">
+                <a:satMod val="110000"/>
+                <a:lumMod val="100000"/>
                 <a:shade val="100000"/>
-                <a:satMod val="130000"/>
               </a:schemeClr>
             </a:gs>
             <a:gs pos="100000">
               <a:schemeClr val="phClr">
-                <a:tint val="50000"/>
-                <a:shade val="100000"/>
-                <a:satMod val="350000"/>
+                <a:lumMod val="99000"/>
+                <a:satMod val="120000"/>
+                <a:shade val="78000"/>
               </a:schemeClr>
             </a:gs>
           </a:gsLst>
-          <a:lin ang="16200000" scaled="0"/>
+          <a:lin ang="5400000" scaled="0"/>
         </a:gradFill>
       </a:fillStyleLst>
       <a:lnStyleLst>
-        <a:ln w="9525" cap="flat" cmpd="sng" algn="ctr">
+        <a:ln w="12700" cap="flat" cmpd="sng" algn="ctr">
           <a:solidFill>
-            <a:schemeClr val="phClr">
-              <a:shade val="95000"/>
-              <a:satMod val="105000"/>
-            </a:schemeClr>
+            <a:schemeClr val="phClr"/>
           </a:solidFill>
           <a:prstDash val="solid"/>
+          <a:miter lim="800000"/>
+        </a:ln>
+        <a:ln w="19050" cap="flat" cmpd="sng" algn="ctr">
+          <a:solidFill>
+            <a:schemeClr val="phClr"/>
+          </a:solidFill>
+          <a:prstDash val="solid"/>
+          <a:miter lim="800000"/>
         </a:ln>
         <a:ln w="25400" cap="flat" cmpd="sng" algn="ctr">
           <a:solidFill>
             <a:schemeClr val="phClr"/>
           </a:solidFill>
           <a:prstDash val="solid"/>
-        </a:ln>
-        <a:ln w="38100" cap="flat" cmpd="sng" algn="ctr">
-          <a:solidFill>
-            <a:schemeClr val="phClr"/>
-          </a:solidFill>
-          <a:prstDash val="solid"/>
+          <a:miter lim="800000"/>
         </a:ln>
       </a:lnStyleLst>
       <a:effectStyleLst>
         <a:effectStyle>
+          <a:effectLst/>
+        </a:effectStyle>
+        <a:effectStyle>
+          <a:effectLst/>
+        </a:effectStyle>
+        <a:effectStyle>
           <a:effectLst>
-            <a:outerShdw blurRad="40000" dist="20000" dir="5400000" rotWithShape="0">
+            <a:outerShdw blurRad="57150" dist="19050" dir="5400000" algn="ctr" rotWithShape="0">
               <a:srgbClr val="000000">
-                <a:alpha val="38000"/>
+                <a:alpha val="63000"/>
               </a:srgbClr>
             </a:outerShdw>
           </a:effectLst>
-        </a:effectStyle>
-        <a:effectStyle>
-          <a:effectLst>
-            <a:outerShdw blurRad="40000" dist="23000" dir="5400000" rotWithShape="0">
-              <a:srgbClr val="000000">
-                <a:alpha val="35000"/>
-              </a:srgbClr>
-            </a:outerShdw>
-          </a:effectLst>
-        </a:effectStyle>
-        <a:effectStyle>
-          <a:effectLst>
-            <a:outerShdw blurRad="40000" dist="23000" dir="5400000" rotWithShape="0">
-              <a:srgbClr val="000000">
-                <a:alpha val="35000"/>
-              </a:srgbClr>
-            </a:outerShdw>
-          </a:effectLst>
-          <a:scene3d>
-            <a:camera prst="orthographicFront">
-              <a:rot lat="0" lon="0" rev="0"/>
-            </a:camera>
-            <a:lightRig rig="threePt" dir="t">
-              <a:rot lat="0" lon="0" rev="1200000"/>
-            </a:lightRig>
-          </a:scene3d>
-          <a:sp3d>
-            <a:bevelT w="63500" h="25400"/>
-          </a:sp3d>
         </a:effectStyle>
       </a:effectStyleLst>
       <a:bgFillStyleLst>
         <a:solidFill>
           <a:schemeClr val="phClr"/>
         </a:solidFill>
+        <a:solidFill>
+          <a:schemeClr val="phClr">
+            <a:tint val="95000"/>
+            <a:satMod val="170000"/>
+          </a:schemeClr>
+        </a:solidFill>
         <a:gradFill rotWithShape="1">
           <a:gsLst>
             <a:gs pos="0">
               <a:schemeClr val="phClr">
-                <a:tint val="40000"/>
-                <a:satMod val="350000"/>
+                <a:tint val="93000"/>
+                <a:satMod val="150000"/>
+                <a:shade val="98000"/>
+                <a:lumMod val="102000"/>
               </a:schemeClr>
             </a:gs>
-            <a:gs pos="40000">
+            <a:gs pos="50000">
               <a:schemeClr val="phClr">
-                <a:tint val="45000"/>
-                <a:shade val="99000"/>
-                <a:satMod val="350000"/>
+                <a:tint val="98000"/>
+                <a:satMod val="130000"/>
+                <a:shade val="90000"/>
+                <a:lumMod val="103000"/>
               </a:schemeClr>
             </a:gs>
             <a:gs pos="100000">
               <a:schemeClr val="phClr">
-                <a:shade val="20000"/>
-                <a:satMod val="255000"/>
+                <a:shade val="63000"/>
+                <a:satMod val="120000"/>
               </a:schemeClr>
             </a:gs>
           </a:gsLst>
-          <a:path path="circle">
-            <a:fillToRect l="50000" t="-80000" r="50000" b="180000"/>
-          </a:path>
-        </a:gradFill>
-        <a:gradFill rotWithShape="1">
-          <a:gsLst>
-            <a:gs pos="0">
-              <a:schemeClr val="phClr">
-                <a:tint val="80000"/>
-                <a:satMod val="300000"/>
-              </a:schemeClr>
-            </a:gs>
-            <a:gs pos="100000">
-              <a:schemeClr val="phClr">
-                <a:shade val="30000"/>
-                <a:satMod val="200000"/>
-              </a:schemeClr>
-            </a:gs>
-          </a:gsLst>
-          <a:path path="circle">
-            <a:fillToRect l="50000" t="50000" r="50000" b="50000"/>
-          </a:path>
+          <a:lin ang="5400000" scaled="0"/>
         </a:gradFill>
       </a:bgFillStyleLst>
     </a:fmtScheme>
   </a:themeElements>
   <a:objectDefaults>
-    <a:spDef>
-      <a:spPr/>
-      <a:bodyPr/>
-      <a:lstStyle/>
-      <a:style>
-        <a:lnRef idx="1">
-          <a:schemeClr val="accent1"/>
-        </a:lnRef>
-        <a:fillRef idx="3">
-          <a:schemeClr val="accent1"/>
-        </a:fillRef>
-        <a:effectRef idx="2">
-          <a:schemeClr val="accent1"/>
-        </a:effectRef>
-        <a:fontRef idx="minor">
-          <a:schemeClr val="lt1"/>
-        </a:fontRef>
-      </a:style>
-    </a:spDef>
     <a:lnDef>
       <a:spPr/>
       <a:bodyPr/>
@@ -22391,5 +22457,10 @@
     </a:lnDef>
   </a:objectDefaults>
   <a:extraClrSchemeLst/>
+  <a:extLst>
+    <a:ext uri="{05A4C25C-085E-4340-85A3-A5531E510DB2}">
+      <thm15:themeFamily xmlns:thm15="http://schemas.microsoft.com/office/thememl/2012/main" name="Office Theme" id="{2E142A2C-CD16-42D6-873A-C26D2A0506FA}" vid="{1BDDFF52-6CD6-40A5-AB3C-68EB2F1E4D0A}"/>
+    </a:ext>
+  </a:extLst>
 </a:theme>
 </file>
--- a/docs/final_submission/Group7_Parallel_KMeans_Final_Presentation.pptx
+++ b/docs/final_submission/Group7_Parallel_KMeans_Final_Presentation.pptx
@@ -30,6 +30,7 @@
     <p:sldId id="277" r:id="rId21"/>
     <p:sldId id="269" r:id="rId22"/>
     <p:sldId id="278" r:id="rId23"/>
+    <p:sldId id="279" r:id="rId30"/>
     <p:sldId id="270" r:id="rId24"/>
   </p:sldIdLst>
   <p:sldSz cx="12192000" cy="6858000"/>
@@ -15695,6 +15696,1082 @@
             </a:pPr>
             <a:r>
               <a:t>[5] Apache Software Foundation, “RDD Programming Guide,” Spark Documentation.</a:t>
+            </a:r>
+          </a:p>
+        </p:txBody>
+      </p:sp>
+    </p:spTree>
+  </p:cSld>
+  <p:clrMapOvr>
+    <a:masterClrMapping/>
+  </p:clrMapOvr>
+</p:sld>
+</file>
+
+<file path=ppt/slides/slide24.xml><?xml version="1.0" encoding="utf-8"?>
+<p:sld xmlns:a="http://schemas.openxmlformats.org/drawingml/2006/main" xmlns:p="http://schemas.openxmlformats.org/presentationml/2006/main" xmlns:r="http://schemas.openxmlformats.org/officeDocument/2006/relationships">
+  <p:cSld>
+    <p:bg>
+      <p:bgPr>
+        <a:solidFill>
+          <a:srgbClr val="0D192D"/>
+        </a:solidFill>
+        <a:effectLst/>
+      </p:bgPr>
+    </p:bg>
+    <p:spTree>
+      <p:nvGrpSpPr>
+        <p:cNvPr id="1" name=""/>
+        <p:cNvGrpSpPr/>
+        <p:nvPr/>
+      </p:nvGrpSpPr>
+      <p:grpSpPr/>
+      <p:sp>
+        <p:nvSpPr>
+          <p:cNvPr id="2" name="TextBox 1"/>
+          <p:cNvSpPr txBox="1"/>
+          <p:nvPr/>
+        </p:nvSpPr>
+        <p:spPr>
+          <a:xfrm>
+            <a:off x="594360" y="347472"/>
+            <a:ext cx="11003280" cy="329184"/>
+          </a:xfrm>
+          <a:prstGeom prst="rect">
+            <a:avLst/>
+          </a:prstGeom>
+          <a:noFill/>
+        </p:spPr>
+        <p:txBody>
+          <a:bodyPr wrap="square">
+            <a:spAutoFit/>
+          </a:bodyPr>
+          <a:lstStyle/>
+          <a:p>
+            <a:pPr>
+              <a:defRPr sz="1400" b="1">
+                <a:solidFill>
+                  <a:srgbClr val="5BCCE6"/>
+                </a:solidFill>
+              </a:defRPr>
+            </a:pPr>
+            <a:r>
+              <a:t>SUPPLEMENTARY VERIFICATION</a:t>
+            </a:r>
+          </a:p>
+        </p:txBody>
+      </p:sp>
+      <p:sp>
+        <p:nvSpPr>
+          <p:cNvPr id="3" name="TextBox 2"/>
+          <p:cNvSpPr txBox="1"/>
+          <p:nvPr/>
+        </p:nvSpPr>
+        <p:spPr>
+          <a:xfrm>
+            <a:off x="594360" y="822960"/>
+            <a:ext cx="11094720" cy="640080"/>
+          </a:xfrm>
+          <a:prstGeom prst="rect">
+            <a:avLst/>
+          </a:prstGeom>
+          <a:noFill/>
+        </p:spPr>
+        <p:txBody>
+          <a:bodyPr wrap="square">
+            <a:spAutoFit/>
+          </a:bodyPr>
+          <a:lstStyle/>
+          <a:p>
+            <a:pPr>
+              <a:defRPr sz="2700" b="1">
+                <a:solidFill>
+                  <a:srgbClr val="EBF2FA"/>
+                </a:solidFill>
+              </a:defRPr>
+            </a:pPr>
+            <a:r>
+              <a:t>Independent SSE &amp; cluster-quality checks</a:t>
+            </a:r>
+          </a:p>
+        </p:txBody>
+      </p:sp>
+      <p:sp>
+        <p:nvSpPr>
+          <p:cNvPr id="4" name="TextBox 3"/>
+          <p:cNvSpPr txBox="1"/>
+          <p:nvPr/>
+        </p:nvSpPr>
+        <p:spPr>
+          <a:xfrm>
+            <a:off x="594360" y="1527048"/>
+            <a:ext cx="11094720" cy="365760"/>
+          </a:xfrm>
+          <a:prstGeom prst="rect">
+            <a:avLst/>
+          </a:prstGeom>
+          <a:noFill/>
+        </p:spPr>
+        <p:txBody>
+          <a:bodyPr wrap="square">
+            <a:spAutoFit/>
+          </a:bodyPr>
+          <a:lstStyle/>
+          <a:p>
+            <a:pPr>
+              <a:defRPr sz="1600" b="0">
+                <a:solidFill>
+                  <a:srgbClr val="EBF2FA"/>
+                </a:solidFill>
+              </a:defRPr>
+            </a:pPr>
+            <a:r>
+              <a:t>1,000 records  •  2 partitions  •  seed 42  •  5 clusters</a:t>
+            </a:r>
+          </a:p>
+        </p:txBody>
+      </p:sp>
+      <p:sp>
+        <p:nvSpPr>
+          <p:cNvPr id="5" name="TextBox 4"/>
+          <p:cNvSpPr txBox="1"/>
+          <p:nvPr/>
+        </p:nvSpPr>
+        <p:spPr>
+          <a:xfrm>
+            <a:off x="594360" y="2057400"/>
+            <a:ext cx="3977639" cy="329184"/>
+          </a:xfrm>
+          <a:prstGeom prst="rect">
+            <a:avLst/>
+          </a:prstGeom>
+          <a:noFill/>
+        </p:spPr>
+        <p:txBody>
+          <a:bodyPr wrap="square">
+            <a:spAutoFit/>
+          </a:bodyPr>
+          <a:lstStyle/>
+          <a:p>
+            <a:pPr>
+              <a:defRPr sz="1500" b="1">
+                <a:solidFill>
+                  <a:srgbClr val="5BCCE6"/>
+                </a:solidFill>
+              </a:defRPr>
+            </a:pPr>
+            <a:r>
+              <a:t>Dataset / method</a:t>
+            </a:r>
+          </a:p>
+        </p:txBody>
+      </p:sp>
+      <p:sp>
+        <p:nvSpPr>
+          <p:cNvPr id="6" name="TextBox 5"/>
+          <p:cNvSpPr txBox="1"/>
+          <p:nvPr/>
+        </p:nvSpPr>
+        <p:spPr>
+          <a:xfrm>
+            <a:off x="4736592" y="2057400"/>
+            <a:ext cx="1325880" cy="329184"/>
+          </a:xfrm>
+          <a:prstGeom prst="rect">
+            <a:avLst/>
+          </a:prstGeom>
+          <a:noFill/>
+        </p:spPr>
+        <p:txBody>
+          <a:bodyPr wrap="square">
+            <a:spAutoFit/>
+          </a:bodyPr>
+          <a:lstStyle/>
+          <a:p>
+            <a:pPr>
+              <a:defRPr sz="1500" b="1">
+                <a:solidFill>
+                  <a:srgbClr val="5BCCE6"/>
+                </a:solidFill>
+              </a:defRPr>
+            </a:pPr>
+            <a:r>
+              <a:t>SSE</a:t>
+            </a:r>
+          </a:p>
+        </p:txBody>
+      </p:sp>
+      <p:sp>
+        <p:nvSpPr>
+          <p:cNvPr id="7" name="TextBox 6"/>
+          <p:cNvSpPr txBox="1"/>
+          <p:nvPr/>
+        </p:nvSpPr>
+        <p:spPr>
+          <a:xfrm>
+            <a:off x="6446520" y="2057400"/>
+            <a:ext cx="1005840" cy="329184"/>
+          </a:xfrm>
+          <a:prstGeom prst="rect">
+            <a:avLst/>
+          </a:prstGeom>
+          <a:noFill/>
+        </p:spPr>
+        <p:txBody>
+          <a:bodyPr wrap="square">
+            <a:spAutoFit/>
+          </a:bodyPr>
+          <a:lstStyle/>
+          <a:p>
+            <a:pPr>
+              <a:defRPr sz="1500" b="1">
+                <a:solidFill>
+                  <a:srgbClr val="5BCCE6"/>
+                </a:solidFill>
+              </a:defRPr>
+            </a:pPr>
+            <a:r>
+              <a:t>Purity</a:t>
+            </a:r>
+          </a:p>
+        </p:txBody>
+      </p:sp>
+      <p:sp>
+        <p:nvSpPr>
+          <p:cNvPr id="8" name="TextBox 7"/>
+          <p:cNvSpPr txBox="1"/>
+          <p:nvPr/>
+        </p:nvSpPr>
+        <p:spPr>
+          <a:xfrm>
+            <a:off x="7772400" y="2057400"/>
+            <a:ext cx="914400" cy="329184"/>
+          </a:xfrm>
+          <a:prstGeom prst="rect">
+            <a:avLst/>
+          </a:prstGeom>
+          <a:noFill/>
+        </p:spPr>
+        <p:txBody>
+          <a:bodyPr wrap="square">
+            <a:spAutoFit/>
+          </a:bodyPr>
+          <a:lstStyle/>
+          <a:p>
+            <a:pPr>
+              <a:defRPr sz="1500" b="1">
+                <a:solidFill>
+                  <a:srgbClr val="5BCCE6"/>
+                </a:solidFill>
+              </a:defRPr>
+            </a:pPr>
+            <a:r>
+              <a:t>ARI</a:t>
+            </a:r>
+          </a:p>
+        </p:txBody>
+      </p:sp>
+      <p:sp>
+        <p:nvSpPr>
+          <p:cNvPr id="9" name="TextBox 8"/>
+          <p:cNvSpPr txBox="1"/>
+          <p:nvPr/>
+        </p:nvSpPr>
+        <p:spPr>
+          <a:xfrm>
+            <a:off x="8997696" y="2057400"/>
+            <a:ext cx="914400" cy="329184"/>
+          </a:xfrm>
+          <a:prstGeom prst="rect">
+            <a:avLst/>
+          </a:prstGeom>
+          <a:noFill/>
+        </p:spPr>
+        <p:txBody>
+          <a:bodyPr wrap="square">
+            <a:spAutoFit/>
+          </a:bodyPr>
+          <a:lstStyle/>
+          <a:p>
+            <a:pPr>
+              <a:defRPr sz="1500" b="1">
+                <a:solidFill>
+                  <a:srgbClr val="5BCCE6"/>
+                </a:solidFill>
+              </a:defRPr>
+            </a:pPr>
+            <a:r>
+              <a:t>NMI</a:t>
+            </a:r>
+          </a:p>
+        </p:txBody>
+      </p:sp>
+      <p:sp>
+        <p:nvSpPr>
+          <p:cNvPr id="10" name="TextBox 9"/>
+          <p:cNvSpPr txBox="1"/>
+          <p:nvPr/>
+        </p:nvSpPr>
+        <p:spPr>
+          <a:xfrm>
+            <a:off x="594360" y="2496312"/>
+            <a:ext cx="3977639" cy="384048"/>
+          </a:xfrm>
+          <a:prstGeom prst="rect">
+            <a:avLst/>
+          </a:prstGeom>
+          <a:noFill/>
+        </p:spPr>
+        <p:txBody>
+          <a:bodyPr wrap="square">
+            <a:spAutoFit/>
+          </a:bodyPr>
+          <a:lstStyle/>
+          <a:p>
+            <a:pPr>
+              <a:defRPr sz="1400" b="0">
+                <a:solidFill>
+                  <a:srgbClr val="EBF2FA"/>
+                </a:solidFill>
+              </a:defRPr>
+            </a:pPr>
+            <a:r>
+              <a:t>Synthetic • Traditional</a:t>
+            </a:r>
+          </a:p>
+        </p:txBody>
+      </p:sp>
+      <p:sp>
+        <p:nvSpPr>
+          <p:cNvPr id="11" name="TextBox 10"/>
+          <p:cNvSpPr txBox="1"/>
+          <p:nvPr/>
+        </p:nvSpPr>
+        <p:spPr>
+          <a:xfrm>
+            <a:off x="4736592" y="2496312"/>
+            <a:ext cx="1325880" cy="384048"/>
+          </a:xfrm>
+          <a:prstGeom prst="rect">
+            <a:avLst/>
+          </a:prstGeom>
+          <a:noFill/>
+        </p:spPr>
+        <p:txBody>
+          <a:bodyPr wrap="square">
+            <a:spAutoFit/>
+          </a:bodyPr>
+          <a:lstStyle/>
+          <a:p>
+            <a:pPr>
+              <a:defRPr sz="1400" b="0">
+                <a:solidFill>
+                  <a:srgbClr val="EBF2FA"/>
+                </a:solidFill>
+              </a:defRPr>
+            </a:pPr>
+            <a:r>
+              <a:t>1,032.370</a:t>
+            </a:r>
+          </a:p>
+        </p:txBody>
+      </p:sp>
+      <p:sp>
+        <p:nvSpPr>
+          <p:cNvPr id="12" name="TextBox 11"/>
+          <p:cNvSpPr txBox="1"/>
+          <p:nvPr/>
+        </p:nvSpPr>
+        <p:spPr>
+          <a:xfrm>
+            <a:off x="6446520" y="2496312"/>
+            <a:ext cx="1005840" cy="384048"/>
+          </a:xfrm>
+          <a:prstGeom prst="rect">
+            <a:avLst/>
+          </a:prstGeom>
+          <a:noFill/>
+        </p:spPr>
+        <p:txBody>
+          <a:bodyPr wrap="square">
+            <a:spAutoFit/>
+          </a:bodyPr>
+          <a:lstStyle/>
+          <a:p>
+            <a:pPr>
+              <a:defRPr sz="1400" b="0">
+                <a:solidFill>
+                  <a:srgbClr val="EBF2FA"/>
+                </a:solidFill>
+              </a:defRPr>
+            </a:pPr>
+            <a:r>
+              <a:t>1.000</a:t>
+            </a:r>
+          </a:p>
+        </p:txBody>
+      </p:sp>
+      <p:sp>
+        <p:nvSpPr>
+          <p:cNvPr id="13" name="TextBox 12"/>
+          <p:cNvSpPr txBox="1"/>
+          <p:nvPr/>
+        </p:nvSpPr>
+        <p:spPr>
+          <a:xfrm>
+            <a:off x="7772400" y="2496312"/>
+            <a:ext cx="914400" cy="384048"/>
+          </a:xfrm>
+          <a:prstGeom prst="rect">
+            <a:avLst/>
+          </a:prstGeom>
+          <a:noFill/>
+        </p:spPr>
+        <p:txBody>
+          <a:bodyPr wrap="square">
+            <a:spAutoFit/>
+          </a:bodyPr>
+          <a:lstStyle/>
+          <a:p>
+            <a:pPr>
+              <a:defRPr sz="1400" b="0">
+                <a:solidFill>
+                  <a:srgbClr val="EBF2FA"/>
+                </a:solidFill>
+              </a:defRPr>
+            </a:pPr>
+            <a:r>
+              <a:t>1.000</a:t>
+            </a:r>
+          </a:p>
+        </p:txBody>
+      </p:sp>
+      <p:sp>
+        <p:nvSpPr>
+          <p:cNvPr id="14" name="TextBox 13"/>
+          <p:cNvSpPr txBox="1"/>
+          <p:nvPr/>
+        </p:nvSpPr>
+        <p:spPr>
+          <a:xfrm>
+            <a:off x="8997696" y="2496312"/>
+            <a:ext cx="914400" cy="384048"/>
+          </a:xfrm>
+          <a:prstGeom prst="rect">
+            <a:avLst/>
+          </a:prstGeom>
+          <a:noFill/>
+        </p:spPr>
+        <p:txBody>
+          <a:bodyPr wrap="square">
+            <a:spAutoFit/>
+          </a:bodyPr>
+          <a:lstStyle/>
+          <a:p>
+            <a:pPr>
+              <a:defRPr sz="1400" b="0">
+                <a:solidFill>
+                  <a:srgbClr val="EBF2FA"/>
+                </a:solidFill>
+              </a:defRPr>
+            </a:pPr>
+            <a:r>
+              <a:t>1.000</a:t>
+            </a:r>
+          </a:p>
+        </p:txBody>
+      </p:sp>
+      <p:sp>
+        <p:nvSpPr>
+          <p:cNvPr id="15" name="TextBox 14"/>
+          <p:cNvSpPr txBox="1"/>
+          <p:nvPr/>
+        </p:nvSpPr>
+        <p:spPr>
+          <a:xfrm>
+            <a:off x="594360" y="2935224"/>
+            <a:ext cx="3977639" cy="384048"/>
+          </a:xfrm>
+          <a:prstGeom prst="rect">
+            <a:avLst/>
+          </a:prstGeom>
+          <a:noFill/>
+        </p:spPr>
+        <p:txBody>
+          <a:bodyPr wrap="square">
+            <a:spAutoFit/>
+          </a:bodyPr>
+          <a:lstStyle/>
+          <a:p>
+            <a:pPr>
+              <a:defRPr sz="1400" b="0">
+                <a:solidFill>
+                  <a:srgbClr val="EBF2FA"/>
+                </a:solidFill>
+              </a:defRPr>
+            </a:pPr>
+            <a:r>
+              <a:t>Synthetic • Spark local[1]/[2]</a:t>
+            </a:r>
+          </a:p>
+        </p:txBody>
+      </p:sp>
+      <p:sp>
+        <p:nvSpPr>
+          <p:cNvPr id="16" name="TextBox 15"/>
+          <p:cNvSpPr txBox="1"/>
+          <p:nvPr/>
+        </p:nvSpPr>
+        <p:spPr>
+          <a:xfrm>
+            <a:off x="4736592" y="2935224"/>
+            <a:ext cx="1325880" cy="384048"/>
+          </a:xfrm>
+          <a:prstGeom prst="rect">
+            <a:avLst/>
+          </a:prstGeom>
+          <a:noFill/>
+        </p:spPr>
+        <p:txBody>
+          <a:bodyPr wrap="square">
+            <a:spAutoFit/>
+          </a:bodyPr>
+          <a:lstStyle/>
+          <a:p>
+            <a:pPr>
+              <a:defRPr sz="1400" b="0">
+                <a:solidFill>
+                  <a:srgbClr val="EBF2FA"/>
+                </a:solidFill>
+              </a:defRPr>
+            </a:pPr>
+            <a:r>
+              <a:t>1,032.370</a:t>
+            </a:r>
+          </a:p>
+        </p:txBody>
+      </p:sp>
+      <p:sp>
+        <p:nvSpPr>
+          <p:cNvPr id="17" name="TextBox 16"/>
+          <p:cNvSpPr txBox="1"/>
+          <p:nvPr/>
+        </p:nvSpPr>
+        <p:spPr>
+          <a:xfrm>
+            <a:off x="6446520" y="2935224"/>
+            <a:ext cx="1005840" cy="384048"/>
+          </a:xfrm>
+          <a:prstGeom prst="rect">
+            <a:avLst/>
+          </a:prstGeom>
+          <a:noFill/>
+        </p:spPr>
+        <p:txBody>
+          <a:bodyPr wrap="square">
+            <a:spAutoFit/>
+          </a:bodyPr>
+          <a:lstStyle/>
+          <a:p>
+            <a:pPr>
+              <a:defRPr sz="1400" b="0">
+                <a:solidFill>
+                  <a:srgbClr val="EBF2FA"/>
+                </a:solidFill>
+              </a:defRPr>
+            </a:pPr>
+            <a:r>
+              <a:t>1.000</a:t>
+            </a:r>
+          </a:p>
+        </p:txBody>
+      </p:sp>
+      <p:sp>
+        <p:nvSpPr>
+          <p:cNvPr id="18" name="TextBox 17"/>
+          <p:cNvSpPr txBox="1"/>
+          <p:nvPr/>
+        </p:nvSpPr>
+        <p:spPr>
+          <a:xfrm>
+            <a:off x="7772400" y="2935224"/>
+            <a:ext cx="914400" cy="384048"/>
+          </a:xfrm>
+          <a:prstGeom prst="rect">
+            <a:avLst/>
+          </a:prstGeom>
+          <a:noFill/>
+        </p:spPr>
+        <p:txBody>
+          <a:bodyPr wrap="square">
+            <a:spAutoFit/>
+          </a:bodyPr>
+          <a:lstStyle/>
+          <a:p>
+            <a:pPr>
+              <a:defRPr sz="1400" b="0">
+                <a:solidFill>
+                  <a:srgbClr val="EBF2FA"/>
+                </a:solidFill>
+              </a:defRPr>
+            </a:pPr>
+            <a:r>
+              <a:t>1.000</a:t>
+            </a:r>
+          </a:p>
+        </p:txBody>
+      </p:sp>
+      <p:sp>
+        <p:nvSpPr>
+          <p:cNvPr id="19" name="TextBox 18"/>
+          <p:cNvSpPr txBox="1"/>
+          <p:nvPr/>
+        </p:nvSpPr>
+        <p:spPr>
+          <a:xfrm>
+            <a:off x="8997696" y="2935224"/>
+            <a:ext cx="914400" cy="384048"/>
+          </a:xfrm>
+          <a:prstGeom prst="rect">
+            <a:avLst/>
+          </a:prstGeom>
+          <a:noFill/>
+        </p:spPr>
+        <p:txBody>
+          <a:bodyPr wrap="square">
+            <a:spAutoFit/>
+          </a:bodyPr>
+          <a:lstStyle/>
+          <a:p>
+            <a:pPr>
+              <a:defRPr sz="1400" b="0">
+                <a:solidFill>
+                  <a:srgbClr val="EBF2FA"/>
+                </a:solidFill>
+              </a:defRPr>
+            </a:pPr>
+            <a:r>
+              <a:t>1.000</a:t>
+            </a:r>
+          </a:p>
+        </p:txBody>
+      </p:sp>
+      <p:sp>
+        <p:nvSpPr>
+          <p:cNvPr id="20" name="TextBox 19"/>
+          <p:cNvSpPr txBox="1"/>
+          <p:nvPr/>
+        </p:nvSpPr>
+        <p:spPr>
+          <a:xfrm>
+            <a:off x="594360" y="3374136"/>
+            <a:ext cx="3977639" cy="384048"/>
+          </a:xfrm>
+          <a:prstGeom prst="rect">
+            <a:avLst/>
+          </a:prstGeom>
+          <a:noFill/>
+        </p:spPr>
+        <p:txBody>
+          <a:bodyPr wrap="square">
+            <a:spAutoFit/>
+          </a:bodyPr>
+          <a:lstStyle/>
+          <a:p>
+            <a:pPr>
+              <a:defRPr sz="1400" b="0">
+                <a:solidFill>
+                  <a:srgbClr val="EBF2FA"/>
+                </a:solidFill>
+              </a:defRPr>
+            </a:pPr>
+            <a:r>
+              <a:t>KDD99 • Traditional</a:t>
+            </a:r>
+          </a:p>
+        </p:txBody>
+      </p:sp>
+      <p:sp>
+        <p:nvSpPr>
+          <p:cNvPr id="21" name="TextBox 20"/>
+          <p:cNvSpPr txBox="1"/>
+          <p:nvPr/>
+        </p:nvSpPr>
+        <p:spPr>
+          <a:xfrm>
+            <a:off x="4736592" y="3374136"/>
+            <a:ext cx="1325880" cy="384048"/>
+          </a:xfrm>
+          <a:prstGeom prst="rect">
+            <a:avLst/>
+          </a:prstGeom>
+          <a:noFill/>
+        </p:spPr>
+        <p:txBody>
+          <a:bodyPr wrap="square">
+            <a:spAutoFit/>
+          </a:bodyPr>
+          <a:lstStyle/>
+          <a:p>
+            <a:pPr>
+              <a:defRPr sz="1400" b="0">
+                <a:solidFill>
+                  <a:srgbClr val="EBF2FA"/>
+                </a:solidFill>
+              </a:defRPr>
+            </a:pPr>
+            <a:r>
+              <a:t>9,342.830</a:t>
+            </a:r>
+          </a:p>
+        </p:txBody>
+      </p:sp>
+      <p:sp>
+        <p:nvSpPr>
+          <p:cNvPr id="22" name="TextBox 21"/>
+          <p:cNvSpPr txBox="1"/>
+          <p:nvPr/>
+        </p:nvSpPr>
+        <p:spPr>
+          <a:xfrm>
+            <a:off x="6446520" y="3374136"/>
+            <a:ext cx="1005840" cy="384048"/>
+          </a:xfrm>
+          <a:prstGeom prst="rect">
+            <a:avLst/>
+          </a:prstGeom>
+          <a:noFill/>
+        </p:spPr>
+        <p:txBody>
+          <a:bodyPr wrap="square">
+            <a:spAutoFit/>
+          </a:bodyPr>
+          <a:lstStyle/>
+          <a:p>
+            <a:pPr>
+              <a:defRPr sz="1400" b="0">
+                <a:solidFill>
+                  <a:srgbClr val="EBF2FA"/>
+                </a:solidFill>
+              </a:defRPr>
+            </a:pPr>
+            <a:r>
+              <a:t>0.975</a:t>
+            </a:r>
+          </a:p>
+        </p:txBody>
+      </p:sp>
+      <p:sp>
+        <p:nvSpPr>
+          <p:cNvPr id="23" name="TextBox 22"/>
+          <p:cNvSpPr txBox="1"/>
+          <p:nvPr/>
+        </p:nvSpPr>
+        <p:spPr>
+          <a:xfrm>
+            <a:off x="7772400" y="3374136"/>
+            <a:ext cx="914400" cy="384048"/>
+          </a:xfrm>
+          <a:prstGeom prst="rect">
+            <a:avLst/>
+          </a:prstGeom>
+          <a:noFill/>
+        </p:spPr>
+        <p:txBody>
+          <a:bodyPr wrap="square">
+            <a:spAutoFit/>
+          </a:bodyPr>
+          <a:lstStyle/>
+          <a:p>
+            <a:pPr>
+              <a:defRPr sz="1400" b="0">
+                <a:solidFill>
+                  <a:srgbClr val="EBF2FA"/>
+                </a:solidFill>
+              </a:defRPr>
+            </a:pPr>
+            <a:r>
+              <a:t>0.432</a:t>
+            </a:r>
+          </a:p>
+        </p:txBody>
+      </p:sp>
+      <p:sp>
+        <p:nvSpPr>
+          <p:cNvPr id="24" name="TextBox 23"/>
+          <p:cNvSpPr txBox="1"/>
+          <p:nvPr/>
+        </p:nvSpPr>
+        <p:spPr>
+          <a:xfrm>
+            <a:off x="8997696" y="3374136"/>
+            <a:ext cx="914400" cy="384048"/>
+          </a:xfrm>
+          <a:prstGeom prst="rect">
+            <a:avLst/>
+          </a:prstGeom>
+          <a:noFill/>
+        </p:spPr>
+        <p:txBody>
+          <a:bodyPr wrap="square">
+            <a:spAutoFit/>
+          </a:bodyPr>
+          <a:lstStyle/>
+          <a:p>
+            <a:pPr>
+              <a:defRPr sz="1400" b="0">
+                <a:solidFill>
+                  <a:srgbClr val="EBF2FA"/>
+                </a:solidFill>
+              </a:defRPr>
+            </a:pPr>
+            <a:r>
+              <a:t>0.535</a:t>
+            </a:r>
+          </a:p>
+        </p:txBody>
+      </p:sp>
+      <p:sp>
+        <p:nvSpPr>
+          <p:cNvPr id="25" name="TextBox 24"/>
+          <p:cNvSpPr txBox="1"/>
+          <p:nvPr/>
+        </p:nvSpPr>
+        <p:spPr>
+          <a:xfrm>
+            <a:off x="594360" y="3813048"/>
+            <a:ext cx="3977639" cy="384048"/>
+          </a:xfrm>
+          <a:prstGeom prst="rect">
+            <a:avLst/>
+          </a:prstGeom>
+          <a:noFill/>
+        </p:spPr>
+        <p:txBody>
+          <a:bodyPr wrap="square">
+            <a:spAutoFit/>
+          </a:bodyPr>
+          <a:lstStyle/>
+          <a:p>
+            <a:pPr>
+              <a:defRPr sz="1400" b="0">
+                <a:solidFill>
+                  <a:srgbClr val="EBF2FA"/>
+                </a:solidFill>
+              </a:defRPr>
+            </a:pPr>
+            <a:r>
+              <a:t>KDD99 • Spark local[1]/[2]</a:t>
+            </a:r>
+          </a:p>
+        </p:txBody>
+      </p:sp>
+      <p:sp>
+        <p:nvSpPr>
+          <p:cNvPr id="26" name="TextBox 25"/>
+          <p:cNvSpPr txBox="1"/>
+          <p:nvPr/>
+        </p:nvSpPr>
+        <p:spPr>
+          <a:xfrm>
+            <a:off x="4736592" y="3813048"/>
+            <a:ext cx="1325880" cy="384048"/>
+          </a:xfrm>
+          <a:prstGeom prst="rect">
+            <a:avLst/>
+          </a:prstGeom>
+          <a:noFill/>
+        </p:spPr>
+        <p:txBody>
+          <a:bodyPr wrap="square">
+            <a:spAutoFit/>
+          </a:bodyPr>
+          <a:lstStyle/>
+          <a:p>
+            <a:pPr>
+              <a:defRPr sz="1400" b="0">
+                <a:solidFill>
+                  <a:srgbClr val="EBF2FA"/>
+                </a:solidFill>
+              </a:defRPr>
+            </a:pPr>
+            <a:r>
+              <a:t>21,072.555</a:t>
+            </a:r>
+          </a:p>
+        </p:txBody>
+      </p:sp>
+      <p:sp>
+        <p:nvSpPr>
+          <p:cNvPr id="27" name="TextBox 26"/>
+          <p:cNvSpPr txBox="1"/>
+          <p:nvPr/>
+        </p:nvSpPr>
+        <p:spPr>
+          <a:xfrm>
+            <a:off x="6446520" y="3813048"/>
+            <a:ext cx="1005840" cy="384048"/>
+          </a:xfrm>
+          <a:prstGeom prst="rect">
+            <a:avLst/>
+          </a:prstGeom>
+          <a:noFill/>
+        </p:spPr>
+        <p:txBody>
+          <a:bodyPr wrap="square">
+            <a:spAutoFit/>
+          </a:bodyPr>
+          <a:lstStyle/>
+          <a:p>
+            <a:pPr>
+              <a:defRPr sz="1400" b="0">
+                <a:solidFill>
+                  <a:srgbClr val="EBF2FA"/>
+                </a:solidFill>
+              </a:defRPr>
+            </a:pPr>
+            <a:r>
+              <a:t>0.797</a:t>
+            </a:r>
+          </a:p>
+        </p:txBody>
+      </p:sp>
+      <p:sp>
+        <p:nvSpPr>
+          <p:cNvPr id="28" name="TextBox 27"/>
+          <p:cNvSpPr txBox="1"/>
+          <p:nvPr/>
+        </p:nvSpPr>
+        <p:spPr>
+          <a:xfrm>
+            <a:off x="7772400" y="3813048"/>
+            <a:ext cx="914400" cy="384048"/>
+          </a:xfrm>
+          <a:prstGeom prst="rect">
+            <a:avLst/>
+          </a:prstGeom>
+          <a:noFill/>
+        </p:spPr>
+        <p:txBody>
+          <a:bodyPr wrap="square">
+            <a:spAutoFit/>
+          </a:bodyPr>
+          <a:lstStyle/>
+          <a:p>
+            <a:pPr>
+              <a:defRPr sz="1400" b="0">
+                <a:solidFill>
+                  <a:srgbClr val="EBF2FA"/>
+                </a:solidFill>
+              </a:defRPr>
+            </a:pPr>
+            <a:r>
+              <a:t>-0.005</a:t>
+            </a:r>
+          </a:p>
+        </p:txBody>
+      </p:sp>
+      <p:sp>
+        <p:nvSpPr>
+          <p:cNvPr id="29" name="TextBox 28"/>
+          <p:cNvSpPr txBox="1"/>
+          <p:nvPr/>
+        </p:nvSpPr>
+        <p:spPr>
+          <a:xfrm>
+            <a:off x="8997696" y="3813048"/>
+            <a:ext cx="914400" cy="384048"/>
+          </a:xfrm>
+          <a:prstGeom prst="rect">
+            <a:avLst/>
+          </a:prstGeom>
+          <a:noFill/>
+        </p:spPr>
+        <p:txBody>
+          <a:bodyPr wrap="square">
+            <a:spAutoFit/>
+          </a:bodyPr>
+          <a:lstStyle/>
+          <a:p>
+            <a:pPr>
+              <a:defRPr sz="1400" b="0">
+                <a:solidFill>
+                  <a:srgbClr val="EBF2FA"/>
+                </a:solidFill>
+              </a:defRPr>
+            </a:pPr>
+            <a:r>
+              <a:t>0.011</a:t>
+            </a:r>
+          </a:p>
+        </p:txBody>
+      </p:sp>
+      <p:sp>
+        <p:nvSpPr>
+          <p:cNvPr id="30" name="TextBox 29"/>
+          <p:cNvSpPr txBox="1"/>
+          <p:nvPr/>
+        </p:nvSpPr>
+        <p:spPr>
+          <a:xfrm>
+            <a:off x="594360" y="4498848"/>
+            <a:ext cx="11094720" cy="411480"/>
+          </a:xfrm>
+          <a:prstGeom prst="rect">
+            <a:avLst/>
+          </a:prstGeom>
+          <a:noFill/>
+        </p:spPr>
+        <p:txBody>
+          <a:bodyPr wrap="square">
+            <a:spAutoFit/>
+          </a:bodyPr>
+          <a:lstStyle/>
+          <a:p>
+            <a:pPr>
+              <a:defRPr sz="1500" b="1">
+                <a:solidFill>
+                  <a:srgbClr val="5BCCE6"/>
+                </a:solidFill>
+              </a:defRPr>
+            </a:pPr>
+            <a:r>
+              <a:t>All four Spark runs passed independent SSE, assignment, and cluster-count checks.</a:t>
+            </a:r>
+          </a:p>
+        </p:txBody>
+      </p:sp>
+      <p:sp>
+        <p:nvSpPr>
+          <p:cNvPr id="31" name="TextBox 30"/>
+          <p:cNvSpPr txBox="1"/>
+          <p:nvPr/>
+        </p:nvSpPr>
+        <p:spPr>
+          <a:xfrm>
+            <a:off x="594360" y="5010912"/>
+            <a:ext cx="11094720" cy="960120"/>
+          </a:xfrm>
+          <a:prstGeom prst="rect">
+            <a:avLst/>
+          </a:prstGeom>
+          <a:noFill/>
+        </p:spPr>
+        <p:txBody>
+          <a:bodyPr wrap="square">
+            <a:spAutoFit/>
+          </a:bodyPr>
+          <a:lstStyle/>
+          <a:p>
+            <a:pPr>
+              <a:defRPr sz="1400" b="0">
+                <a:solidFill>
+                  <a:srgbClr val="EBF2FA"/>
+                </a:solidFill>
+              </a:defRPr>
+            </a:pPr>
+            <a:r>
+              <a:t>KDD99 purity 0.797 is near the 0.795 majority-class reference. This five-cluster check is separate from the earlier four-cluster, 42-run controlled study. Spark local[n] uses one computer.</a:t>
             </a:r>
           </a:p>
         </p:txBody>

--- a/docs/final_submission/Group7_Parallel_KMeans_Final_Presentation.pptx
+++ b/docs/final_submission/Group7_Parallel_KMeans_Final_Presentation.pptx
@@ -4566,7 +4566,7 @@
           <a:lstStyle/>
           <a:p>
             <a:r>
-              <a:t>01 / 23</a:t>
+              <a:t>01 / 24</a:t>
             </a:r>
           </a:p>
         </p:txBody>
@@ -5492,7 +5492,7 @@
               </a:defRPr>
             </a:pPr>
             <a:r>
-              <a:t>10 / 23</a:t>
+              <a:t>10 / 24</a:t>
             </a:r>
           </a:p>
         </p:txBody>
@@ -6255,7 +6255,7 @@
               </a:defRPr>
             </a:pPr>
             <a:r>
-              <a:t>11 / 23</a:t>
+              <a:t>11 / 24</a:t>
             </a:r>
           </a:p>
         </p:txBody>
@@ -6864,7 +6864,7 @@
               </a:defRPr>
             </a:pPr>
             <a:r>
-              <a:t>12 / 23</a:t>
+              <a:t>12 / 24</a:t>
             </a:r>
           </a:p>
         </p:txBody>
@@ -7169,7 +7169,7 @@
           <a:lstStyle/>
           <a:p>
             <a:r>
-              <a:t>13 / 23</a:t>
+              <a:t>13 / 24</a:t>
             </a:r>
           </a:p>
         </p:txBody>
@@ -7585,7 +7585,7 @@
           <a:lstStyle/>
           <a:p>
             <a:r>
-              <a:t>14 / 23</a:t>
+              <a:t>14 / 24</a:t>
             </a:r>
           </a:p>
         </p:txBody>
@@ -8001,7 +8001,7 @@
           <a:lstStyle/>
           <a:p>
             <a:r>
-              <a:t>15 / 23</a:t>
+              <a:t>15 / 24</a:t>
             </a:r>
           </a:p>
         </p:txBody>
@@ -8875,7 +8875,7 @@
               </a:defRPr>
             </a:pPr>
             <a:r>
-              <a:t>16 / 23</a:t>
+              <a:t>16 / 24</a:t>
             </a:r>
           </a:p>
         </p:txBody>
@@ -9180,7 +9180,7 @@
           <a:lstStyle/>
           <a:p>
             <a:r>
-              <a:t>17 / 23</a:t>
+              <a:t>17 / 24</a:t>
             </a:r>
           </a:p>
         </p:txBody>
@@ -9596,7 +9596,7 @@
           <a:lstStyle/>
           <a:p>
             <a:r>
-              <a:t>18 / 23</a:t>
+              <a:t>18 / 24</a:t>
             </a:r>
           </a:p>
         </p:txBody>
@@ -11218,7 +11218,7 @@
           <a:lstStyle/>
           <a:p>
             <a:r>
-              <a:t>19 / 23</a:t>
+              <a:t>19 / 24</a:t>
             </a:r>
           </a:p>
         </p:txBody>
@@ -12118,7 +12118,7 @@
           <a:lstStyle/>
           <a:p>
             <a:r>
-              <a:t>02 / 23</a:t>
+              <a:t>02 / 24</a:t>
             </a:r>
           </a:p>
         </p:txBody>
@@ -13391,7 +13391,7 @@
               </a:defRPr>
             </a:pPr>
             <a:r>
-              <a:t>20 / 23</a:t>
+              <a:t>20 / 24</a:t>
             </a:r>
           </a:p>
         </p:txBody>
@@ -13646,7 +13646,7 @@
           <a:lstStyle/>
           <a:p>
             <a:r>
-              <a:t>21 / 23</a:t>
+              <a:t>21 / 24</a:t>
             </a:r>
           </a:p>
         </p:txBody>
@@ -15116,7 +15116,7 @@
               </a:defRPr>
             </a:pPr>
             <a:r>
-              <a:t>22 / 23</a:t>
+              <a:t>22 / 24</a:t>
             </a:r>
           </a:p>
         </p:txBody>
@@ -15130,6 +15130,1154 @@
 </file>
 
 <file path=ppt/slides/slide23.xml><?xml version="1.0" encoding="utf-8"?>
+<p:sld xmlns:a="http://schemas.openxmlformats.org/drawingml/2006/main" xmlns:p="http://schemas.openxmlformats.org/presentationml/2006/main" xmlns:r="http://schemas.openxmlformats.org/officeDocument/2006/relationships">
+  <p:cSld>
+    <p:bg>
+      <p:bgPr>
+        <a:solidFill>
+          <a:srgbClr val="0D192D"/>
+        </a:solidFill>
+        <a:effectLst/>
+      </p:bgPr>
+    </p:bg>
+    <p:spTree>
+      <p:nvGrpSpPr>
+        <p:cNvPr id="1" name=""/>
+        <p:cNvGrpSpPr/>
+        <p:nvPr/>
+      </p:nvGrpSpPr>
+      <p:grpSpPr/>
+      <p:sp>
+        <p:nvSpPr>
+          <p:cNvPr id="2" name="TextBox 1"/>
+          <p:cNvSpPr txBox="1"/>
+          <p:nvPr/>
+        </p:nvSpPr>
+        <p:spPr>
+          <a:xfrm>
+            <a:off x="594360" y="347472"/>
+            <a:ext cx="11003280" cy="329184"/>
+          </a:xfrm>
+          <a:prstGeom prst="rect">
+            <a:avLst/>
+          </a:prstGeom>
+          <a:noFill/>
+        </p:spPr>
+        <p:txBody>
+          <a:bodyPr wrap="square">
+            <a:spAutoFit/>
+          </a:bodyPr>
+          <a:lstStyle/>
+          <a:p>
+            <a:pPr>
+              <a:defRPr sz="1400" b="1">
+                <a:solidFill>
+                  <a:srgbClr val="5BCCE6"/>
+                </a:solidFill>
+              </a:defRPr>
+            </a:pPr>
+            <a:r>
+              <a:t>SUPPLEMENTARY VERIFICATION</a:t>
+            </a:r>
+          </a:p>
+        </p:txBody>
+      </p:sp>
+      <p:sp>
+        <p:nvSpPr>
+          <p:cNvPr id="3" name="TextBox 2"/>
+          <p:cNvSpPr txBox="1"/>
+          <p:nvPr/>
+        </p:nvSpPr>
+        <p:spPr>
+          <a:xfrm>
+            <a:off x="594360" y="822960"/>
+            <a:ext cx="11094720" cy="640080"/>
+          </a:xfrm>
+          <a:prstGeom prst="rect">
+            <a:avLst/>
+          </a:prstGeom>
+          <a:noFill/>
+        </p:spPr>
+        <p:txBody>
+          <a:bodyPr wrap="square">
+            <a:spAutoFit/>
+          </a:bodyPr>
+          <a:lstStyle/>
+          <a:p>
+            <a:pPr>
+              <a:defRPr sz="2700" b="1">
+                <a:solidFill>
+                  <a:srgbClr val="EBF2FA"/>
+                </a:solidFill>
+              </a:defRPr>
+            </a:pPr>
+            <a:r>
+              <a:t>Independent SSE &amp; cluster-quality checks</a:t>
+            </a:r>
+          </a:p>
+        </p:txBody>
+      </p:sp>
+      <p:sp>
+        <p:nvSpPr>
+          <p:cNvPr id="4" name="TextBox 3"/>
+          <p:cNvSpPr txBox="1"/>
+          <p:nvPr/>
+        </p:nvSpPr>
+        <p:spPr>
+          <a:xfrm>
+            <a:off x="594360" y="1527048"/>
+            <a:ext cx="11094720" cy="365760"/>
+          </a:xfrm>
+          <a:prstGeom prst="rect">
+            <a:avLst/>
+          </a:prstGeom>
+          <a:noFill/>
+        </p:spPr>
+        <p:txBody>
+          <a:bodyPr wrap="square">
+            <a:spAutoFit/>
+          </a:bodyPr>
+          <a:lstStyle/>
+          <a:p>
+            <a:pPr>
+              <a:defRPr sz="1600" b="0">
+                <a:solidFill>
+                  <a:srgbClr val="EBF2FA"/>
+                </a:solidFill>
+              </a:defRPr>
+            </a:pPr>
+            <a:r>
+              <a:t>1,000 records  •  2 partitions  •  seed 42  •  5 clusters</a:t>
+            </a:r>
+          </a:p>
+        </p:txBody>
+      </p:sp>
+      <p:sp>
+        <p:nvSpPr>
+          <p:cNvPr id="5" name="TextBox 4"/>
+          <p:cNvSpPr txBox="1"/>
+          <p:nvPr/>
+        </p:nvSpPr>
+        <p:spPr>
+          <a:xfrm>
+            <a:off x="594360" y="2057400"/>
+            <a:ext cx="3977639" cy="329184"/>
+          </a:xfrm>
+          <a:prstGeom prst="rect">
+            <a:avLst/>
+          </a:prstGeom>
+          <a:noFill/>
+        </p:spPr>
+        <p:txBody>
+          <a:bodyPr wrap="square">
+            <a:spAutoFit/>
+          </a:bodyPr>
+          <a:lstStyle/>
+          <a:p>
+            <a:pPr>
+              <a:defRPr sz="1500" b="1">
+                <a:solidFill>
+                  <a:srgbClr val="5BCCE6"/>
+                </a:solidFill>
+              </a:defRPr>
+            </a:pPr>
+            <a:r>
+              <a:t>Dataset / method</a:t>
+            </a:r>
+          </a:p>
+        </p:txBody>
+      </p:sp>
+      <p:sp>
+        <p:nvSpPr>
+          <p:cNvPr id="6" name="TextBox 5"/>
+          <p:cNvSpPr txBox="1"/>
+          <p:nvPr/>
+        </p:nvSpPr>
+        <p:spPr>
+          <a:xfrm>
+            <a:off x="4736592" y="2057400"/>
+            <a:ext cx="1325880" cy="329184"/>
+          </a:xfrm>
+          <a:prstGeom prst="rect">
+            <a:avLst/>
+          </a:prstGeom>
+          <a:noFill/>
+        </p:spPr>
+        <p:txBody>
+          <a:bodyPr wrap="square">
+            <a:spAutoFit/>
+          </a:bodyPr>
+          <a:lstStyle/>
+          <a:p>
+            <a:pPr>
+              <a:defRPr sz="1500" b="1">
+                <a:solidFill>
+                  <a:srgbClr val="5BCCE6"/>
+                </a:solidFill>
+              </a:defRPr>
+            </a:pPr>
+            <a:r>
+              <a:t>SSE</a:t>
+            </a:r>
+          </a:p>
+        </p:txBody>
+      </p:sp>
+      <p:sp>
+        <p:nvSpPr>
+          <p:cNvPr id="7" name="TextBox 6"/>
+          <p:cNvSpPr txBox="1"/>
+          <p:nvPr/>
+        </p:nvSpPr>
+        <p:spPr>
+          <a:xfrm>
+            <a:off x="6446520" y="2057400"/>
+            <a:ext cx="1005840" cy="329184"/>
+          </a:xfrm>
+          <a:prstGeom prst="rect">
+            <a:avLst/>
+          </a:prstGeom>
+          <a:noFill/>
+        </p:spPr>
+        <p:txBody>
+          <a:bodyPr wrap="square">
+            <a:spAutoFit/>
+          </a:bodyPr>
+          <a:lstStyle/>
+          <a:p>
+            <a:pPr>
+              <a:defRPr sz="1500" b="1">
+                <a:solidFill>
+                  <a:srgbClr val="5BCCE6"/>
+                </a:solidFill>
+              </a:defRPr>
+            </a:pPr>
+            <a:r>
+              <a:t>Purity</a:t>
+            </a:r>
+          </a:p>
+        </p:txBody>
+      </p:sp>
+      <p:sp>
+        <p:nvSpPr>
+          <p:cNvPr id="8" name="TextBox 7"/>
+          <p:cNvSpPr txBox="1"/>
+          <p:nvPr/>
+        </p:nvSpPr>
+        <p:spPr>
+          <a:xfrm>
+            <a:off x="7772400" y="2057400"/>
+            <a:ext cx="914400" cy="329184"/>
+          </a:xfrm>
+          <a:prstGeom prst="rect">
+            <a:avLst/>
+          </a:prstGeom>
+          <a:noFill/>
+        </p:spPr>
+        <p:txBody>
+          <a:bodyPr wrap="square">
+            <a:spAutoFit/>
+          </a:bodyPr>
+          <a:lstStyle/>
+          <a:p>
+            <a:pPr>
+              <a:defRPr sz="1500" b="1">
+                <a:solidFill>
+                  <a:srgbClr val="5BCCE6"/>
+                </a:solidFill>
+              </a:defRPr>
+            </a:pPr>
+            <a:r>
+              <a:t>ARI</a:t>
+            </a:r>
+          </a:p>
+        </p:txBody>
+      </p:sp>
+      <p:sp>
+        <p:nvSpPr>
+          <p:cNvPr id="9" name="TextBox 8"/>
+          <p:cNvSpPr txBox="1"/>
+          <p:nvPr/>
+        </p:nvSpPr>
+        <p:spPr>
+          <a:xfrm>
+            <a:off x="8997696" y="2057400"/>
+            <a:ext cx="914400" cy="329184"/>
+          </a:xfrm>
+          <a:prstGeom prst="rect">
+            <a:avLst/>
+          </a:prstGeom>
+          <a:noFill/>
+        </p:spPr>
+        <p:txBody>
+          <a:bodyPr wrap="square">
+            <a:spAutoFit/>
+          </a:bodyPr>
+          <a:lstStyle/>
+          <a:p>
+            <a:pPr>
+              <a:defRPr sz="1500" b="1">
+                <a:solidFill>
+                  <a:srgbClr val="5BCCE6"/>
+                </a:solidFill>
+              </a:defRPr>
+            </a:pPr>
+            <a:r>
+              <a:t>NMI</a:t>
+            </a:r>
+          </a:p>
+        </p:txBody>
+      </p:sp>
+      <p:sp>
+        <p:nvSpPr>
+          <p:cNvPr id="10" name="TextBox 9"/>
+          <p:cNvSpPr txBox="1"/>
+          <p:nvPr/>
+        </p:nvSpPr>
+        <p:spPr>
+          <a:xfrm>
+            <a:off x="594360" y="2496312"/>
+            <a:ext cx="3977639" cy="384048"/>
+          </a:xfrm>
+          <a:prstGeom prst="rect">
+            <a:avLst/>
+          </a:prstGeom>
+          <a:noFill/>
+        </p:spPr>
+        <p:txBody>
+          <a:bodyPr wrap="square">
+            <a:spAutoFit/>
+          </a:bodyPr>
+          <a:lstStyle/>
+          <a:p>
+            <a:pPr>
+              <a:defRPr sz="1400" b="0">
+                <a:solidFill>
+                  <a:srgbClr val="EBF2FA"/>
+                </a:solidFill>
+              </a:defRPr>
+            </a:pPr>
+            <a:r>
+              <a:t>Synthetic • Traditional</a:t>
+            </a:r>
+          </a:p>
+        </p:txBody>
+      </p:sp>
+      <p:sp>
+        <p:nvSpPr>
+          <p:cNvPr id="11" name="TextBox 10"/>
+          <p:cNvSpPr txBox="1"/>
+          <p:nvPr/>
+        </p:nvSpPr>
+        <p:spPr>
+          <a:xfrm>
+            <a:off x="4736592" y="2496312"/>
+            <a:ext cx="1325880" cy="384048"/>
+          </a:xfrm>
+          <a:prstGeom prst="rect">
+            <a:avLst/>
+          </a:prstGeom>
+          <a:noFill/>
+        </p:spPr>
+        <p:txBody>
+          <a:bodyPr wrap="square">
+            <a:spAutoFit/>
+          </a:bodyPr>
+          <a:lstStyle/>
+          <a:p>
+            <a:pPr>
+              <a:defRPr sz="1400" b="0">
+                <a:solidFill>
+                  <a:srgbClr val="EBF2FA"/>
+                </a:solidFill>
+              </a:defRPr>
+            </a:pPr>
+            <a:r>
+              <a:t>1,032.370</a:t>
+            </a:r>
+          </a:p>
+        </p:txBody>
+      </p:sp>
+      <p:sp>
+        <p:nvSpPr>
+          <p:cNvPr id="12" name="TextBox 11"/>
+          <p:cNvSpPr txBox="1"/>
+          <p:nvPr/>
+        </p:nvSpPr>
+        <p:spPr>
+          <a:xfrm>
+            <a:off x="6446520" y="2496312"/>
+            <a:ext cx="1005840" cy="384048"/>
+          </a:xfrm>
+          <a:prstGeom prst="rect">
+            <a:avLst/>
+          </a:prstGeom>
+          <a:noFill/>
+        </p:spPr>
+        <p:txBody>
+          <a:bodyPr wrap="square">
+            <a:spAutoFit/>
+          </a:bodyPr>
+          <a:lstStyle/>
+          <a:p>
+            <a:pPr>
+              <a:defRPr sz="1400" b="0">
+                <a:solidFill>
+                  <a:srgbClr val="EBF2FA"/>
+                </a:solidFill>
+              </a:defRPr>
+            </a:pPr>
+            <a:r>
+              <a:t>1.000</a:t>
+            </a:r>
+          </a:p>
+        </p:txBody>
+      </p:sp>
+      <p:sp>
+        <p:nvSpPr>
+          <p:cNvPr id="13" name="TextBox 12"/>
+          <p:cNvSpPr txBox="1"/>
+          <p:nvPr/>
+        </p:nvSpPr>
+        <p:spPr>
+          <a:xfrm>
+            <a:off x="7772400" y="2496312"/>
+            <a:ext cx="914400" cy="384048"/>
+          </a:xfrm>
+          <a:prstGeom prst="rect">
+            <a:avLst/>
+          </a:prstGeom>
+          <a:noFill/>
+        </p:spPr>
+        <p:txBody>
+          <a:bodyPr wrap="square">
+            <a:spAutoFit/>
+          </a:bodyPr>
+          <a:lstStyle/>
+          <a:p>
+            <a:pPr>
+              <a:defRPr sz="1400" b="0">
+                <a:solidFill>
+                  <a:srgbClr val="EBF2FA"/>
+                </a:solidFill>
+              </a:defRPr>
+            </a:pPr>
+            <a:r>
+              <a:t>1.000</a:t>
+            </a:r>
+          </a:p>
+        </p:txBody>
+      </p:sp>
+      <p:sp>
+        <p:nvSpPr>
+          <p:cNvPr id="14" name="TextBox 13"/>
+          <p:cNvSpPr txBox="1"/>
+          <p:nvPr/>
+        </p:nvSpPr>
+        <p:spPr>
+          <a:xfrm>
+            <a:off x="8997696" y="2496312"/>
+            <a:ext cx="914400" cy="384048"/>
+          </a:xfrm>
+          <a:prstGeom prst="rect">
+            <a:avLst/>
+          </a:prstGeom>
+          <a:noFill/>
+        </p:spPr>
+        <p:txBody>
+          <a:bodyPr wrap="square">
+            <a:spAutoFit/>
+          </a:bodyPr>
+          <a:lstStyle/>
+          <a:p>
+            <a:pPr>
+              <a:defRPr sz="1400" b="0">
+                <a:solidFill>
+                  <a:srgbClr val="EBF2FA"/>
+                </a:solidFill>
+              </a:defRPr>
+            </a:pPr>
+            <a:r>
+              <a:t>1.000</a:t>
+            </a:r>
+          </a:p>
+        </p:txBody>
+      </p:sp>
+      <p:sp>
+        <p:nvSpPr>
+          <p:cNvPr id="15" name="TextBox 14"/>
+          <p:cNvSpPr txBox="1"/>
+          <p:nvPr/>
+        </p:nvSpPr>
+        <p:spPr>
+          <a:xfrm>
+            <a:off x="594360" y="2935224"/>
+            <a:ext cx="3977639" cy="384048"/>
+          </a:xfrm>
+          <a:prstGeom prst="rect">
+            <a:avLst/>
+          </a:prstGeom>
+          <a:noFill/>
+        </p:spPr>
+        <p:txBody>
+          <a:bodyPr wrap="square">
+            <a:spAutoFit/>
+          </a:bodyPr>
+          <a:lstStyle/>
+          <a:p>
+            <a:pPr>
+              <a:defRPr sz="1400" b="0">
+                <a:solidFill>
+                  <a:srgbClr val="EBF2FA"/>
+                </a:solidFill>
+              </a:defRPr>
+            </a:pPr>
+            <a:r>
+              <a:t>Synthetic • Spark local[1]/[2]</a:t>
+            </a:r>
+          </a:p>
+        </p:txBody>
+      </p:sp>
+      <p:sp>
+        <p:nvSpPr>
+          <p:cNvPr id="16" name="TextBox 15"/>
+          <p:cNvSpPr txBox="1"/>
+          <p:nvPr/>
+        </p:nvSpPr>
+        <p:spPr>
+          <a:xfrm>
+            <a:off x="4736592" y="2935224"/>
+            <a:ext cx="1325880" cy="384048"/>
+          </a:xfrm>
+          <a:prstGeom prst="rect">
+            <a:avLst/>
+          </a:prstGeom>
+          <a:noFill/>
+        </p:spPr>
+        <p:txBody>
+          <a:bodyPr wrap="square">
+            <a:spAutoFit/>
+          </a:bodyPr>
+          <a:lstStyle/>
+          <a:p>
+            <a:pPr>
+              <a:defRPr sz="1400" b="0">
+                <a:solidFill>
+                  <a:srgbClr val="EBF2FA"/>
+                </a:solidFill>
+              </a:defRPr>
+            </a:pPr>
+            <a:r>
+              <a:t>1,032.370</a:t>
+            </a:r>
+          </a:p>
+        </p:txBody>
+      </p:sp>
+      <p:sp>
+        <p:nvSpPr>
+          <p:cNvPr id="17" name="TextBox 16"/>
+          <p:cNvSpPr txBox="1"/>
+          <p:nvPr/>
+        </p:nvSpPr>
+        <p:spPr>
+          <a:xfrm>
+            <a:off x="6446520" y="2935224"/>
+            <a:ext cx="1005840" cy="384048"/>
+          </a:xfrm>
+          <a:prstGeom prst="rect">
+            <a:avLst/>
+          </a:prstGeom>
+          <a:noFill/>
+        </p:spPr>
+        <p:txBody>
+          <a:bodyPr wrap="square">
+            <a:spAutoFit/>
+          </a:bodyPr>
+          <a:lstStyle/>
+          <a:p>
+            <a:pPr>
+              <a:defRPr sz="1400" b="0">
+                <a:solidFill>
+                  <a:srgbClr val="EBF2FA"/>
+                </a:solidFill>
+              </a:defRPr>
+            </a:pPr>
+            <a:r>
+              <a:t>1.000</a:t>
+            </a:r>
+          </a:p>
+        </p:txBody>
+      </p:sp>
+      <p:sp>
+        <p:nvSpPr>
+          <p:cNvPr id="18" name="TextBox 17"/>
+          <p:cNvSpPr txBox="1"/>
+          <p:nvPr/>
+        </p:nvSpPr>
+        <p:spPr>
+          <a:xfrm>
+            <a:off x="7772400" y="2935224"/>
+            <a:ext cx="914400" cy="384048"/>
+          </a:xfrm>
+          <a:prstGeom prst="rect">
+            <a:avLst/>
+          </a:prstGeom>
+          <a:noFill/>
+        </p:spPr>
+        <p:txBody>
+          <a:bodyPr wrap="square">
+            <a:spAutoFit/>
+          </a:bodyPr>
+          <a:lstStyle/>
+          <a:p>
+            <a:pPr>
+              <a:defRPr sz="1400" b="0">
+                <a:solidFill>
+                  <a:srgbClr val="EBF2FA"/>
+                </a:solidFill>
+              </a:defRPr>
+            </a:pPr>
+            <a:r>
+              <a:t>1.000</a:t>
+            </a:r>
+          </a:p>
+        </p:txBody>
+      </p:sp>
+      <p:sp>
+        <p:nvSpPr>
+          <p:cNvPr id="19" name="TextBox 18"/>
+          <p:cNvSpPr txBox="1"/>
+          <p:nvPr/>
+        </p:nvSpPr>
+        <p:spPr>
+          <a:xfrm>
+            <a:off x="8997696" y="2935224"/>
+            <a:ext cx="914400" cy="384048"/>
+          </a:xfrm>
+          <a:prstGeom prst="rect">
+            <a:avLst/>
+          </a:prstGeom>
+          <a:noFill/>
+        </p:spPr>
+        <p:txBody>
+          <a:bodyPr wrap="square">
+            <a:spAutoFit/>
+          </a:bodyPr>
+          <a:lstStyle/>
+          <a:p>
+            <a:pPr>
+              <a:defRPr sz="1400" b="0">
+                <a:solidFill>
+                  <a:srgbClr val="EBF2FA"/>
+                </a:solidFill>
+              </a:defRPr>
+            </a:pPr>
+            <a:r>
+              <a:t>1.000</a:t>
+            </a:r>
+          </a:p>
+        </p:txBody>
+      </p:sp>
+      <p:sp>
+        <p:nvSpPr>
+          <p:cNvPr id="20" name="TextBox 19"/>
+          <p:cNvSpPr txBox="1"/>
+          <p:nvPr/>
+        </p:nvSpPr>
+        <p:spPr>
+          <a:xfrm>
+            <a:off x="594360" y="3374136"/>
+            <a:ext cx="3977639" cy="384048"/>
+          </a:xfrm>
+          <a:prstGeom prst="rect">
+            <a:avLst/>
+          </a:prstGeom>
+          <a:noFill/>
+        </p:spPr>
+        <p:txBody>
+          <a:bodyPr wrap="square">
+            <a:spAutoFit/>
+          </a:bodyPr>
+          <a:lstStyle/>
+          <a:p>
+            <a:pPr>
+              <a:defRPr sz="1400" b="0">
+                <a:solidFill>
+                  <a:srgbClr val="EBF2FA"/>
+                </a:solidFill>
+              </a:defRPr>
+            </a:pPr>
+            <a:r>
+              <a:t>KDD99 • Traditional</a:t>
+            </a:r>
+          </a:p>
+        </p:txBody>
+      </p:sp>
+      <p:sp>
+        <p:nvSpPr>
+          <p:cNvPr id="21" name="TextBox 20"/>
+          <p:cNvSpPr txBox="1"/>
+          <p:nvPr/>
+        </p:nvSpPr>
+        <p:spPr>
+          <a:xfrm>
+            <a:off x="4736592" y="3374136"/>
+            <a:ext cx="1325880" cy="384048"/>
+          </a:xfrm>
+          <a:prstGeom prst="rect">
+            <a:avLst/>
+          </a:prstGeom>
+          <a:noFill/>
+        </p:spPr>
+        <p:txBody>
+          <a:bodyPr wrap="square">
+            <a:spAutoFit/>
+          </a:bodyPr>
+          <a:lstStyle/>
+          <a:p>
+            <a:pPr>
+              <a:defRPr sz="1400" b="0">
+                <a:solidFill>
+                  <a:srgbClr val="EBF2FA"/>
+                </a:solidFill>
+              </a:defRPr>
+            </a:pPr>
+            <a:r>
+              <a:t>9,342.830</a:t>
+            </a:r>
+          </a:p>
+        </p:txBody>
+      </p:sp>
+      <p:sp>
+        <p:nvSpPr>
+          <p:cNvPr id="22" name="TextBox 21"/>
+          <p:cNvSpPr txBox="1"/>
+          <p:nvPr/>
+        </p:nvSpPr>
+        <p:spPr>
+          <a:xfrm>
+            <a:off x="6446520" y="3374136"/>
+            <a:ext cx="1005840" cy="384048"/>
+          </a:xfrm>
+          <a:prstGeom prst="rect">
+            <a:avLst/>
+          </a:prstGeom>
+          <a:noFill/>
+        </p:spPr>
+        <p:txBody>
+          <a:bodyPr wrap="square">
+            <a:spAutoFit/>
+          </a:bodyPr>
+          <a:lstStyle/>
+          <a:p>
+            <a:pPr>
+              <a:defRPr sz="1400" b="0">
+                <a:solidFill>
+                  <a:srgbClr val="EBF2FA"/>
+                </a:solidFill>
+              </a:defRPr>
+            </a:pPr>
+            <a:r>
+              <a:t>0.975</a:t>
+            </a:r>
+          </a:p>
+        </p:txBody>
+      </p:sp>
+      <p:sp>
+        <p:nvSpPr>
+          <p:cNvPr id="23" name="TextBox 22"/>
+          <p:cNvSpPr txBox="1"/>
+          <p:nvPr/>
+        </p:nvSpPr>
+        <p:spPr>
+          <a:xfrm>
+            <a:off x="7772400" y="3374136"/>
+            <a:ext cx="914400" cy="384048"/>
+          </a:xfrm>
+          <a:prstGeom prst="rect">
+            <a:avLst/>
+          </a:prstGeom>
+          <a:noFill/>
+        </p:spPr>
+        <p:txBody>
+          <a:bodyPr wrap="square">
+            <a:spAutoFit/>
+          </a:bodyPr>
+          <a:lstStyle/>
+          <a:p>
+            <a:pPr>
+              <a:defRPr sz="1400" b="0">
+                <a:solidFill>
+                  <a:srgbClr val="EBF2FA"/>
+                </a:solidFill>
+              </a:defRPr>
+            </a:pPr>
+            <a:r>
+              <a:t>0.432</a:t>
+            </a:r>
+          </a:p>
+        </p:txBody>
+      </p:sp>
+      <p:sp>
+        <p:nvSpPr>
+          <p:cNvPr id="24" name="TextBox 23"/>
+          <p:cNvSpPr txBox="1"/>
+          <p:nvPr/>
+        </p:nvSpPr>
+        <p:spPr>
+          <a:xfrm>
+            <a:off x="8997696" y="3374136"/>
+            <a:ext cx="914400" cy="384048"/>
+          </a:xfrm>
+          <a:prstGeom prst="rect">
+            <a:avLst/>
+          </a:prstGeom>
+          <a:noFill/>
+        </p:spPr>
+        <p:txBody>
+          <a:bodyPr wrap="square">
+            <a:spAutoFit/>
+          </a:bodyPr>
+          <a:lstStyle/>
+          <a:p>
+            <a:pPr>
+              <a:defRPr sz="1400" b="0">
+                <a:solidFill>
+                  <a:srgbClr val="EBF2FA"/>
+                </a:solidFill>
+              </a:defRPr>
+            </a:pPr>
+            <a:r>
+              <a:t>0.535</a:t>
+            </a:r>
+          </a:p>
+        </p:txBody>
+      </p:sp>
+      <p:sp>
+        <p:nvSpPr>
+          <p:cNvPr id="25" name="TextBox 24"/>
+          <p:cNvSpPr txBox="1"/>
+          <p:nvPr/>
+        </p:nvSpPr>
+        <p:spPr>
+          <a:xfrm>
+            <a:off x="594360" y="3813048"/>
+            <a:ext cx="3977639" cy="384048"/>
+          </a:xfrm>
+          <a:prstGeom prst="rect">
+            <a:avLst/>
+          </a:prstGeom>
+          <a:noFill/>
+        </p:spPr>
+        <p:txBody>
+          <a:bodyPr wrap="square">
+            <a:spAutoFit/>
+          </a:bodyPr>
+          <a:lstStyle/>
+          <a:p>
+            <a:pPr>
+              <a:defRPr sz="1400" b="0">
+                <a:solidFill>
+                  <a:srgbClr val="EBF2FA"/>
+                </a:solidFill>
+              </a:defRPr>
+            </a:pPr>
+            <a:r>
+              <a:t>KDD99 • Spark local[1]/[2]</a:t>
+            </a:r>
+          </a:p>
+        </p:txBody>
+      </p:sp>
+      <p:sp>
+        <p:nvSpPr>
+          <p:cNvPr id="26" name="TextBox 25"/>
+          <p:cNvSpPr txBox="1"/>
+          <p:nvPr/>
+        </p:nvSpPr>
+        <p:spPr>
+          <a:xfrm>
+            <a:off x="4736592" y="3813048"/>
+            <a:ext cx="1325880" cy="384048"/>
+          </a:xfrm>
+          <a:prstGeom prst="rect">
+            <a:avLst/>
+          </a:prstGeom>
+          <a:noFill/>
+        </p:spPr>
+        <p:txBody>
+          <a:bodyPr wrap="square">
+            <a:spAutoFit/>
+          </a:bodyPr>
+          <a:lstStyle/>
+          <a:p>
+            <a:pPr>
+              <a:defRPr sz="1400" b="0">
+                <a:solidFill>
+                  <a:srgbClr val="EBF2FA"/>
+                </a:solidFill>
+              </a:defRPr>
+            </a:pPr>
+            <a:r>
+              <a:t>21,072.555</a:t>
+            </a:r>
+          </a:p>
+        </p:txBody>
+      </p:sp>
+      <p:sp>
+        <p:nvSpPr>
+          <p:cNvPr id="27" name="TextBox 26"/>
+          <p:cNvSpPr txBox="1"/>
+          <p:nvPr/>
+        </p:nvSpPr>
+        <p:spPr>
+          <a:xfrm>
+            <a:off x="6446520" y="3813048"/>
+            <a:ext cx="1005840" cy="384048"/>
+          </a:xfrm>
+          <a:prstGeom prst="rect">
+            <a:avLst/>
+          </a:prstGeom>
+          <a:noFill/>
+        </p:spPr>
+        <p:txBody>
+          <a:bodyPr wrap="square">
+            <a:spAutoFit/>
+          </a:bodyPr>
+          <a:lstStyle/>
+          <a:p>
+            <a:pPr>
+              <a:defRPr sz="1400" b="0">
+                <a:solidFill>
+                  <a:srgbClr val="EBF2FA"/>
+                </a:solidFill>
+              </a:defRPr>
+            </a:pPr>
+            <a:r>
+              <a:t>0.797</a:t>
+            </a:r>
+          </a:p>
+        </p:txBody>
+      </p:sp>
+      <p:sp>
+        <p:nvSpPr>
+          <p:cNvPr id="28" name="TextBox 27"/>
+          <p:cNvSpPr txBox="1"/>
+          <p:nvPr/>
+        </p:nvSpPr>
+        <p:spPr>
+          <a:xfrm>
+            <a:off x="7772400" y="3813048"/>
+            <a:ext cx="914400" cy="384048"/>
+          </a:xfrm>
+          <a:prstGeom prst="rect">
+            <a:avLst/>
+          </a:prstGeom>
+          <a:noFill/>
+        </p:spPr>
+        <p:txBody>
+          <a:bodyPr wrap="square">
+            <a:spAutoFit/>
+          </a:bodyPr>
+          <a:lstStyle/>
+          <a:p>
+            <a:pPr>
+              <a:defRPr sz="1400" b="0">
+                <a:solidFill>
+                  <a:srgbClr val="EBF2FA"/>
+                </a:solidFill>
+              </a:defRPr>
+            </a:pPr>
+            <a:r>
+              <a:t>-0.005</a:t>
+            </a:r>
+          </a:p>
+        </p:txBody>
+      </p:sp>
+      <p:sp>
+        <p:nvSpPr>
+          <p:cNvPr id="29" name="TextBox 28"/>
+          <p:cNvSpPr txBox="1"/>
+          <p:nvPr/>
+        </p:nvSpPr>
+        <p:spPr>
+          <a:xfrm>
+            <a:off x="8997696" y="3813048"/>
+            <a:ext cx="914400" cy="384048"/>
+          </a:xfrm>
+          <a:prstGeom prst="rect">
+            <a:avLst/>
+          </a:prstGeom>
+          <a:noFill/>
+        </p:spPr>
+        <p:txBody>
+          <a:bodyPr wrap="square">
+            <a:spAutoFit/>
+          </a:bodyPr>
+          <a:lstStyle/>
+          <a:p>
+            <a:pPr>
+              <a:defRPr sz="1400" b="0">
+                <a:solidFill>
+                  <a:srgbClr val="EBF2FA"/>
+                </a:solidFill>
+              </a:defRPr>
+            </a:pPr>
+            <a:r>
+              <a:t>0.011</a:t>
+            </a:r>
+          </a:p>
+        </p:txBody>
+      </p:sp>
+      <p:sp>
+        <p:nvSpPr>
+          <p:cNvPr id="30" name="TextBox 29"/>
+          <p:cNvSpPr txBox="1"/>
+          <p:nvPr/>
+        </p:nvSpPr>
+        <p:spPr>
+          <a:xfrm>
+            <a:off x="594360" y="4498848"/>
+            <a:ext cx="11094720" cy="411480"/>
+          </a:xfrm>
+          <a:prstGeom prst="rect">
+            <a:avLst/>
+          </a:prstGeom>
+          <a:noFill/>
+        </p:spPr>
+        <p:txBody>
+          <a:bodyPr wrap="square">
+            <a:spAutoFit/>
+          </a:bodyPr>
+          <a:lstStyle/>
+          <a:p>
+            <a:pPr>
+              <a:defRPr sz="1500" b="1">
+                <a:solidFill>
+                  <a:srgbClr val="5BCCE6"/>
+                </a:solidFill>
+              </a:defRPr>
+            </a:pPr>
+            <a:r>
+              <a:t>All four Spark runs passed independent SSE, assignment, and cluster-count checks.</a:t>
+            </a:r>
+          </a:p>
+        </p:txBody>
+      </p:sp>
+      <p:sp>
+        <p:nvSpPr>
+          <p:cNvPr id="31" name="TextBox 30"/>
+          <p:cNvSpPr txBox="1"/>
+          <p:nvPr/>
+        </p:nvSpPr>
+        <p:spPr>
+          <a:xfrm>
+            <a:off x="594360" y="5010912"/>
+            <a:ext cx="11094720" cy="960120"/>
+          </a:xfrm>
+          <a:prstGeom prst="rect">
+            <a:avLst/>
+          </a:prstGeom>
+          <a:noFill/>
+        </p:spPr>
+        <p:txBody>
+          <a:bodyPr wrap="square">
+            <a:spAutoFit/>
+          </a:bodyPr>
+          <a:lstStyle/>
+          <a:p>
+            <a:pPr>
+              <a:defRPr sz="1400" b="0">
+                <a:solidFill>
+                  <a:srgbClr val="EBF2FA"/>
+                </a:solidFill>
+              </a:defRPr>
+            </a:pPr>
+            <a:r>
+              <a:t>KDD99 purity 0.797 is near the 0.795 majority-class reference. This five-cluster check is separate from the earlier four-cluster, 42-run controlled study. Spark local[n] uses one computer.</a:t>
+            </a:r>
+          </a:p>
+        </p:txBody>
+      </p:sp>
+      <p:sp>
+        <p:nvSpPr>
+          <p:cNvPr id="19" name="TextBox 18"/>
+          <p:cNvSpPr txBox="1"/>
+          <p:nvPr/>
+        </p:nvSpPr>
+        <p:spPr>
+          <a:xfrm>
+            <a:off x="612648" y="6446520"/>
+            <a:ext cx="10820095" cy="237744"/>
+          </a:xfrm>
+          <a:prstGeom prst="rect">
+            <a:avLst/>
+          </a:prstGeom>
+          <a:noFill/>
+        </p:spPr>
+        <p:txBody>
+          <a:bodyPr wrap="square" lIns="36576" rIns="36576">
+            <a:spAutoFit/>
+          </a:bodyPr>
+          <a:lstStyle/>
+          <a:p>
+            <a:pPr>
+              <a:defRPr sz="900" b="0">
+                <a:solidFill>
+                  <a:srgbClr val="566874"/>
+                </a:solidFill>
+                <a:latin typeface="Aptos"/>
+              </a:defRPr>
+            </a:pPr>
+            <a:r>
+              <a:t>CSCE 5300  /  GROUP 7</a:t>
+            </a:r>
+          </a:p>
+        </p:txBody>
+      </p:sp>
+      <p:sp>
+        <p:nvSpPr>
+          <p:cNvPr id="20" name="TextBox 19"/>
+          <p:cNvSpPr txBox="1"/>
+          <p:nvPr/>
+        </p:nvSpPr>
+        <p:spPr>
+          <a:xfrm>
+            <a:off x="11167567" y="6446520"/>
+            <a:ext cx="658368" cy="237744"/>
+          </a:xfrm>
+          <a:prstGeom prst="rect">
+            <a:avLst/>
+          </a:prstGeom>
+          <a:noFill/>
+        </p:spPr>
+        <p:txBody>
+          <a:bodyPr wrap="square" lIns="36576" rIns="36576">
+            <a:spAutoFit/>
+          </a:bodyPr>
+          <a:lstStyle/>
+          <a:p>
+            <a:pPr algn="r">
+              <a:defRPr sz="900" b="0">
+                <a:solidFill>
+                  <a:srgbClr val="566874"/>
+                </a:solidFill>
+                <a:latin typeface="Aptos"/>
+              </a:defRPr>
+            </a:pPr>
+            <a:r>
+              <a:t>23 / 24</a:t>
+            </a:r>
+          </a:p>
+        </p:txBody>
+      </p:sp>
+    </p:spTree>
+  </p:cSld>
+  <p:clrMapOvr>
+    <a:masterClrMapping/>
+  </p:clrMapOvr>
+</p:sld>
+</file>
+
+<file path=ppt/slides/slide24.xml><?xml version="1.0" encoding="utf-8"?>
 <p:sld xmlns:a="http://schemas.openxmlformats.org/drawingml/2006/main" xmlns:r="http://schemas.openxmlformats.org/officeDocument/2006/relationships" xmlns:p="http://schemas.openxmlformats.org/presentationml/2006/main">
   <p:cSld>
     <p:bg>
@@ -15421,7 +16569,7 @@
           <a:lstStyle/>
           <a:p>
             <a:r>
-              <a:t>23 / 23</a:t>
+              <a:t>24 / 24</a:t>
             </a:r>
           </a:p>
         </p:txBody>
@@ -15696,1082 +16844,6 @@
             </a:pPr>
             <a:r>
               <a:t>[5] Apache Software Foundation, “RDD Programming Guide,” Spark Documentation.</a:t>
-            </a:r>
-          </a:p>
-        </p:txBody>
-      </p:sp>
-    </p:spTree>
-  </p:cSld>
-  <p:clrMapOvr>
-    <a:masterClrMapping/>
-  </p:clrMapOvr>
-</p:sld>
-</file>
-
-<file path=ppt/slides/slide24.xml><?xml version="1.0" encoding="utf-8"?>
-<p:sld xmlns:a="http://schemas.openxmlformats.org/drawingml/2006/main" xmlns:p="http://schemas.openxmlformats.org/presentationml/2006/main" xmlns:r="http://schemas.openxmlformats.org/officeDocument/2006/relationships">
-  <p:cSld>
-    <p:bg>
-      <p:bgPr>
-        <a:solidFill>
-          <a:srgbClr val="0D192D"/>
-        </a:solidFill>
-        <a:effectLst/>
-      </p:bgPr>
-    </p:bg>
-    <p:spTree>
-      <p:nvGrpSpPr>
-        <p:cNvPr id="1" name=""/>
-        <p:cNvGrpSpPr/>
-        <p:nvPr/>
-      </p:nvGrpSpPr>
-      <p:grpSpPr/>
-      <p:sp>
-        <p:nvSpPr>
-          <p:cNvPr id="2" name="TextBox 1"/>
-          <p:cNvSpPr txBox="1"/>
-          <p:nvPr/>
-        </p:nvSpPr>
-        <p:spPr>
-          <a:xfrm>
-            <a:off x="594360" y="347472"/>
-            <a:ext cx="11003280" cy="329184"/>
-          </a:xfrm>
-          <a:prstGeom prst="rect">
-            <a:avLst/>
-          </a:prstGeom>
-          <a:noFill/>
-        </p:spPr>
-        <p:txBody>
-          <a:bodyPr wrap="square">
-            <a:spAutoFit/>
-          </a:bodyPr>
-          <a:lstStyle/>
-          <a:p>
-            <a:pPr>
-              <a:defRPr sz="1400" b="1">
-                <a:solidFill>
-                  <a:srgbClr val="5BCCE6"/>
-                </a:solidFill>
-              </a:defRPr>
-            </a:pPr>
-            <a:r>
-              <a:t>SUPPLEMENTARY VERIFICATION</a:t>
-            </a:r>
-          </a:p>
-        </p:txBody>
-      </p:sp>
-      <p:sp>
-        <p:nvSpPr>
-          <p:cNvPr id="3" name="TextBox 2"/>
-          <p:cNvSpPr txBox="1"/>
-          <p:nvPr/>
-        </p:nvSpPr>
-        <p:spPr>
-          <a:xfrm>
-            <a:off x="594360" y="822960"/>
-            <a:ext cx="11094720" cy="640080"/>
-          </a:xfrm>
-          <a:prstGeom prst="rect">
-            <a:avLst/>
-          </a:prstGeom>
-          <a:noFill/>
-        </p:spPr>
-        <p:txBody>
-          <a:bodyPr wrap="square">
-            <a:spAutoFit/>
-          </a:bodyPr>
-          <a:lstStyle/>
-          <a:p>
-            <a:pPr>
-              <a:defRPr sz="2700" b="1">
-                <a:solidFill>
-                  <a:srgbClr val="EBF2FA"/>
-                </a:solidFill>
-              </a:defRPr>
-            </a:pPr>
-            <a:r>
-              <a:t>Independent SSE &amp; cluster-quality checks</a:t>
-            </a:r>
-          </a:p>
-        </p:txBody>
-      </p:sp>
-      <p:sp>
-        <p:nvSpPr>
-          <p:cNvPr id="4" name="TextBox 3"/>
-          <p:cNvSpPr txBox="1"/>
-          <p:nvPr/>
-        </p:nvSpPr>
-        <p:spPr>
-          <a:xfrm>
-            <a:off x="594360" y="1527048"/>
-            <a:ext cx="11094720" cy="365760"/>
-          </a:xfrm>
-          <a:prstGeom prst="rect">
-            <a:avLst/>
-          </a:prstGeom>
-          <a:noFill/>
-        </p:spPr>
-        <p:txBody>
-          <a:bodyPr wrap="square">
-            <a:spAutoFit/>
-          </a:bodyPr>
-          <a:lstStyle/>
-          <a:p>
-            <a:pPr>
-              <a:defRPr sz="1600" b="0">
-                <a:solidFill>
-                  <a:srgbClr val="EBF2FA"/>
-                </a:solidFill>
-              </a:defRPr>
-            </a:pPr>
-            <a:r>
-              <a:t>1,000 records  •  2 partitions  •  seed 42  •  5 clusters</a:t>
-            </a:r>
-          </a:p>
-        </p:txBody>
-      </p:sp>
-      <p:sp>
-        <p:nvSpPr>
-          <p:cNvPr id="5" name="TextBox 4"/>
-          <p:cNvSpPr txBox="1"/>
-          <p:nvPr/>
-        </p:nvSpPr>
-        <p:spPr>
-          <a:xfrm>
-            <a:off x="594360" y="2057400"/>
-            <a:ext cx="3977639" cy="329184"/>
-          </a:xfrm>
-          <a:prstGeom prst="rect">
-            <a:avLst/>
-          </a:prstGeom>
-          <a:noFill/>
-        </p:spPr>
-        <p:txBody>
-          <a:bodyPr wrap="square">
-            <a:spAutoFit/>
-          </a:bodyPr>
-          <a:lstStyle/>
-          <a:p>
-            <a:pPr>
-              <a:defRPr sz="1500" b="1">
-                <a:solidFill>
-                  <a:srgbClr val="5BCCE6"/>
-                </a:solidFill>
-              </a:defRPr>
-            </a:pPr>
-            <a:r>
-              <a:t>Dataset / method</a:t>
-            </a:r>
-          </a:p>
-        </p:txBody>
-      </p:sp>
-      <p:sp>
-        <p:nvSpPr>
-          <p:cNvPr id="6" name="TextBox 5"/>
-          <p:cNvSpPr txBox="1"/>
-          <p:nvPr/>
-        </p:nvSpPr>
-        <p:spPr>
-          <a:xfrm>
-            <a:off x="4736592" y="2057400"/>
-            <a:ext cx="1325880" cy="329184"/>
-          </a:xfrm>
-          <a:prstGeom prst="rect">
-            <a:avLst/>
-          </a:prstGeom>
-          <a:noFill/>
-        </p:spPr>
-        <p:txBody>
-          <a:bodyPr wrap="square">
-            <a:spAutoFit/>
-          </a:bodyPr>
-          <a:lstStyle/>
-          <a:p>
-            <a:pPr>
-              <a:defRPr sz="1500" b="1">
-                <a:solidFill>
-                  <a:srgbClr val="5BCCE6"/>
-                </a:solidFill>
-              </a:defRPr>
-            </a:pPr>
-            <a:r>
-              <a:t>SSE</a:t>
-            </a:r>
-          </a:p>
-        </p:txBody>
-      </p:sp>
-      <p:sp>
-        <p:nvSpPr>
-          <p:cNvPr id="7" name="TextBox 6"/>
-          <p:cNvSpPr txBox="1"/>
-          <p:nvPr/>
-        </p:nvSpPr>
-        <p:spPr>
-          <a:xfrm>
-            <a:off x="6446520" y="2057400"/>
-            <a:ext cx="1005840" cy="329184"/>
-          </a:xfrm>
-          <a:prstGeom prst="rect">
-            <a:avLst/>
-          </a:prstGeom>
-          <a:noFill/>
-        </p:spPr>
-        <p:txBody>
-          <a:bodyPr wrap="square">
-            <a:spAutoFit/>
-          </a:bodyPr>
-          <a:lstStyle/>
-          <a:p>
-            <a:pPr>
-              <a:defRPr sz="1500" b="1">
-                <a:solidFill>
-                  <a:srgbClr val="5BCCE6"/>
-                </a:solidFill>
-              </a:defRPr>
-            </a:pPr>
-            <a:r>
-              <a:t>Purity</a:t>
-            </a:r>
-          </a:p>
-        </p:txBody>
-      </p:sp>
-      <p:sp>
-        <p:nvSpPr>
-          <p:cNvPr id="8" name="TextBox 7"/>
-          <p:cNvSpPr txBox="1"/>
-          <p:nvPr/>
-        </p:nvSpPr>
-        <p:spPr>
-          <a:xfrm>
-            <a:off x="7772400" y="2057400"/>
-            <a:ext cx="914400" cy="329184"/>
-          </a:xfrm>
-          <a:prstGeom prst="rect">
-            <a:avLst/>
-          </a:prstGeom>
-          <a:noFill/>
-        </p:spPr>
-        <p:txBody>
-          <a:bodyPr wrap="square">
-            <a:spAutoFit/>
-          </a:bodyPr>
-          <a:lstStyle/>
-          <a:p>
-            <a:pPr>
-              <a:defRPr sz="1500" b="1">
-                <a:solidFill>
-                  <a:srgbClr val="5BCCE6"/>
-                </a:solidFill>
-              </a:defRPr>
-            </a:pPr>
-            <a:r>
-              <a:t>ARI</a:t>
-            </a:r>
-          </a:p>
-        </p:txBody>
-      </p:sp>
-      <p:sp>
-        <p:nvSpPr>
-          <p:cNvPr id="9" name="TextBox 8"/>
-          <p:cNvSpPr txBox="1"/>
-          <p:nvPr/>
-        </p:nvSpPr>
-        <p:spPr>
-          <a:xfrm>
-            <a:off x="8997696" y="2057400"/>
-            <a:ext cx="914400" cy="329184"/>
-          </a:xfrm>
-          <a:prstGeom prst="rect">
-            <a:avLst/>
-          </a:prstGeom>
-          <a:noFill/>
-        </p:spPr>
-        <p:txBody>
-          <a:bodyPr wrap="square">
-            <a:spAutoFit/>
-          </a:bodyPr>
-          <a:lstStyle/>
-          <a:p>
-            <a:pPr>
-              <a:defRPr sz="1500" b="1">
-                <a:solidFill>
-                  <a:srgbClr val="5BCCE6"/>
-                </a:solidFill>
-              </a:defRPr>
-            </a:pPr>
-            <a:r>
-              <a:t>NMI</a:t>
-            </a:r>
-          </a:p>
-        </p:txBody>
-      </p:sp>
-      <p:sp>
-        <p:nvSpPr>
-          <p:cNvPr id="10" name="TextBox 9"/>
-          <p:cNvSpPr txBox="1"/>
-          <p:nvPr/>
-        </p:nvSpPr>
-        <p:spPr>
-          <a:xfrm>
-            <a:off x="594360" y="2496312"/>
-            <a:ext cx="3977639" cy="384048"/>
-          </a:xfrm>
-          <a:prstGeom prst="rect">
-            <a:avLst/>
-          </a:prstGeom>
-          <a:noFill/>
-        </p:spPr>
-        <p:txBody>
-          <a:bodyPr wrap="square">
-            <a:spAutoFit/>
-          </a:bodyPr>
-          <a:lstStyle/>
-          <a:p>
-            <a:pPr>
-              <a:defRPr sz="1400" b="0">
-                <a:solidFill>
-                  <a:srgbClr val="EBF2FA"/>
-                </a:solidFill>
-              </a:defRPr>
-            </a:pPr>
-            <a:r>
-              <a:t>Synthetic • Traditional</a:t>
-            </a:r>
-          </a:p>
-        </p:txBody>
-      </p:sp>
-      <p:sp>
-        <p:nvSpPr>
-          <p:cNvPr id="11" name="TextBox 10"/>
-          <p:cNvSpPr txBox="1"/>
-          <p:nvPr/>
-        </p:nvSpPr>
-        <p:spPr>
-          <a:xfrm>
-            <a:off x="4736592" y="2496312"/>
-            <a:ext cx="1325880" cy="384048"/>
-          </a:xfrm>
-          <a:prstGeom prst="rect">
-            <a:avLst/>
-          </a:prstGeom>
-          <a:noFill/>
-        </p:spPr>
-        <p:txBody>
-          <a:bodyPr wrap="square">
-            <a:spAutoFit/>
-          </a:bodyPr>
-          <a:lstStyle/>
-          <a:p>
-            <a:pPr>
-              <a:defRPr sz="1400" b="0">
-                <a:solidFill>
-                  <a:srgbClr val="EBF2FA"/>
-                </a:solidFill>
-              </a:defRPr>
-            </a:pPr>
-            <a:r>
-              <a:t>1,032.370</a:t>
-            </a:r>
-          </a:p>
-        </p:txBody>
-      </p:sp>
-      <p:sp>
-        <p:nvSpPr>
-          <p:cNvPr id="12" name="TextBox 11"/>
-          <p:cNvSpPr txBox="1"/>
-          <p:nvPr/>
-        </p:nvSpPr>
-        <p:spPr>
-          <a:xfrm>
-            <a:off x="6446520" y="2496312"/>
-            <a:ext cx="1005840" cy="384048"/>
-          </a:xfrm>
-          <a:prstGeom prst="rect">
-            <a:avLst/>
-          </a:prstGeom>
-          <a:noFill/>
-        </p:spPr>
-        <p:txBody>
-          <a:bodyPr wrap="square">
-            <a:spAutoFit/>
-          </a:bodyPr>
-          <a:lstStyle/>
-          <a:p>
-            <a:pPr>
-              <a:defRPr sz="1400" b="0">
-                <a:solidFill>
-                  <a:srgbClr val="EBF2FA"/>
-                </a:solidFill>
-              </a:defRPr>
-            </a:pPr>
-            <a:r>
-              <a:t>1.000</a:t>
-            </a:r>
-          </a:p>
-        </p:txBody>
-      </p:sp>
-      <p:sp>
-        <p:nvSpPr>
-          <p:cNvPr id="13" name="TextBox 12"/>
-          <p:cNvSpPr txBox="1"/>
-          <p:nvPr/>
-        </p:nvSpPr>
-        <p:spPr>
-          <a:xfrm>
-            <a:off x="7772400" y="2496312"/>
-            <a:ext cx="914400" cy="384048"/>
-          </a:xfrm>
-          <a:prstGeom prst="rect">
-            <a:avLst/>
-          </a:prstGeom>
-          <a:noFill/>
-        </p:spPr>
-        <p:txBody>
-          <a:bodyPr wrap="square">
-            <a:spAutoFit/>
-          </a:bodyPr>
-          <a:lstStyle/>
-          <a:p>
-            <a:pPr>
-              <a:defRPr sz="1400" b="0">
-                <a:solidFill>
-                  <a:srgbClr val="EBF2FA"/>
-                </a:solidFill>
-              </a:defRPr>
-            </a:pPr>
-            <a:r>
-              <a:t>1.000</a:t>
-            </a:r>
-          </a:p>
-        </p:txBody>
-      </p:sp>
-      <p:sp>
-        <p:nvSpPr>
-          <p:cNvPr id="14" name="TextBox 13"/>
-          <p:cNvSpPr txBox="1"/>
-          <p:nvPr/>
-        </p:nvSpPr>
-        <p:spPr>
-          <a:xfrm>
-            <a:off x="8997696" y="2496312"/>
-            <a:ext cx="914400" cy="384048"/>
-          </a:xfrm>
-          <a:prstGeom prst="rect">
-            <a:avLst/>
-          </a:prstGeom>
-          <a:noFill/>
-        </p:spPr>
-        <p:txBody>
-          <a:bodyPr wrap="square">
-            <a:spAutoFit/>
-          </a:bodyPr>
-          <a:lstStyle/>
-          <a:p>
-            <a:pPr>
-              <a:defRPr sz="1400" b="0">
-                <a:solidFill>
-                  <a:srgbClr val="EBF2FA"/>
-                </a:solidFill>
-              </a:defRPr>
-            </a:pPr>
-            <a:r>
-              <a:t>1.000</a:t>
-            </a:r>
-          </a:p>
-        </p:txBody>
-      </p:sp>
-      <p:sp>
-        <p:nvSpPr>
-          <p:cNvPr id="15" name="TextBox 14"/>
-          <p:cNvSpPr txBox="1"/>
-          <p:nvPr/>
-        </p:nvSpPr>
-        <p:spPr>
-          <a:xfrm>
-            <a:off x="594360" y="2935224"/>
-            <a:ext cx="3977639" cy="384048"/>
-          </a:xfrm>
-          <a:prstGeom prst="rect">
-            <a:avLst/>
-          </a:prstGeom>
-          <a:noFill/>
-        </p:spPr>
-        <p:txBody>
-          <a:bodyPr wrap="square">
-            <a:spAutoFit/>
-          </a:bodyPr>
-          <a:lstStyle/>
-          <a:p>
-            <a:pPr>
-              <a:defRPr sz="1400" b="0">
-                <a:solidFill>
-                  <a:srgbClr val="EBF2FA"/>
-                </a:solidFill>
-              </a:defRPr>
-            </a:pPr>
-            <a:r>
-              <a:t>Synthetic • Spark local[1]/[2]</a:t>
-            </a:r>
-          </a:p>
-        </p:txBody>
-      </p:sp>
-      <p:sp>
-        <p:nvSpPr>
-          <p:cNvPr id="16" name="TextBox 15"/>
-          <p:cNvSpPr txBox="1"/>
-          <p:nvPr/>
-        </p:nvSpPr>
-        <p:spPr>
-          <a:xfrm>
-            <a:off x="4736592" y="2935224"/>
-            <a:ext cx="1325880" cy="384048"/>
-          </a:xfrm>
-          <a:prstGeom prst="rect">
-            <a:avLst/>
-          </a:prstGeom>
-          <a:noFill/>
-        </p:spPr>
-        <p:txBody>
-          <a:bodyPr wrap="square">
-            <a:spAutoFit/>
-          </a:bodyPr>
-          <a:lstStyle/>
-          <a:p>
-            <a:pPr>
-              <a:defRPr sz="1400" b="0">
-                <a:solidFill>
-                  <a:srgbClr val="EBF2FA"/>
-                </a:solidFill>
-              </a:defRPr>
-            </a:pPr>
-            <a:r>
-              <a:t>1,032.370</a:t>
-            </a:r>
-          </a:p>
-        </p:txBody>
-      </p:sp>
-      <p:sp>
-        <p:nvSpPr>
-          <p:cNvPr id="17" name="TextBox 16"/>
-          <p:cNvSpPr txBox="1"/>
-          <p:nvPr/>
-        </p:nvSpPr>
-        <p:spPr>
-          <a:xfrm>
-            <a:off x="6446520" y="2935224"/>
-            <a:ext cx="1005840" cy="384048"/>
-          </a:xfrm>
-          <a:prstGeom prst="rect">
-            <a:avLst/>
-          </a:prstGeom>
-          <a:noFill/>
-        </p:spPr>
-        <p:txBody>
-          <a:bodyPr wrap="square">
-            <a:spAutoFit/>
-          </a:bodyPr>
-          <a:lstStyle/>
-          <a:p>
-            <a:pPr>
-              <a:defRPr sz="1400" b="0">
-                <a:solidFill>
-                  <a:srgbClr val="EBF2FA"/>
-                </a:solidFill>
-              </a:defRPr>
-            </a:pPr>
-            <a:r>
-              <a:t>1.000</a:t>
-            </a:r>
-          </a:p>
-        </p:txBody>
-      </p:sp>
-      <p:sp>
-        <p:nvSpPr>
-          <p:cNvPr id="18" name="TextBox 17"/>
-          <p:cNvSpPr txBox="1"/>
-          <p:nvPr/>
-        </p:nvSpPr>
-        <p:spPr>
-          <a:xfrm>
-            <a:off x="7772400" y="2935224"/>
-            <a:ext cx="914400" cy="384048"/>
-          </a:xfrm>
-          <a:prstGeom prst="rect">
-            <a:avLst/>
-          </a:prstGeom>
-          <a:noFill/>
-        </p:spPr>
-        <p:txBody>
-          <a:bodyPr wrap="square">
-            <a:spAutoFit/>
-          </a:bodyPr>
-          <a:lstStyle/>
-          <a:p>
-            <a:pPr>
-              <a:defRPr sz="1400" b="0">
-                <a:solidFill>
-                  <a:srgbClr val="EBF2FA"/>
-                </a:solidFill>
-              </a:defRPr>
-            </a:pPr>
-            <a:r>
-              <a:t>1.000</a:t>
-            </a:r>
-          </a:p>
-        </p:txBody>
-      </p:sp>
-      <p:sp>
-        <p:nvSpPr>
-          <p:cNvPr id="19" name="TextBox 18"/>
-          <p:cNvSpPr txBox="1"/>
-          <p:nvPr/>
-        </p:nvSpPr>
-        <p:spPr>
-          <a:xfrm>
-            <a:off x="8997696" y="2935224"/>
-            <a:ext cx="914400" cy="384048"/>
-          </a:xfrm>
-          <a:prstGeom prst="rect">
-            <a:avLst/>
-          </a:prstGeom>
-          <a:noFill/>
-        </p:spPr>
-        <p:txBody>
-          <a:bodyPr wrap="square">
-            <a:spAutoFit/>
-          </a:bodyPr>
-          <a:lstStyle/>
-          <a:p>
-            <a:pPr>
-              <a:defRPr sz="1400" b="0">
-                <a:solidFill>
-                  <a:srgbClr val="EBF2FA"/>
-                </a:solidFill>
-              </a:defRPr>
-            </a:pPr>
-            <a:r>
-              <a:t>1.000</a:t>
-            </a:r>
-          </a:p>
-        </p:txBody>
-      </p:sp>
-      <p:sp>
-        <p:nvSpPr>
-          <p:cNvPr id="20" name="TextBox 19"/>
-          <p:cNvSpPr txBox="1"/>
-          <p:nvPr/>
-        </p:nvSpPr>
-        <p:spPr>
-          <a:xfrm>
-            <a:off x="594360" y="3374136"/>
-            <a:ext cx="3977639" cy="384048"/>
-          </a:xfrm>
-          <a:prstGeom prst="rect">
-            <a:avLst/>
-          </a:prstGeom>
-          <a:noFill/>
-        </p:spPr>
-        <p:txBody>
-          <a:bodyPr wrap="square">
-            <a:spAutoFit/>
-          </a:bodyPr>
-          <a:lstStyle/>
-          <a:p>
-            <a:pPr>
-              <a:defRPr sz="1400" b="0">
-                <a:solidFill>
-                  <a:srgbClr val="EBF2FA"/>
-                </a:solidFill>
-              </a:defRPr>
-            </a:pPr>
-            <a:r>
-              <a:t>KDD99 • Traditional</a:t>
-            </a:r>
-          </a:p>
-        </p:txBody>
-      </p:sp>
-      <p:sp>
-        <p:nvSpPr>
-          <p:cNvPr id="21" name="TextBox 20"/>
-          <p:cNvSpPr txBox="1"/>
-          <p:nvPr/>
-        </p:nvSpPr>
-        <p:spPr>
-          <a:xfrm>
-            <a:off x="4736592" y="3374136"/>
-            <a:ext cx="1325880" cy="384048"/>
-          </a:xfrm>
-          <a:prstGeom prst="rect">
-            <a:avLst/>
-          </a:prstGeom>
-          <a:noFill/>
-        </p:spPr>
-        <p:txBody>
-          <a:bodyPr wrap="square">
-            <a:spAutoFit/>
-          </a:bodyPr>
-          <a:lstStyle/>
-          <a:p>
-            <a:pPr>
-              <a:defRPr sz="1400" b="0">
-                <a:solidFill>
-                  <a:srgbClr val="EBF2FA"/>
-                </a:solidFill>
-              </a:defRPr>
-            </a:pPr>
-            <a:r>
-              <a:t>9,342.830</a:t>
-            </a:r>
-          </a:p>
-        </p:txBody>
-      </p:sp>
-      <p:sp>
-        <p:nvSpPr>
-          <p:cNvPr id="22" name="TextBox 21"/>
-          <p:cNvSpPr txBox="1"/>
-          <p:nvPr/>
-        </p:nvSpPr>
-        <p:spPr>
-          <a:xfrm>
-            <a:off x="6446520" y="3374136"/>
-            <a:ext cx="1005840" cy="384048"/>
-          </a:xfrm>
-          <a:prstGeom prst="rect">
-            <a:avLst/>
-          </a:prstGeom>
-          <a:noFill/>
-        </p:spPr>
-        <p:txBody>
-          <a:bodyPr wrap="square">
-            <a:spAutoFit/>
-          </a:bodyPr>
-          <a:lstStyle/>
-          <a:p>
-            <a:pPr>
-              <a:defRPr sz="1400" b="0">
-                <a:solidFill>
-                  <a:srgbClr val="EBF2FA"/>
-                </a:solidFill>
-              </a:defRPr>
-            </a:pPr>
-            <a:r>
-              <a:t>0.975</a:t>
-            </a:r>
-          </a:p>
-        </p:txBody>
-      </p:sp>
-      <p:sp>
-        <p:nvSpPr>
-          <p:cNvPr id="23" name="TextBox 22"/>
-          <p:cNvSpPr txBox="1"/>
-          <p:nvPr/>
-        </p:nvSpPr>
-        <p:spPr>
-          <a:xfrm>
-            <a:off x="7772400" y="3374136"/>
-            <a:ext cx="914400" cy="384048"/>
-          </a:xfrm>
-          <a:prstGeom prst="rect">
-            <a:avLst/>
-          </a:prstGeom>
-          <a:noFill/>
-        </p:spPr>
-        <p:txBody>
-          <a:bodyPr wrap="square">
-            <a:spAutoFit/>
-          </a:bodyPr>
-          <a:lstStyle/>
-          <a:p>
-            <a:pPr>
-              <a:defRPr sz="1400" b="0">
-                <a:solidFill>
-                  <a:srgbClr val="EBF2FA"/>
-                </a:solidFill>
-              </a:defRPr>
-            </a:pPr>
-            <a:r>
-              <a:t>0.432</a:t>
-            </a:r>
-          </a:p>
-        </p:txBody>
-      </p:sp>
-      <p:sp>
-        <p:nvSpPr>
-          <p:cNvPr id="24" name="TextBox 23"/>
-          <p:cNvSpPr txBox="1"/>
-          <p:nvPr/>
-        </p:nvSpPr>
-        <p:spPr>
-          <a:xfrm>
-            <a:off x="8997696" y="3374136"/>
-            <a:ext cx="914400" cy="384048"/>
-          </a:xfrm>
-          <a:prstGeom prst="rect">
-            <a:avLst/>
-          </a:prstGeom>
-          <a:noFill/>
-        </p:spPr>
-        <p:txBody>
-          <a:bodyPr wrap="square">
-            <a:spAutoFit/>
-          </a:bodyPr>
-          <a:lstStyle/>
-          <a:p>
-            <a:pPr>
-              <a:defRPr sz="1400" b="0">
-                <a:solidFill>
-                  <a:srgbClr val="EBF2FA"/>
-                </a:solidFill>
-              </a:defRPr>
-            </a:pPr>
-            <a:r>
-              <a:t>0.535</a:t>
-            </a:r>
-          </a:p>
-        </p:txBody>
-      </p:sp>
-      <p:sp>
-        <p:nvSpPr>
-          <p:cNvPr id="25" name="TextBox 24"/>
-          <p:cNvSpPr txBox="1"/>
-          <p:nvPr/>
-        </p:nvSpPr>
-        <p:spPr>
-          <a:xfrm>
-            <a:off x="594360" y="3813048"/>
-            <a:ext cx="3977639" cy="384048"/>
-          </a:xfrm>
-          <a:prstGeom prst="rect">
-            <a:avLst/>
-          </a:prstGeom>
-          <a:noFill/>
-        </p:spPr>
-        <p:txBody>
-          <a:bodyPr wrap="square">
-            <a:spAutoFit/>
-          </a:bodyPr>
-          <a:lstStyle/>
-          <a:p>
-            <a:pPr>
-              <a:defRPr sz="1400" b="0">
-                <a:solidFill>
-                  <a:srgbClr val="EBF2FA"/>
-                </a:solidFill>
-              </a:defRPr>
-            </a:pPr>
-            <a:r>
-              <a:t>KDD99 • Spark local[1]/[2]</a:t>
-            </a:r>
-          </a:p>
-        </p:txBody>
-      </p:sp>
-      <p:sp>
-        <p:nvSpPr>
-          <p:cNvPr id="26" name="TextBox 25"/>
-          <p:cNvSpPr txBox="1"/>
-          <p:nvPr/>
-        </p:nvSpPr>
-        <p:spPr>
-          <a:xfrm>
-            <a:off x="4736592" y="3813048"/>
-            <a:ext cx="1325880" cy="384048"/>
-          </a:xfrm>
-          <a:prstGeom prst="rect">
-            <a:avLst/>
-          </a:prstGeom>
-          <a:noFill/>
-        </p:spPr>
-        <p:txBody>
-          <a:bodyPr wrap="square">
-            <a:spAutoFit/>
-          </a:bodyPr>
-          <a:lstStyle/>
-          <a:p>
-            <a:pPr>
-              <a:defRPr sz="1400" b="0">
-                <a:solidFill>
-                  <a:srgbClr val="EBF2FA"/>
-                </a:solidFill>
-              </a:defRPr>
-            </a:pPr>
-            <a:r>
-              <a:t>21,072.555</a:t>
-            </a:r>
-          </a:p>
-        </p:txBody>
-      </p:sp>
-      <p:sp>
-        <p:nvSpPr>
-          <p:cNvPr id="27" name="TextBox 26"/>
-          <p:cNvSpPr txBox="1"/>
-          <p:nvPr/>
-        </p:nvSpPr>
-        <p:spPr>
-          <a:xfrm>
-            <a:off x="6446520" y="3813048"/>
-            <a:ext cx="1005840" cy="384048"/>
-          </a:xfrm>
-          <a:prstGeom prst="rect">
-            <a:avLst/>
-          </a:prstGeom>
-          <a:noFill/>
-        </p:spPr>
-        <p:txBody>
-          <a:bodyPr wrap="square">
-            <a:spAutoFit/>
-          </a:bodyPr>
-          <a:lstStyle/>
-          <a:p>
-            <a:pPr>
-              <a:defRPr sz="1400" b="0">
-                <a:solidFill>
-                  <a:srgbClr val="EBF2FA"/>
-                </a:solidFill>
-              </a:defRPr>
-            </a:pPr>
-            <a:r>
-              <a:t>0.797</a:t>
-            </a:r>
-          </a:p>
-        </p:txBody>
-      </p:sp>
-      <p:sp>
-        <p:nvSpPr>
-          <p:cNvPr id="28" name="TextBox 27"/>
-          <p:cNvSpPr txBox="1"/>
-          <p:nvPr/>
-        </p:nvSpPr>
-        <p:spPr>
-          <a:xfrm>
-            <a:off x="7772400" y="3813048"/>
-            <a:ext cx="914400" cy="384048"/>
-          </a:xfrm>
-          <a:prstGeom prst="rect">
-            <a:avLst/>
-          </a:prstGeom>
-          <a:noFill/>
-        </p:spPr>
-        <p:txBody>
-          <a:bodyPr wrap="square">
-            <a:spAutoFit/>
-          </a:bodyPr>
-          <a:lstStyle/>
-          <a:p>
-            <a:pPr>
-              <a:defRPr sz="1400" b="0">
-                <a:solidFill>
-                  <a:srgbClr val="EBF2FA"/>
-                </a:solidFill>
-              </a:defRPr>
-            </a:pPr>
-            <a:r>
-              <a:t>-0.005</a:t>
-            </a:r>
-          </a:p>
-        </p:txBody>
-      </p:sp>
-      <p:sp>
-        <p:nvSpPr>
-          <p:cNvPr id="29" name="TextBox 28"/>
-          <p:cNvSpPr txBox="1"/>
-          <p:nvPr/>
-        </p:nvSpPr>
-        <p:spPr>
-          <a:xfrm>
-            <a:off x="8997696" y="3813048"/>
-            <a:ext cx="914400" cy="384048"/>
-          </a:xfrm>
-          <a:prstGeom prst="rect">
-            <a:avLst/>
-          </a:prstGeom>
-          <a:noFill/>
-        </p:spPr>
-        <p:txBody>
-          <a:bodyPr wrap="square">
-            <a:spAutoFit/>
-          </a:bodyPr>
-          <a:lstStyle/>
-          <a:p>
-            <a:pPr>
-              <a:defRPr sz="1400" b="0">
-                <a:solidFill>
-                  <a:srgbClr val="EBF2FA"/>
-                </a:solidFill>
-              </a:defRPr>
-            </a:pPr>
-            <a:r>
-              <a:t>0.011</a:t>
-            </a:r>
-          </a:p>
-        </p:txBody>
-      </p:sp>
-      <p:sp>
-        <p:nvSpPr>
-          <p:cNvPr id="30" name="TextBox 29"/>
-          <p:cNvSpPr txBox="1"/>
-          <p:nvPr/>
-        </p:nvSpPr>
-        <p:spPr>
-          <a:xfrm>
-            <a:off x="594360" y="4498848"/>
-            <a:ext cx="11094720" cy="411480"/>
-          </a:xfrm>
-          <a:prstGeom prst="rect">
-            <a:avLst/>
-          </a:prstGeom>
-          <a:noFill/>
-        </p:spPr>
-        <p:txBody>
-          <a:bodyPr wrap="square">
-            <a:spAutoFit/>
-          </a:bodyPr>
-          <a:lstStyle/>
-          <a:p>
-            <a:pPr>
-              <a:defRPr sz="1500" b="1">
-                <a:solidFill>
-                  <a:srgbClr val="5BCCE6"/>
-                </a:solidFill>
-              </a:defRPr>
-            </a:pPr>
-            <a:r>
-              <a:t>All four Spark runs passed independent SSE, assignment, and cluster-count checks.</a:t>
-            </a:r>
-          </a:p>
-        </p:txBody>
-      </p:sp>
-      <p:sp>
-        <p:nvSpPr>
-          <p:cNvPr id="31" name="TextBox 30"/>
-          <p:cNvSpPr txBox="1"/>
-          <p:nvPr/>
-        </p:nvSpPr>
-        <p:spPr>
-          <a:xfrm>
-            <a:off x="594360" y="5010912"/>
-            <a:ext cx="11094720" cy="960120"/>
-          </a:xfrm>
-          <a:prstGeom prst="rect">
-            <a:avLst/>
-          </a:prstGeom>
-          <a:noFill/>
-        </p:spPr>
-        <p:txBody>
-          <a:bodyPr wrap="square">
-            <a:spAutoFit/>
-          </a:bodyPr>
-          <a:lstStyle/>
-          <a:p>
-            <a:pPr>
-              <a:defRPr sz="1400" b="0">
-                <a:solidFill>
-                  <a:srgbClr val="EBF2FA"/>
-                </a:solidFill>
-              </a:defRPr>
-            </a:pPr>
-            <a:r>
-              <a:t>KDD99 purity 0.797 is near the 0.795 majority-class reference. This five-cluster check is separate from the earlier four-cluster, 42-run controlled study. Spark local[n] uses one computer.</a:t>
             </a:r>
           </a:p>
         </p:txBody>
@@ -17076,7 +17148,7 @@
           <a:lstStyle/>
           <a:p>
             <a:r>
-              <a:t>03 / 23</a:t>
+              <a:t>03 / 24</a:t>
             </a:r>
           </a:p>
         </p:txBody>
@@ -17721,7 +17793,7 @@
           <a:lstStyle/>
           <a:p>
             <a:r>
-              <a:t>04 / 23</a:t>
+              <a:t>04 / 24</a:t>
             </a:r>
           </a:p>
         </p:txBody>
@@ -18745,7 +18817,7 @@
           <a:lstStyle/>
           <a:p>
             <a:r>
-              <a:t>05 / 23</a:t>
+              <a:t>05 / 24</a:t>
             </a:r>
           </a:p>
         </p:txBody>
@@ -19962,7 +20034,7 @@
           <a:lstStyle/>
           <a:p>
             <a:r>
-              <a:t>06 / 23</a:t>
+              <a:t>06 / 24</a:t>
             </a:r>
           </a:p>
         </p:txBody>
@@ -21168,7 +21240,7 @@
               </a:defRPr>
             </a:pPr>
             <a:r>
-              <a:t>07 / 23</a:t>
+              <a:t>07 / 24</a:t>
             </a:r>
           </a:p>
         </p:txBody>
@@ -21451,7 +21523,7 @@
           <a:lstStyle/>
           <a:p>
             <a:r>
-              <a:t>08 / 23</a:t>
+              <a:t>08 / 24</a:t>
             </a:r>
           </a:p>
         </p:txBody>
@@ -22894,7 +22966,7 @@
               </a:defRPr>
             </a:pPr>
             <a:r>
-              <a:t>09 / 23</a:t>
+              <a:t>09 / 24</a:t>
             </a:r>
           </a:p>
         </p:txBody>
